--- a/docs/KOI_Content_Pack_Overview.pptx
+++ b/docs/KOI_Content_Pack_Overview.pptx
@@ -2459,11 +2459,11 @@
         <p:spPr>
           <a:xfrm>
             <a:off x="548640" y="1554480"/>
-            <a:ext cx="3474720" cy="3063240"/>
+            <a:ext cx="3474720" cy="2606040"/>
           </a:xfrm>
           <a:prstGeom prst="roundRect">
             <a:avLst>
-              <a:gd name="adj" fmla="val 1493"/>
+              <a:gd name="adj" fmla="val 1754"/>
             </a:avLst>
           </a:prstGeom>
           <a:solidFill>
@@ -2591,16 +2591,16 @@
         <p:spPr>
           <a:xfrm>
             <a:off x="841248" y="2304288"/>
-            <a:ext cx="2889504" cy="2103120"/>
-          </a:xfrm>
-          <a:prstGeom prst="rect">
-            <a:avLst/>
-          </a:prstGeom>
-          <a:noFill/>
-          <a:ln/>
-        </p:spPr>
-        <p:txBody>
-          <a:bodyPr wrap="square" lIns="0" tIns="0" rIns="0" bIns="0" rtlCol="0" anchor="ctr"/>
+            <a:ext cx="2889504" cy="1737360"/>
+          </a:xfrm>
+          <a:prstGeom prst="rect">
+            <a:avLst/>
+          </a:prstGeom>
+          <a:noFill/>
+          <a:ln/>
+        </p:spPr>
+        <p:txBody>
+          <a:bodyPr wrap="square" lIns="0" tIns="0" rIns="0" bIns="0" rtlCol="0" anchor="t"/>
           <a:lstStyle/>
           <a:p>
             <a:pPr marL="342900" indent="-342900">
@@ -2608,7 +2608,7 @@
                 <a:spcPts val="1400"/>
               </a:lnSpc>
               <a:spcAft>
-                <a:spcPts val="900"/>
+                <a:spcPts val="2200"/>
               </a:spcAft>
               <a:buSzPct val="100000"/>
               <a:buChar char="•"/>
@@ -2632,7 +2632,7 @@
                 <a:spcPts val="1400"/>
               </a:lnSpc>
               <a:spcAft>
-                <a:spcPts val="900"/>
+                <a:spcPts val="2200"/>
               </a:spcAft>
               <a:buSzPct val="100000"/>
               <a:buChar char="•"/>
@@ -2656,7 +2656,7 @@
                 <a:spcPts val="1400"/>
               </a:lnSpc>
               <a:spcAft>
-                <a:spcPts val="900"/>
+                <a:spcPts val="2200"/>
               </a:spcAft>
               <a:buSzPct val="100000"/>
               <a:buChar char="•"/>
@@ -2685,11 +2685,11 @@
         <p:spPr>
           <a:xfrm>
             <a:off x="4343400" y="1554480"/>
-            <a:ext cx="3474720" cy="3063240"/>
+            <a:ext cx="3474720" cy="2606040"/>
           </a:xfrm>
           <a:prstGeom prst="roundRect">
             <a:avLst>
-              <a:gd name="adj" fmla="val 1493"/>
+              <a:gd name="adj" fmla="val 1754"/>
             </a:avLst>
           </a:prstGeom>
           <a:solidFill>
@@ -2817,16 +2817,16 @@
         <p:spPr>
           <a:xfrm>
             <a:off x="4636008" y="2304288"/>
-            <a:ext cx="2889504" cy="2103120"/>
-          </a:xfrm>
-          <a:prstGeom prst="rect">
-            <a:avLst/>
-          </a:prstGeom>
-          <a:noFill/>
-          <a:ln/>
-        </p:spPr>
-        <p:txBody>
-          <a:bodyPr wrap="square" lIns="0" tIns="0" rIns="0" bIns="0" rtlCol="0" anchor="ctr"/>
+            <a:ext cx="2889504" cy="1737360"/>
+          </a:xfrm>
+          <a:prstGeom prst="rect">
+            <a:avLst/>
+          </a:prstGeom>
+          <a:noFill/>
+          <a:ln/>
+        </p:spPr>
+        <p:txBody>
+          <a:bodyPr wrap="square" lIns="0" tIns="0" rIns="0" bIns="0" rtlCol="0" anchor="t"/>
           <a:lstStyle/>
           <a:p>
             <a:pPr marL="342900" indent="-342900">
@@ -2834,7 +2834,7 @@
                 <a:spcPts val="1400"/>
               </a:lnSpc>
               <a:spcAft>
-                <a:spcPts val="900"/>
+                <a:spcPts val="2200"/>
               </a:spcAft>
               <a:buSzPct val="100000"/>
               <a:buChar char="•"/>
@@ -2858,7 +2858,7 @@
                 <a:spcPts val="1400"/>
               </a:lnSpc>
               <a:spcAft>
-                <a:spcPts val="900"/>
+                <a:spcPts val="2200"/>
               </a:spcAft>
               <a:buSzPct val="100000"/>
               <a:buChar char="•"/>
@@ -2882,7 +2882,7 @@
                 <a:spcPts val="1400"/>
               </a:lnSpc>
               <a:spcAft>
-                <a:spcPts val="900"/>
+                <a:spcPts val="2200"/>
               </a:spcAft>
               <a:buSzPct val="100000"/>
               <a:buChar char="•"/>
@@ -2911,11 +2911,11 @@
         <p:spPr>
           <a:xfrm>
             <a:off x="8138160" y="1554480"/>
-            <a:ext cx="3474720" cy="3063240"/>
+            <a:ext cx="3474720" cy="2606040"/>
           </a:xfrm>
           <a:prstGeom prst="roundRect">
             <a:avLst>
-              <a:gd name="adj" fmla="val 1493"/>
+              <a:gd name="adj" fmla="val 1754"/>
             </a:avLst>
           </a:prstGeom>
           <a:solidFill>
@@ -3043,16 +3043,16 @@
         <p:spPr>
           <a:xfrm>
             <a:off x="8430768" y="2304288"/>
-            <a:ext cx="2889504" cy="2103120"/>
-          </a:xfrm>
-          <a:prstGeom prst="rect">
-            <a:avLst/>
-          </a:prstGeom>
-          <a:noFill/>
-          <a:ln/>
-        </p:spPr>
-        <p:txBody>
-          <a:bodyPr wrap="square" lIns="0" tIns="0" rIns="0" bIns="0" rtlCol="0" anchor="ctr"/>
+            <a:ext cx="2889504" cy="1737360"/>
+          </a:xfrm>
+          <a:prstGeom prst="rect">
+            <a:avLst/>
+          </a:prstGeom>
+          <a:noFill/>
+          <a:ln/>
+        </p:spPr>
+        <p:txBody>
+          <a:bodyPr wrap="square" lIns="0" tIns="0" rIns="0" bIns="0" rtlCol="0" anchor="t"/>
           <a:lstStyle/>
           <a:p>
             <a:pPr marL="342900" indent="-342900">
@@ -3060,7 +3060,7 @@
                 <a:spcPts val="1400"/>
               </a:lnSpc>
               <a:spcAft>
-                <a:spcPts val="900"/>
+                <a:spcPts val="2200"/>
               </a:spcAft>
               <a:buSzPct val="100000"/>
               <a:buChar char="•"/>
@@ -3084,7 +3084,7 @@
                 <a:spcPts val="1400"/>
               </a:lnSpc>
               <a:spcAft>
-                <a:spcPts val="900"/>
+                <a:spcPts val="2200"/>
               </a:spcAft>
               <a:buSzPct val="100000"/>
               <a:buChar char="•"/>
@@ -3108,7 +3108,7 @@
                 <a:spcPts val="1400"/>
               </a:lnSpc>
               <a:spcAft>
-                <a:spcPts val="900"/>
+                <a:spcPts val="2200"/>
               </a:spcAft>
               <a:buSzPct val="100000"/>
               <a:buChar char="•"/>
@@ -3136,7 +3136,7 @@
         </p:nvSpPr>
         <p:spPr>
           <a:xfrm>
-            <a:off x="548640" y="4800600"/>
+            <a:off x="548640" y="4389120"/>
             <a:ext cx="11064240" cy="1417320"/>
           </a:xfrm>
           <a:prstGeom prst="roundRect">
@@ -3163,7 +3163,7 @@
         </p:nvSpPr>
         <p:spPr>
           <a:xfrm>
-            <a:off x="841248" y="4956048"/>
+            <a:off x="841248" y="4544568"/>
             <a:ext cx="3657600" cy="292608"/>
           </a:xfrm>
           <a:prstGeom prst="rect">
@@ -3202,7 +3202,7 @@
         </p:nvSpPr>
         <p:spPr>
           <a:xfrm>
-            <a:off x="841248" y="5285232"/>
+            <a:off x="841248" y="4873752"/>
             <a:ext cx="10479024" cy="868680"/>
           </a:xfrm>
           <a:prstGeom prst="rect">
@@ -3212,7 +3212,7 @@
           <a:ln/>
         </p:spPr>
         <p:txBody>
-          <a:bodyPr wrap="square" lIns="0" tIns="0" rIns="0" bIns="0" rtlCol="0" anchor="ctr"/>
+          <a:bodyPr wrap="square" lIns="0" tIns="0" rIns="0" bIns="0" rtlCol="0" anchor="t"/>
           <a:lstStyle/>
           <a:p>
             <a:pPr indent="0" marL="0">
@@ -4040,8 +4040,8 @@
         </p:nvSpPr>
         <p:spPr>
           <a:xfrm>
-            <a:off x="-1645920" y="3291840"/>
-            <a:ext cx="5120640" cy="5120640"/>
+            <a:off x="9326880" y="-2011680"/>
+            <a:ext cx="4937760" cy="4937760"/>
           </a:xfrm>
           <a:prstGeom prst="ellipse">
             <a:avLst/>
@@ -6868,7 +6868,7 @@
         <p:spPr>
           <a:xfrm>
             <a:off x="7680960" y="1572768"/>
-            <a:ext cx="3931920" cy="4709160"/>
+            <a:ext cx="3931920" cy="4572000"/>
           </a:xfrm>
           <a:prstGeom prst="roundRect">
             <a:avLst>
@@ -6895,83 +6895,276 @@
         <p:spPr>
           <a:xfrm>
             <a:off x="7955280" y="1810512"/>
-            <a:ext cx="3383280" cy="548640"/>
-          </a:xfrm>
-          <a:prstGeom prst="rect">
-            <a:avLst/>
-          </a:prstGeom>
-          <a:noFill/>
-          <a:ln/>
-        </p:spPr>
-        <p:txBody>
-          <a:bodyPr wrap="square" lIns="0" tIns="0" rIns="0" bIns="0" rtlCol="0" anchor="ctr"/>
+            <a:ext cx="3383280" cy="365760"/>
+          </a:xfrm>
+          <a:prstGeom prst="rect">
+            <a:avLst/>
+          </a:prstGeom>
+          <a:noFill/>
+          <a:ln/>
+        </p:spPr>
+        <p:txBody>
+          <a:bodyPr wrap="square" lIns="0" tIns="0" rIns="0" bIns="0" rtlCol="0" anchor="ctr"/>
+          <a:lstStyle/>
+          <a:p>
+            <a:pPr indent="0" marL="0">
+              <a:buNone/>
+            </a:pPr>
+            <a:r>
+              <a:rPr lang="en-US" sz="1500" b="1" dirty="0">
+                <a:solidFill>
+                  <a:srgbClr val="FFFFFF"/>
+                </a:solidFill>
+                <a:latin typeface="Calibri" pitchFamily="34" charset="0"/>
+                <a:ea typeface="Calibri" pitchFamily="34" charset="-122"/>
+                <a:cs typeface="Calibri" pitchFamily="34" charset="-120"/>
+              </a:rPr>
+              <a:t>Two independent automation tracks</a:t>
+            </a:r>
+            <a:endParaRPr lang="en-US" sz="1500" dirty="0"/>
+          </a:p>
+        </p:txBody>
+      </p:sp>
+      <p:sp>
+        <p:nvSpPr>
+          <p:cNvPr id="31" name="Shape 29"/>
+          <p:cNvSpPr/>
+          <p:nvPr/>
+        </p:nvSpPr>
+        <p:spPr>
+          <a:xfrm>
+            <a:off x="7936992" y="2331720"/>
+            <a:ext cx="3419856" cy="1600200"/>
+          </a:xfrm>
+          <a:prstGeom prst="roundRect">
+            <a:avLst>
+              <a:gd name="adj" fmla="val 2857"/>
+            </a:avLst>
+          </a:prstGeom>
+          <a:solidFill>
+            <a:srgbClr val="15171B"/>
+          </a:solidFill>
+          <a:ln w="12700">
+            <a:solidFill>
+              <a:srgbClr val="15171B"/>
+            </a:solidFill>
+            <a:prstDash val="solid"/>
+          </a:ln>
+        </p:spPr>
+      </p:sp>
+      <p:sp>
+        <p:nvSpPr>
+          <p:cNvPr id="32" name="Text 30"/>
+          <p:cNvSpPr/>
+          <p:nvPr/>
+        </p:nvSpPr>
+        <p:spPr>
+          <a:xfrm>
+            <a:off x="8156448" y="2514600"/>
+            <a:ext cx="2980944" cy="256032"/>
+          </a:xfrm>
+          <a:prstGeom prst="rect">
+            <a:avLst/>
+          </a:prstGeom>
+          <a:noFill/>
+          <a:ln/>
+        </p:spPr>
+        <p:txBody>
+          <a:bodyPr wrap="square" lIns="0" tIns="0" rIns="0" bIns="0" rtlCol="0" anchor="t"/>
+          <a:lstStyle/>
+          <a:p>
+            <a:pPr indent="0" marL="0">
+              <a:buNone/>
+            </a:pPr>
+            <a:r>
+              <a:rPr lang="en-US" sz="1250" b="1" dirty="0">
+                <a:solidFill>
+                  <a:srgbClr val="E8551F"/>
+                </a:solidFill>
+                <a:latin typeface="Calibri" pitchFamily="34" charset="0"/>
+                <a:ea typeface="Calibri" pitchFamily="34" charset="-122"/>
+                <a:cs typeface="Calibri" pitchFamily="34" charset="-120"/>
+              </a:rPr>
+              <a:t>Detect &amp; respond</a:t>
+            </a:r>
+            <a:endParaRPr lang="en-US" sz="1250" dirty="0"/>
+          </a:p>
+        </p:txBody>
+      </p:sp>
+      <p:sp>
+        <p:nvSpPr>
+          <p:cNvPr id="33" name="Text 31"/>
+          <p:cNvSpPr/>
+          <p:nvPr/>
+        </p:nvSpPr>
+        <p:spPr>
+          <a:xfrm>
+            <a:off x="8156448" y="2825496"/>
+            <a:ext cx="2980944" cy="548640"/>
+          </a:xfrm>
+          <a:prstGeom prst="rect">
+            <a:avLst/>
+          </a:prstGeom>
+          <a:noFill/>
+          <a:ln/>
+        </p:spPr>
+        <p:txBody>
+          <a:bodyPr wrap="square" lIns="0" tIns="0" rIns="0" bIns="0" rtlCol="0" anchor="t"/>
           <a:lstStyle/>
           <a:p>
             <a:pPr indent="0" marL="0">
               <a:lnSpc>
-                <a:spcPts val="2000"/>
+                <a:spcPts val="1400"/>
               </a:lnSpc>
               <a:buNone/>
             </a:pPr>
             <a:r>
-              <a:rPr lang="en-US" sz="1500" b="1" dirty="0">
-                <a:solidFill>
-                  <a:srgbClr val="FFFFFF"/>
-                </a:solidFill>
-                <a:latin typeface="Calibri" pitchFamily="34" charset="0"/>
-                <a:ea typeface="Calibri" pitchFamily="34" charset="-122"/>
-                <a:cs typeface="Calibri" pitchFamily="34" charset="-120"/>
-              </a:rPr>
-              <a:t>Two independent automation tracks</a:t>
-            </a:r>
-            <a:endParaRPr lang="en-US" sz="1500" dirty="0"/>
-          </a:p>
-        </p:txBody>
-      </p:sp>
-      <p:sp>
-        <p:nvSpPr>
-          <p:cNvPr id="31" name="Text 29"/>
-          <p:cNvSpPr/>
-          <p:nvPr/>
-        </p:nvSpPr>
-        <p:spPr>
-          <a:xfrm>
-            <a:off x="7955280" y="2468880"/>
-            <a:ext cx="3383280" cy="2377440"/>
-          </a:xfrm>
-          <a:prstGeom prst="rect">
-            <a:avLst/>
-          </a:prstGeom>
-          <a:noFill/>
-          <a:ln/>
-        </p:spPr>
-        <p:txBody>
-          <a:bodyPr wrap="square" lIns="0" tIns="0" rIns="0" bIns="0" rtlCol="0" anchor="ctr"/>
+              <a:rPr lang="en-US" sz="1100" dirty="0">
+                <a:solidFill>
+                  <a:srgbClr val="B4B7BD"/>
+                </a:solidFill>
+                <a:latin typeface="Calibri" pitchFamily="34" charset="0"/>
+                <a:ea typeface="Calibri" pitchFamily="34" charset="-122"/>
+                <a:cs typeface="Calibri" pitchFamily="34" charset="-120"/>
+              </a:rPr>
+              <a:t>Each KOI alert is triaged, investigated and routed — with response gated on an analyst.</a:t>
+            </a:r>
+            <a:endParaRPr lang="en-US" sz="1100" dirty="0"/>
+          </a:p>
+        </p:txBody>
+      </p:sp>
+      <p:sp>
+        <p:nvSpPr>
+          <p:cNvPr id="34" name="Text 32"/>
+          <p:cNvSpPr/>
+          <p:nvPr/>
+        </p:nvSpPr>
+        <p:spPr>
+          <a:xfrm>
+            <a:off x="8156448" y="3392424"/>
+            <a:ext cx="2980944" cy="420624"/>
+          </a:xfrm>
+          <a:prstGeom prst="rect">
+            <a:avLst/>
+          </a:prstGeom>
+          <a:noFill/>
+          <a:ln/>
+        </p:spPr>
+        <p:txBody>
+          <a:bodyPr wrap="square" lIns="0" tIns="0" rIns="0" bIns="0" rtlCol="0" anchor="t"/>
           <a:lstStyle/>
           <a:p>
             <a:pPr indent="0" marL="0">
               <a:lnSpc>
-                <a:spcPts val="1500"/>
+                <a:spcPts val="1300"/>
               </a:lnSpc>
               <a:buNone/>
             </a:pPr>
             <a:r>
+              <a:rPr lang="en-US" sz="1000" dirty="0">
+                <a:solidFill>
+                  <a:srgbClr val="6E747E"/>
+                </a:solidFill>
+                <a:latin typeface="Calibri" pitchFamily="34" charset="0"/>
+                <a:ea typeface="Calibri" pitchFamily="34" charset="-122"/>
+                <a:cs typeface="Calibri" pitchFamily="34" charset="-120"/>
+              </a:rPr>
+              <a:t>Seven playbooks: triage, two investigations, enrichment, response and hunting.</a:t>
+            </a:r>
+            <a:endParaRPr lang="en-US" sz="1000" dirty="0"/>
+          </a:p>
+        </p:txBody>
+      </p:sp>
+      <p:sp>
+        <p:nvSpPr>
+          <p:cNvPr id="35" name="Shape 33"/>
+          <p:cNvSpPr/>
+          <p:nvPr/>
+        </p:nvSpPr>
+        <p:spPr>
+          <a:xfrm>
+            <a:off x="7936992" y="4069080"/>
+            <a:ext cx="3419856" cy="1600200"/>
+          </a:xfrm>
+          <a:prstGeom prst="roundRect">
+            <a:avLst>
+              <a:gd name="adj" fmla="val 2857"/>
+            </a:avLst>
+          </a:prstGeom>
+          <a:solidFill>
+            <a:srgbClr val="15171B"/>
+          </a:solidFill>
+          <a:ln w="12700">
+            <a:solidFill>
+              <a:srgbClr val="15171B"/>
+            </a:solidFill>
+            <a:prstDash val="solid"/>
+          </a:ln>
+        </p:spPr>
+      </p:sp>
+      <p:sp>
+        <p:nvSpPr>
+          <p:cNvPr id="36" name="Text 34"/>
+          <p:cNvSpPr/>
+          <p:nvPr/>
+        </p:nvSpPr>
+        <p:spPr>
+          <a:xfrm>
+            <a:off x="8156448" y="4251960"/>
+            <a:ext cx="2980944" cy="256032"/>
+          </a:xfrm>
+          <a:prstGeom prst="rect">
+            <a:avLst/>
+          </a:prstGeom>
+          <a:noFill/>
+          <a:ln/>
+        </p:spPr>
+        <p:txBody>
+          <a:bodyPr wrap="square" lIns="0" tIns="0" rIns="0" bIns="0" rtlCol="0" anchor="t"/>
+          <a:lstStyle/>
+          <a:p>
+            <a:pPr indent="0" marL="0">
+              <a:buNone/>
+            </a:pPr>
+            <a:r>
               <a:rPr lang="en-US" sz="1250" b="1" dirty="0">
                 <a:solidFill>
-                  <a:srgbClr val="E8551F"/>
-                </a:solidFill>
-                <a:latin typeface="Calibri" pitchFamily="34" charset="0"/>
-                <a:ea typeface="Calibri" pitchFamily="34" charset="-122"/>
-                <a:cs typeface="Calibri" pitchFamily="34" charset="-120"/>
-              </a:rPr>
-              <a:t>Detect &amp; respond</a:t>
+                  <a:srgbClr val="22D3EE"/>
+                </a:solidFill>
+                <a:latin typeface="Calibri" pitchFamily="34" charset="0"/>
+                <a:ea typeface="Calibri" pitchFamily="34" charset="-122"/>
+                <a:cs typeface="Calibri" pitchFamily="34" charset="-120"/>
+              </a:rPr>
+              <a:t>Operate at fleet scale</a:t>
             </a:r>
             <a:endParaRPr lang="en-US" sz="1250" dirty="0"/>
           </a:p>
+        </p:txBody>
+      </p:sp>
+      <p:sp>
+        <p:nvSpPr>
+          <p:cNvPr id="37" name="Text 35"/>
+          <p:cNvSpPr/>
+          <p:nvPr/>
+        </p:nvSpPr>
+        <p:spPr>
+          <a:xfrm>
+            <a:off x="8156448" y="4562856"/>
+            <a:ext cx="2980944" cy="548640"/>
+          </a:xfrm>
+          <a:prstGeom prst="rect">
+            <a:avLst/>
+          </a:prstGeom>
+          <a:noFill/>
+          <a:ln/>
+        </p:spPr>
+        <p:txBody>
+          <a:bodyPr wrap="square" lIns="0" tIns="0" rIns="0" bIns="0" rtlCol="0" anchor="t"/>
+          <a:lstStyle/>
           <a:p>
             <a:pPr indent="0" marL="0">
               <a:lnSpc>
-                <a:spcPts val="1500"/>
+                <a:spcPts val="1400"/>
               </a:lnSpc>
               <a:buNone/>
             </a:pPr>
@@ -6984,91 +7177,73 @@
                 <a:ea typeface="Calibri" pitchFamily="34" charset="-122"/>
                 <a:cs typeface="Calibri" pitchFamily="34" charset="-120"/>
               </a:rPr>
-              <a:t>Each KOI alert is triaged, investigated and routed — with response gated on an analyst.</a:t>
-            </a:r>
-            <a:endParaRPr lang="en-US" sz="1250" dirty="0"/>
-          </a:p>
+              <a:t>Run KOI script packages on Cortex-Agent endpoints on a schedule, targeted by OS, group or hostname.</a:t>
+            </a:r>
+            <a:endParaRPr lang="en-US" sz="1100" dirty="0"/>
+          </a:p>
+        </p:txBody>
+      </p:sp>
+      <p:sp>
+        <p:nvSpPr>
+          <p:cNvPr id="38" name="Text 36"/>
+          <p:cNvSpPr/>
+          <p:nvPr/>
+        </p:nvSpPr>
+        <p:spPr>
+          <a:xfrm>
+            <a:off x="8156448" y="5129784"/>
+            <a:ext cx="2980944" cy="420624"/>
+          </a:xfrm>
+          <a:prstGeom prst="rect">
+            <a:avLst/>
+          </a:prstGeom>
+          <a:noFill/>
+          <a:ln/>
+        </p:spPr>
+        <p:txBody>
+          <a:bodyPr wrap="square" lIns="0" tIns="0" rIns="0" bIns="0" rtlCol="0" anchor="t"/>
+          <a:lstStyle/>
           <a:p>
             <a:pPr indent="0" marL="0">
               <a:lnSpc>
-                <a:spcPts val="1500"/>
+                <a:spcPts val="1300"/>
               </a:lnSpc>
               <a:buNone/>
             </a:pPr>
             <a:r>
-              <a:rPr lang="en-US" sz="800" dirty="0">
-                <a:solidFill>
-                  <a:srgbClr val="000000"/>
-                </a:solidFill>
-                <a:latin typeface="Calibri" pitchFamily="34" charset="0"/>
-                <a:ea typeface="Calibri" pitchFamily="34" charset="-122"/>
-                <a:cs typeface="Calibri" pitchFamily="34" charset="-120"/>
-              </a:rPr>
-              <a:t> </a:t>
-            </a:r>
-            <a:endParaRPr lang="en-US" sz="1250" dirty="0"/>
-          </a:p>
-          <a:p>
-            <a:pPr indent="0" marL="0">
-              <a:lnSpc>
-                <a:spcPts val="1500"/>
-              </a:lnSpc>
-              <a:buNone/>
-            </a:pPr>
-            <a:r>
-              <a:rPr lang="en-US" sz="1250" b="1" dirty="0">
-                <a:solidFill>
-                  <a:srgbClr val="22D3EE"/>
-                </a:solidFill>
-                <a:latin typeface="Calibri" pitchFamily="34" charset="0"/>
-                <a:ea typeface="Calibri" pitchFamily="34" charset="-122"/>
-                <a:cs typeface="Calibri" pitchFamily="34" charset="-120"/>
-              </a:rPr>
-              <a:t>Operate at fleet scale</a:t>
-            </a:r>
-            <a:endParaRPr lang="en-US" sz="1250" dirty="0"/>
-          </a:p>
-          <a:p>
-            <a:pPr indent="0" marL="0">
-              <a:lnSpc>
-                <a:spcPts val="1500"/>
-              </a:lnSpc>
-              <a:buNone/>
-            </a:pPr>
-            <a:r>
-              <a:rPr lang="en-US" sz="1100" dirty="0">
-                <a:solidFill>
-                  <a:srgbClr val="B4B7BD"/>
-                </a:solidFill>
-                <a:latin typeface="Calibri" pitchFamily="34" charset="0"/>
-                <a:ea typeface="Calibri" pitchFamily="34" charset="-122"/>
-                <a:cs typeface="Calibri" pitchFamily="34" charset="-120"/>
-              </a:rPr>
-              <a:t>Run KOI script packages on Cortex-Agent endpoints on a schedule, targeted by OS, group or hostname.</a:t>
-            </a:r>
-            <a:endParaRPr lang="en-US" sz="1250" dirty="0"/>
-          </a:p>
-        </p:txBody>
-      </p:sp>
-      <p:sp>
-        <p:nvSpPr>
-          <p:cNvPr id="32" name="Text 30"/>
-          <p:cNvSpPr/>
-          <p:nvPr/>
-        </p:nvSpPr>
-        <p:spPr>
-          <a:xfrm>
-            <a:off x="7955280" y="5669280"/>
-            <a:ext cx="3383280" cy="365760"/>
-          </a:xfrm>
-          <a:prstGeom prst="rect">
-            <a:avLst/>
-          </a:prstGeom>
-          <a:noFill/>
-          <a:ln/>
-        </p:spPr>
-        <p:txBody>
-          <a:bodyPr wrap="square" lIns="0" tIns="0" rIns="0" bIns="0" rtlCol="0" anchor="ctr"/>
+              <a:rPr lang="en-US" sz="1000" dirty="0">
+                <a:solidFill>
+                  <a:srgbClr val="6E747E"/>
+                </a:solidFill>
+                <a:latin typeface="Calibri" pitchFamily="34" charset="0"/>
+                <a:ea typeface="Calibri" pitchFamily="34" charset="-122"/>
+                <a:cs typeface="Calibri" pitchFamily="34" charset="-120"/>
+              </a:rPr>
+              <a:t>Three playbooks, configured entirely through a JSON List.</a:t>
+            </a:r>
+            <a:endParaRPr lang="en-US" sz="1000" dirty="0"/>
+          </a:p>
+        </p:txBody>
+      </p:sp>
+      <p:sp>
+        <p:nvSpPr>
+          <p:cNvPr id="39" name="Text 37"/>
+          <p:cNvSpPr/>
+          <p:nvPr/>
+        </p:nvSpPr>
+        <p:spPr>
+          <a:xfrm>
+            <a:off x="7955280" y="5760720"/>
+            <a:ext cx="3383280" cy="256032"/>
+          </a:xfrm>
+          <a:prstGeom prst="rect">
+            <a:avLst/>
+          </a:prstGeom>
+          <a:noFill/>
+          <a:ln/>
+        </p:spPr>
+        <p:txBody>
+          <a:bodyPr wrap="square" lIns="0" tIns="0" rIns="0" bIns="0" rtlCol="0" anchor="t"/>
           <a:lstStyle/>
           <a:p>
             <a:pPr indent="0" marL="0">
@@ -8679,13 +8854,52 @@
       </p:sp>
       <p:sp>
         <p:nvSpPr>
-          <p:cNvPr id="4" name="Shape 2"/>
-          <p:cNvSpPr/>
-          <p:nvPr/>
-        </p:nvSpPr>
-        <p:spPr>
-          <a:xfrm>
-            <a:off x="548640" y="1783080"/>
+          <p:cNvPr id="4" name="Text 2"/>
+          <p:cNvSpPr/>
+          <p:nvPr/>
+        </p:nvSpPr>
+        <p:spPr>
+          <a:xfrm>
+            <a:off x="548640" y="1444752"/>
+            <a:ext cx="11064240" cy="274320"/>
+          </a:xfrm>
+          <a:prstGeom prst="rect">
+            <a:avLst/>
+          </a:prstGeom>
+          <a:noFill/>
+          <a:ln/>
+        </p:spPr>
+        <p:txBody>
+          <a:bodyPr wrap="square" lIns="0" tIns="0" rIns="0" bIns="0" rtlCol="0" anchor="t"/>
+          <a:lstStyle/>
+          <a:p>
+            <a:pPr indent="0" marL="0">
+              <a:buNone/>
+            </a:pPr>
+            <a:r>
+              <a:rPr lang="en-US" sz="1200" b="1" spc="100" kern="0" dirty="0">
+                <a:solidFill>
+                  <a:srgbClr val="E8551F"/>
+                </a:solidFill>
+                <a:latin typeface="Calibri" pitchFamily="34" charset="0"/>
+                <a:ea typeface="Calibri" pitchFamily="34" charset="-122"/>
+                <a:cs typeface="Calibri" pitchFamily="34" charset="-120"/>
+              </a:rPr>
+              <a:t>Telemetry pipeline</a:t>
+            </a:r>
+            <a:endParaRPr lang="en-US" sz="1200" dirty="0"/>
+          </a:p>
+        </p:txBody>
+      </p:sp>
+      <p:sp>
+        <p:nvSpPr>
+          <p:cNvPr id="5" name="Shape 3"/>
+          <p:cNvSpPr/>
+          <p:nvPr/>
+        </p:nvSpPr>
+        <p:spPr>
+          <a:xfrm>
+            <a:off x="548640" y="1810512"/>
             <a:ext cx="1993392" cy="1371600"/>
           </a:xfrm>
           <a:prstGeom prst="roundRect">
@@ -8706,13 +8920,13 @@
       </p:sp>
       <p:sp>
         <p:nvSpPr>
-          <p:cNvPr id="5" name="Text 3"/>
-          <p:cNvSpPr/>
-          <p:nvPr/>
-        </p:nvSpPr>
-        <p:spPr>
-          <a:xfrm>
-            <a:off x="713232" y="1929384"/>
+          <p:cNvPr id="6" name="Text 4"/>
+          <p:cNvSpPr/>
+          <p:nvPr/>
+        </p:nvSpPr>
+        <p:spPr>
+          <a:xfrm>
+            <a:off x="713232" y="1956816"/>
             <a:ext cx="1664208" cy="310896"/>
           </a:xfrm>
           <a:prstGeom prst="rect">
@@ -8745,13 +8959,13 @@
       </p:sp>
       <p:sp>
         <p:nvSpPr>
-          <p:cNvPr id="6" name="Text 4"/>
-          <p:cNvSpPr/>
-          <p:nvPr/>
-        </p:nvSpPr>
-        <p:spPr>
-          <a:xfrm>
-            <a:off x="713232" y="2258568"/>
+          <p:cNvPr id="7" name="Text 5"/>
+          <p:cNvSpPr/>
+          <p:nvPr/>
+        </p:nvSpPr>
+        <p:spPr>
+          <a:xfrm>
+            <a:off x="713232" y="2286000"/>
             <a:ext cx="1664208" cy="749808"/>
           </a:xfrm>
           <a:prstGeom prst="rect">
@@ -8761,7 +8975,7 @@
           <a:ln/>
         </p:spPr>
         <p:txBody>
-          <a:bodyPr wrap="square" lIns="0" tIns="0" rIns="0" bIns="0" rtlCol="0" anchor="ctr"/>
+          <a:bodyPr wrap="square" lIns="0" tIns="0" rIns="0" bIns="0" rtlCol="0" anchor="t"/>
           <a:lstStyle/>
           <a:p>
             <a:pPr indent="0" marL="0">
@@ -8807,19 +9021,17 @@
       </p:sp>
       <p:sp>
         <p:nvSpPr>
-          <p:cNvPr id="7" name="Shape 5"/>
-          <p:cNvSpPr/>
-          <p:nvPr/>
-        </p:nvSpPr>
-        <p:spPr>
-          <a:xfrm>
-            <a:off x="713232" y="2898648"/>
-            <a:ext cx="457200" cy="54864"/>
-          </a:xfrm>
-          <a:prstGeom prst="roundRect">
-            <a:avLst>
-              <a:gd name="adj" fmla="val 50000"/>
-            </a:avLst>
+          <p:cNvPr id="8" name="Shape 6"/>
+          <p:cNvSpPr/>
+          <p:nvPr/>
+        </p:nvSpPr>
+        <p:spPr>
+          <a:xfrm>
+            <a:off x="2542032" y="2404872"/>
+            <a:ext cx="274320" cy="182880"/>
+          </a:xfrm>
+          <a:prstGeom prst="rightArrow">
+            <a:avLst/>
           </a:prstGeom>
           <a:solidFill>
             <a:srgbClr val="E8551F"/>
@@ -8834,13 +9046,141 @@
       </p:sp>
       <p:sp>
         <p:nvSpPr>
-          <p:cNvPr id="8" name="Shape 6"/>
-          <p:cNvSpPr/>
-          <p:nvPr/>
-        </p:nvSpPr>
-        <p:spPr>
-          <a:xfrm>
-            <a:off x="2542032" y="2377440"/>
+          <p:cNvPr id="9" name="Shape 7"/>
+          <p:cNvSpPr/>
+          <p:nvPr/>
+        </p:nvSpPr>
+        <p:spPr>
+          <a:xfrm>
+            <a:off x="2807208" y="1810512"/>
+            <a:ext cx="1993392" cy="1371600"/>
+          </a:xfrm>
+          <a:prstGeom prst="roundRect">
+            <a:avLst>
+              <a:gd name="adj" fmla="val 3333"/>
+            </a:avLst>
+          </a:prstGeom>
+          <a:solidFill>
+            <a:srgbClr val="15171B"/>
+          </a:solidFill>
+          <a:ln w="12700">
+            <a:solidFill>
+              <a:srgbClr val="15171B"/>
+            </a:solidFill>
+            <a:prstDash val="solid"/>
+          </a:ln>
+        </p:spPr>
+      </p:sp>
+      <p:sp>
+        <p:nvSpPr>
+          <p:cNvPr id="10" name="Text 8"/>
+          <p:cNvSpPr/>
+          <p:nvPr/>
+        </p:nvSpPr>
+        <p:spPr>
+          <a:xfrm>
+            <a:off x="2971800" y="1956816"/>
+            <a:ext cx="1664208" cy="310896"/>
+          </a:xfrm>
+          <a:prstGeom prst="rect">
+            <a:avLst/>
+          </a:prstGeom>
+          <a:noFill/>
+          <a:ln/>
+        </p:spPr>
+        <p:txBody>
+          <a:bodyPr wrap="square" lIns="0" tIns="0" rIns="0" bIns="0" rtlCol="0" anchor="ctr"/>
+          <a:lstStyle/>
+          <a:p>
+            <a:pPr indent="0" marL="0">
+              <a:buNone/>
+            </a:pPr>
+            <a:r>
+              <a:rPr lang="en-US" sz="1300" b="1" dirty="0">
+                <a:solidFill>
+                  <a:srgbClr val="FFFFFF"/>
+                </a:solidFill>
+                <a:latin typeface="Calibri" pitchFamily="34" charset="0"/>
+                <a:ea typeface="Calibri" pitchFamily="34" charset="-122"/>
+                <a:cs typeface="Calibri" pitchFamily="34" charset="-120"/>
+              </a:rPr>
+              <a:t>Integration</a:t>
+            </a:r>
+            <a:endParaRPr lang="en-US" sz="1300" dirty="0"/>
+          </a:p>
+        </p:txBody>
+      </p:sp>
+      <p:sp>
+        <p:nvSpPr>
+          <p:cNvPr id="11" name="Text 9"/>
+          <p:cNvSpPr/>
+          <p:nvPr/>
+        </p:nvSpPr>
+        <p:spPr>
+          <a:xfrm>
+            <a:off x="2971800" y="2286000"/>
+            <a:ext cx="1664208" cy="749808"/>
+          </a:xfrm>
+          <a:prstGeom prst="rect">
+            <a:avLst/>
+          </a:prstGeom>
+          <a:noFill/>
+          <a:ln/>
+        </p:spPr>
+        <p:txBody>
+          <a:bodyPr wrap="square" lIns="0" tIns="0" rIns="0" bIns="0" rtlCol="0" anchor="t"/>
+          <a:lstStyle/>
+          <a:p>
+            <a:pPr indent="0" marL="0">
+              <a:lnSpc>
+                <a:spcPts val="1400"/>
+              </a:lnSpc>
+              <a:buNone/>
+            </a:pPr>
+            <a:r>
+              <a:rPr lang="en-US" sz="1050" dirty="0">
+                <a:solidFill>
+                  <a:srgbClr val="22D3EE"/>
+                </a:solidFill>
+                <a:latin typeface="Calibri" pitchFamily="34" charset="0"/>
+                <a:ea typeface="Calibri" pitchFamily="34" charset="-122"/>
+                <a:cs typeface="Calibri" pitchFamily="34" charset="-120"/>
+              </a:rPr>
+              <a:t>Runs on tenant</a:t>
+            </a:r>
+            <a:endParaRPr lang="en-US" sz="1050" dirty="0"/>
+          </a:p>
+          <a:p>
+            <a:pPr indent="0" marL="0">
+              <a:lnSpc>
+                <a:spcPts val="1400"/>
+              </a:lnSpc>
+              <a:buNone/>
+            </a:pPr>
+            <a:r>
+              <a:rPr lang="en-US" sz="1050" dirty="0">
+                <a:solidFill>
+                  <a:srgbClr val="22D3EE"/>
+                </a:solidFill>
+                <a:latin typeface="Calibri" pitchFamily="34" charset="0"/>
+                <a:ea typeface="Calibri" pitchFamily="34" charset="-122"/>
+                <a:cs typeface="Calibri" pitchFamily="34" charset="-120"/>
+              </a:rPr>
+              <a:t>or a Cortex engine</a:t>
+            </a:r>
+            <a:endParaRPr lang="en-US" sz="1050" dirty="0"/>
+          </a:p>
+        </p:txBody>
+      </p:sp>
+      <p:sp>
+        <p:nvSpPr>
+          <p:cNvPr id="12" name="Shape 10"/>
+          <p:cNvSpPr/>
+          <p:nvPr/>
+        </p:nvSpPr>
+        <p:spPr>
+          <a:xfrm>
+            <a:off x="4800600" y="2404872"/>
             <a:ext cx="274320" cy="182880"/>
           </a:xfrm>
           <a:prstGeom prst="rightArrow">
@@ -8859,13 +9199,13 @@
       </p:sp>
       <p:sp>
         <p:nvSpPr>
-          <p:cNvPr id="9" name="Shape 7"/>
-          <p:cNvSpPr/>
-          <p:nvPr/>
-        </p:nvSpPr>
-        <p:spPr>
-          <a:xfrm>
-            <a:off x="2807208" y="1783080"/>
+          <p:cNvPr id="13" name="Shape 11"/>
+          <p:cNvSpPr/>
+          <p:nvPr/>
+        </p:nvSpPr>
+        <p:spPr>
+          <a:xfrm>
+            <a:off x="5065776" y="1810512"/>
             <a:ext cx="1993392" cy="1371600"/>
           </a:xfrm>
           <a:prstGeom prst="roundRect">
@@ -8886,13 +9226,13 @@
       </p:sp>
       <p:sp>
         <p:nvSpPr>
-          <p:cNvPr id="10" name="Text 8"/>
-          <p:cNvSpPr/>
-          <p:nvPr/>
-        </p:nvSpPr>
-        <p:spPr>
-          <a:xfrm>
-            <a:off x="2971800" y="1929384"/>
+          <p:cNvPr id="14" name="Text 12"/>
+          <p:cNvSpPr/>
+          <p:nvPr/>
+        </p:nvSpPr>
+        <p:spPr>
+          <a:xfrm>
+            <a:off x="5230368" y="1956816"/>
             <a:ext cx="1664208" cy="310896"/>
           </a:xfrm>
           <a:prstGeom prst="rect">
@@ -8917,7 +9257,7 @@
                 <a:ea typeface="Calibri" pitchFamily="34" charset="-122"/>
                 <a:cs typeface="Calibri" pitchFamily="34" charset="-120"/>
               </a:rPr>
-              <a:t>Integration</a:t>
+              <a:t>koi_koi_raw</a:t>
             </a:r>
             <a:endParaRPr lang="en-US" sz="1300" dirty="0"/>
           </a:p>
@@ -8925,13 +9265,13 @@
       </p:sp>
       <p:sp>
         <p:nvSpPr>
-          <p:cNvPr id="11" name="Text 9"/>
-          <p:cNvSpPr/>
-          <p:nvPr/>
-        </p:nvSpPr>
-        <p:spPr>
-          <a:xfrm>
-            <a:off x="2971800" y="2258568"/>
+          <p:cNvPr id="15" name="Text 13"/>
+          <p:cNvSpPr/>
+          <p:nvPr/>
+        </p:nvSpPr>
+        <p:spPr>
+          <a:xfrm>
+            <a:off x="5230368" y="2286000"/>
             <a:ext cx="1664208" cy="749808"/>
           </a:xfrm>
           <a:prstGeom prst="rect">
@@ -8941,7 +9281,7 @@
           <a:ln/>
         </p:spPr>
         <p:txBody>
-          <a:bodyPr wrap="square" lIns="0" tIns="0" rIns="0" bIns="0" rtlCol="0" anchor="ctr"/>
+          <a:bodyPr wrap="square" lIns="0" tIns="0" rIns="0" bIns="0" rtlCol="0" anchor="t"/>
           <a:lstStyle/>
           <a:p>
             <a:pPr indent="0" marL="0">
@@ -8959,7 +9299,7 @@
                 <a:ea typeface="Calibri" pitchFamily="34" charset="-122"/>
                 <a:cs typeface="Calibri" pitchFamily="34" charset="-120"/>
               </a:rPr>
-              <a:t>Runs on tenant</a:t>
+              <a:t>Raw events</a:t>
             </a:r>
             <a:endParaRPr lang="en-US" sz="1050" dirty="0"/>
           </a:p>
@@ -8979,7 +9319,7 @@
                 <a:ea typeface="Calibri" pitchFamily="34" charset="-122"/>
                 <a:cs typeface="Calibri" pitchFamily="34" charset="-120"/>
               </a:rPr>
-              <a:t>or a Cortex engine</a:t>
+              <a:t>land here</a:t>
             </a:r>
             <a:endParaRPr lang="en-US" sz="1050" dirty="0"/>
           </a:p>
@@ -8987,40 +9327,13 @@
       </p:sp>
       <p:sp>
         <p:nvSpPr>
-          <p:cNvPr id="12" name="Shape 10"/>
-          <p:cNvSpPr/>
-          <p:nvPr/>
-        </p:nvSpPr>
-        <p:spPr>
-          <a:xfrm>
-            <a:off x="2971800" y="2898648"/>
-            <a:ext cx="457200" cy="54864"/>
-          </a:xfrm>
-          <a:prstGeom prst="roundRect">
-            <a:avLst>
-              <a:gd name="adj" fmla="val 50000"/>
-            </a:avLst>
-          </a:prstGeom>
-          <a:solidFill>
-            <a:srgbClr val="22D3EE"/>
-          </a:solidFill>
-          <a:ln w="12700">
-            <a:solidFill>
-              <a:srgbClr val="22D3EE"/>
-            </a:solidFill>
-            <a:prstDash val="solid"/>
-          </a:ln>
-        </p:spPr>
-      </p:sp>
-      <p:sp>
-        <p:nvSpPr>
-          <p:cNvPr id="13" name="Shape 11"/>
-          <p:cNvSpPr/>
-          <p:nvPr/>
-        </p:nvSpPr>
-        <p:spPr>
-          <a:xfrm>
-            <a:off x="4800600" y="2377440"/>
+          <p:cNvPr id="16" name="Shape 14"/>
+          <p:cNvSpPr/>
+          <p:nvPr/>
+        </p:nvSpPr>
+        <p:spPr>
+          <a:xfrm>
+            <a:off x="7059168" y="2404872"/>
             <a:ext cx="274320" cy="182880"/>
           </a:xfrm>
           <a:prstGeom prst="rightArrow">
@@ -9039,13 +9352,13 @@
       </p:sp>
       <p:sp>
         <p:nvSpPr>
-          <p:cNvPr id="14" name="Shape 12"/>
-          <p:cNvSpPr/>
-          <p:nvPr/>
-        </p:nvSpPr>
-        <p:spPr>
-          <a:xfrm>
-            <a:off x="5065776" y="1783080"/>
+          <p:cNvPr id="17" name="Shape 15"/>
+          <p:cNvSpPr/>
+          <p:nvPr/>
+        </p:nvSpPr>
+        <p:spPr>
+          <a:xfrm>
+            <a:off x="7324344" y="1810512"/>
             <a:ext cx="1993392" cy="1371600"/>
           </a:xfrm>
           <a:prstGeom prst="roundRect">
@@ -9066,13 +9379,13 @@
       </p:sp>
       <p:sp>
         <p:nvSpPr>
-          <p:cNvPr id="15" name="Text 13"/>
-          <p:cNvSpPr/>
-          <p:nvPr/>
-        </p:nvSpPr>
-        <p:spPr>
-          <a:xfrm>
-            <a:off x="5230368" y="1929384"/>
+          <p:cNvPr id="18" name="Text 16"/>
+          <p:cNvSpPr/>
+          <p:nvPr/>
+        </p:nvSpPr>
+        <p:spPr>
+          <a:xfrm>
+            <a:off x="7488936" y="1956816"/>
             <a:ext cx="1664208" cy="310896"/>
           </a:xfrm>
           <a:prstGeom prst="rect">
@@ -9097,7 +9410,7 @@
                 <a:ea typeface="Calibri" pitchFamily="34" charset="-122"/>
                 <a:cs typeface="Calibri" pitchFamily="34" charset="-120"/>
               </a:rPr>
-              <a:t>koi_koi_raw</a:t>
+              <a:t>Parsing + modeling</a:t>
             </a:r>
             <a:endParaRPr lang="en-US" sz="1300" dirty="0"/>
           </a:p>
@@ -9105,13 +9418,13 @@
       </p:sp>
       <p:sp>
         <p:nvSpPr>
-          <p:cNvPr id="16" name="Text 14"/>
-          <p:cNvSpPr/>
-          <p:nvPr/>
-        </p:nvSpPr>
-        <p:spPr>
-          <a:xfrm>
-            <a:off x="5230368" y="2258568"/>
+          <p:cNvPr id="19" name="Text 17"/>
+          <p:cNvSpPr/>
+          <p:nvPr/>
+        </p:nvSpPr>
+        <p:spPr>
+          <a:xfrm>
+            <a:off x="7488936" y="2286000"/>
             <a:ext cx="1664208" cy="749808"/>
           </a:xfrm>
           <a:prstGeom prst="rect">
@@ -9121,7 +9434,7 @@
           <a:ln/>
         </p:spPr>
         <p:txBody>
-          <a:bodyPr wrap="square" lIns="0" tIns="0" rIns="0" bIns="0" rtlCol="0" anchor="ctr"/>
+          <a:bodyPr wrap="square" lIns="0" tIns="0" rIns="0" bIns="0" rtlCol="0" anchor="t"/>
           <a:lstStyle/>
           <a:p>
             <a:pPr indent="0" marL="0">
@@ -9139,7 +9452,7 @@
                 <a:ea typeface="Calibri" pitchFamily="34" charset="-122"/>
                 <a:cs typeface="Calibri" pitchFamily="34" charset="-120"/>
               </a:rPr>
-              <a:t>Raw events</a:t>
+              <a:t>Normalized and</a:t>
             </a:r>
             <a:endParaRPr lang="en-US" sz="1050" dirty="0"/>
           </a:p>
@@ -9159,7 +9472,7 @@
                 <a:ea typeface="Calibri" pitchFamily="34" charset="-122"/>
                 <a:cs typeface="Calibri" pitchFamily="34" charset="-120"/>
               </a:rPr>
-              <a:t>land here</a:t>
+              <a:t>mapped to XDM</a:t>
             </a:r>
             <a:endParaRPr lang="en-US" sz="1050" dirty="0"/>
           </a:p>
@@ -9167,19 +9480,17 @@
       </p:sp>
       <p:sp>
         <p:nvSpPr>
-          <p:cNvPr id="17" name="Shape 15"/>
-          <p:cNvSpPr/>
-          <p:nvPr/>
-        </p:nvSpPr>
-        <p:spPr>
-          <a:xfrm>
-            <a:off x="5230368" y="2898648"/>
-            <a:ext cx="457200" cy="54864"/>
-          </a:xfrm>
-          <a:prstGeom prst="roundRect">
-            <a:avLst>
-              <a:gd name="adj" fmla="val 50000"/>
-            </a:avLst>
+          <p:cNvPr id="20" name="Shape 18"/>
+          <p:cNvSpPr/>
+          <p:nvPr/>
+        </p:nvSpPr>
+        <p:spPr>
+          <a:xfrm>
+            <a:off x="9317736" y="2404872"/>
+            <a:ext cx="274320" cy="182880"/>
+          </a:xfrm>
+          <a:prstGeom prst="rightArrow">
+            <a:avLst/>
           </a:prstGeom>
           <a:solidFill>
             <a:srgbClr val="E8551F"/>
@@ -9194,13 +9505,288 @@
       </p:sp>
       <p:sp>
         <p:nvSpPr>
-          <p:cNvPr id="18" name="Shape 16"/>
-          <p:cNvSpPr/>
-          <p:nvPr/>
-        </p:nvSpPr>
-        <p:spPr>
-          <a:xfrm>
-            <a:off x="7059168" y="2377440"/>
+          <p:cNvPr id="21" name="Shape 19"/>
+          <p:cNvSpPr/>
+          <p:nvPr/>
+        </p:nvSpPr>
+        <p:spPr>
+          <a:xfrm>
+            <a:off x="9582912" y="1810512"/>
+            <a:ext cx="1993392" cy="1371600"/>
+          </a:xfrm>
+          <a:prstGeom prst="roundRect">
+            <a:avLst>
+              <a:gd name="adj" fmla="val 3333"/>
+            </a:avLst>
+          </a:prstGeom>
+          <a:solidFill>
+            <a:srgbClr val="15171B"/>
+          </a:solidFill>
+          <a:ln w="12700">
+            <a:solidFill>
+              <a:srgbClr val="15171B"/>
+            </a:solidFill>
+            <a:prstDash val="solid"/>
+          </a:ln>
+        </p:spPr>
+      </p:sp>
+      <p:sp>
+        <p:nvSpPr>
+          <p:cNvPr id="22" name="Text 20"/>
+          <p:cNvSpPr/>
+          <p:nvPr/>
+        </p:nvSpPr>
+        <p:spPr>
+          <a:xfrm>
+            <a:off x="9747504" y="1956816"/>
+            <a:ext cx="1664208" cy="310896"/>
+          </a:xfrm>
+          <a:prstGeom prst="rect">
+            <a:avLst/>
+          </a:prstGeom>
+          <a:noFill/>
+          <a:ln/>
+        </p:spPr>
+        <p:txBody>
+          <a:bodyPr wrap="square" lIns="0" tIns="0" rIns="0" bIns="0" rtlCol="0" anchor="ctr"/>
+          <a:lstStyle/>
+          <a:p>
+            <a:pPr indent="0" marL="0">
+              <a:buNone/>
+            </a:pPr>
+            <a:r>
+              <a:rPr lang="en-US" sz="1300" b="1" dirty="0">
+                <a:solidFill>
+                  <a:srgbClr val="FFFFFF"/>
+                </a:solidFill>
+                <a:latin typeface="Calibri" pitchFamily="34" charset="0"/>
+                <a:ea typeface="Calibri" pitchFamily="34" charset="-122"/>
+                <a:cs typeface="Calibri" pitchFamily="34" charset="-120"/>
+              </a:rPr>
+              <a:t>Dashboard &amp; XQL</a:t>
+            </a:r>
+            <a:endParaRPr lang="en-US" sz="1300" dirty="0"/>
+          </a:p>
+        </p:txBody>
+      </p:sp>
+      <p:sp>
+        <p:nvSpPr>
+          <p:cNvPr id="23" name="Text 21"/>
+          <p:cNvSpPr/>
+          <p:nvPr/>
+        </p:nvSpPr>
+        <p:spPr>
+          <a:xfrm>
+            <a:off x="9747504" y="2286000"/>
+            <a:ext cx="1664208" cy="749808"/>
+          </a:xfrm>
+          <a:prstGeom prst="rect">
+            <a:avLst/>
+          </a:prstGeom>
+          <a:noFill/>
+          <a:ln/>
+        </p:spPr>
+        <p:txBody>
+          <a:bodyPr wrap="square" lIns="0" tIns="0" rIns="0" bIns="0" rtlCol="0" anchor="t"/>
+          <a:lstStyle/>
+          <a:p>
+            <a:pPr indent="0" marL="0">
+              <a:lnSpc>
+                <a:spcPts val="1400"/>
+              </a:lnSpc>
+              <a:buNone/>
+            </a:pPr>
+            <a:r>
+              <a:rPr lang="en-US" sz="1050" dirty="0">
+                <a:solidFill>
+                  <a:srgbClr val="B4B7BD"/>
+                </a:solidFill>
+                <a:latin typeface="Calibri" pitchFamily="34" charset="0"/>
+                <a:ea typeface="Calibri" pitchFamily="34" charset="-122"/>
+                <a:cs typeface="Calibri" pitchFamily="34" charset="-120"/>
+              </a:rPr>
+              <a:t>Hunt, visualize,</a:t>
+            </a:r>
+            <a:endParaRPr lang="en-US" sz="1050" dirty="0"/>
+          </a:p>
+          <a:p>
+            <a:pPr indent="0" marL="0">
+              <a:lnSpc>
+                <a:spcPts val="1400"/>
+              </a:lnSpc>
+              <a:buNone/>
+            </a:pPr>
+            <a:r>
+              <a:rPr lang="en-US" sz="1050" dirty="0">
+                <a:solidFill>
+                  <a:srgbClr val="B4B7BD"/>
+                </a:solidFill>
+                <a:latin typeface="Calibri" pitchFamily="34" charset="0"/>
+                <a:ea typeface="Calibri" pitchFamily="34" charset="-122"/>
+                <a:cs typeface="Calibri" pitchFamily="34" charset="-120"/>
+              </a:rPr>
+              <a:t>correlate</a:t>
+            </a:r>
+            <a:endParaRPr lang="en-US" sz="1050" dirty="0"/>
+          </a:p>
+        </p:txBody>
+      </p:sp>
+      <p:sp>
+        <p:nvSpPr>
+          <p:cNvPr id="24" name="Text 22"/>
+          <p:cNvSpPr/>
+          <p:nvPr/>
+        </p:nvSpPr>
+        <p:spPr>
+          <a:xfrm>
+            <a:off x="548640" y="3429000"/>
+            <a:ext cx="11064240" cy="292608"/>
+          </a:xfrm>
+          <a:prstGeom prst="rect">
+            <a:avLst/>
+          </a:prstGeom>
+          <a:noFill/>
+          <a:ln/>
+        </p:spPr>
+        <p:txBody>
+          <a:bodyPr wrap="square" lIns="0" tIns="0" rIns="0" bIns="0" rtlCol="0" anchor="ctr"/>
+          <a:lstStyle/>
+          <a:p>
+            <a:pPr indent="0" marL="0">
+              <a:buNone/>
+            </a:pPr>
+            <a:r>
+              <a:rPr lang="en-US" sz="1200" b="1" spc="100" kern="0" dirty="0">
+                <a:solidFill>
+                  <a:srgbClr val="E8551F"/>
+                </a:solidFill>
+                <a:latin typeface="Calibri" pitchFamily="34" charset="0"/>
+                <a:ea typeface="Calibri" pitchFamily="34" charset="-122"/>
+                <a:cs typeface="Calibri" pitchFamily="34" charset="-120"/>
+              </a:rPr>
+              <a:t>Alert-driven automation</a:t>
+            </a:r>
+            <a:endParaRPr lang="en-US" sz="1200" dirty="0"/>
+          </a:p>
+        </p:txBody>
+      </p:sp>
+      <p:sp>
+        <p:nvSpPr>
+          <p:cNvPr id="25" name="Shape 23"/>
+          <p:cNvSpPr/>
+          <p:nvPr/>
+        </p:nvSpPr>
+        <p:spPr>
+          <a:xfrm>
+            <a:off x="548640" y="3794760"/>
+            <a:ext cx="2542032" cy="1188720"/>
+          </a:xfrm>
+          <a:prstGeom prst="roundRect">
+            <a:avLst>
+              <a:gd name="adj" fmla="val 3846"/>
+            </a:avLst>
+          </a:prstGeom>
+          <a:solidFill>
+            <a:srgbClr val="15171B"/>
+          </a:solidFill>
+          <a:ln w="12700">
+            <a:solidFill>
+              <a:srgbClr val="15171B"/>
+            </a:solidFill>
+            <a:prstDash val="solid"/>
+          </a:ln>
+        </p:spPr>
+      </p:sp>
+      <p:sp>
+        <p:nvSpPr>
+          <p:cNvPr id="26" name="Text 24"/>
+          <p:cNvSpPr/>
+          <p:nvPr/>
+        </p:nvSpPr>
+        <p:spPr>
+          <a:xfrm>
+            <a:off x="713232" y="3941064"/>
+            <a:ext cx="2212848" cy="310896"/>
+          </a:xfrm>
+          <a:prstGeom prst="rect">
+            <a:avLst/>
+          </a:prstGeom>
+          <a:noFill/>
+          <a:ln/>
+        </p:spPr>
+        <p:txBody>
+          <a:bodyPr wrap="square" lIns="0" tIns="0" rIns="0" bIns="0" rtlCol="0" anchor="ctr"/>
+          <a:lstStyle/>
+          <a:p>
+            <a:pPr indent="0" marL="0">
+              <a:buNone/>
+            </a:pPr>
+            <a:r>
+              <a:rPr lang="en-US" sz="1300" b="1" dirty="0">
+                <a:solidFill>
+                  <a:srgbClr val="FFFFFF"/>
+                </a:solidFill>
+                <a:latin typeface="Calibri" pitchFamily="34" charset="0"/>
+                <a:ea typeface="Calibri" pitchFamily="34" charset="-122"/>
+                <a:cs typeface="Calibri" pitchFamily="34" charset="-120"/>
+              </a:rPr>
+              <a:t>KOI alert</a:t>
+            </a:r>
+            <a:endParaRPr lang="en-US" sz="1300" dirty="0"/>
+          </a:p>
+        </p:txBody>
+      </p:sp>
+      <p:sp>
+        <p:nvSpPr>
+          <p:cNvPr id="27" name="Text 25"/>
+          <p:cNvSpPr/>
+          <p:nvPr/>
+        </p:nvSpPr>
+        <p:spPr>
+          <a:xfrm>
+            <a:off x="713232" y="4270248"/>
+            <a:ext cx="2212848" cy="566928"/>
+          </a:xfrm>
+          <a:prstGeom prst="rect">
+            <a:avLst/>
+          </a:prstGeom>
+          <a:noFill/>
+          <a:ln/>
+        </p:spPr>
+        <p:txBody>
+          <a:bodyPr wrap="square" lIns="0" tIns="0" rIns="0" bIns="0" rtlCol="0" anchor="t"/>
+          <a:lstStyle/>
+          <a:p>
+            <a:pPr indent="0" marL="0">
+              <a:lnSpc>
+                <a:spcPts val="1400"/>
+              </a:lnSpc>
+              <a:buNone/>
+            </a:pPr>
+            <a:r>
+              <a:rPr lang="en-US" sz="1050" dirty="0">
+                <a:solidFill>
+                  <a:srgbClr val="B4B7BD"/>
+                </a:solidFill>
+                <a:latin typeface="Calibri" pitchFamily="34" charset="0"/>
+                <a:ea typeface="Calibri" pitchFamily="34" charset="-122"/>
+                <a:cs typeface="Calibri" pitchFamily="34" charset="-120"/>
+              </a:rPr>
+              <a:t>Ingested into Cortex</a:t>
+            </a:r>
+            <a:endParaRPr lang="en-US" sz="1050" dirty="0"/>
+          </a:p>
+        </p:txBody>
+      </p:sp>
+      <p:sp>
+        <p:nvSpPr>
+          <p:cNvPr id="28" name="Shape 26"/>
+          <p:cNvSpPr/>
+          <p:nvPr/>
+        </p:nvSpPr>
+        <p:spPr>
+          <a:xfrm>
+            <a:off x="3099816" y="4297680"/>
             <a:ext cx="274320" cy="182880"/>
           </a:xfrm>
           <a:prstGeom prst="rightArrow">
@@ -9219,18 +9805,18 @@
       </p:sp>
       <p:sp>
         <p:nvSpPr>
-          <p:cNvPr id="19" name="Shape 17"/>
-          <p:cNvSpPr/>
-          <p:nvPr/>
-        </p:nvSpPr>
-        <p:spPr>
-          <a:xfrm>
-            <a:off x="7324344" y="1783080"/>
-            <a:ext cx="1993392" cy="1371600"/>
+          <p:cNvPr id="29" name="Shape 27"/>
+          <p:cNvSpPr/>
+          <p:nvPr/>
+        </p:nvSpPr>
+        <p:spPr>
+          <a:xfrm>
+            <a:off x="3383280" y="3794760"/>
+            <a:ext cx="2542032" cy="1188720"/>
           </a:xfrm>
           <a:prstGeom prst="roundRect">
             <a:avLst>
-              <a:gd name="adj" fmla="val 3333"/>
+              <a:gd name="adj" fmla="val 3846"/>
             </a:avLst>
           </a:prstGeom>
           <a:solidFill>
@@ -9246,14 +9832,14 @@
       </p:sp>
       <p:sp>
         <p:nvSpPr>
-          <p:cNvPr id="20" name="Text 18"/>
-          <p:cNvSpPr/>
-          <p:nvPr/>
-        </p:nvSpPr>
-        <p:spPr>
-          <a:xfrm>
-            <a:off x="7488936" y="1929384"/>
-            <a:ext cx="1664208" cy="310896"/>
+          <p:cNvPr id="30" name="Text 28"/>
+          <p:cNvSpPr/>
+          <p:nvPr/>
+        </p:nvSpPr>
+        <p:spPr>
+          <a:xfrm>
+            <a:off x="3547872" y="3941064"/>
+            <a:ext cx="2212848" cy="310896"/>
           </a:xfrm>
           <a:prstGeom prst="rect">
             <a:avLst/>
@@ -9277,7 +9863,7 @@
                 <a:ea typeface="Calibri" pitchFamily="34" charset="-122"/>
                 <a:cs typeface="Calibri" pitchFamily="34" charset="-120"/>
               </a:rPr>
-              <a:t>Parsing + modeling</a:t>
+              <a:t>Triage playbook</a:t>
             </a:r>
             <a:endParaRPr lang="en-US" sz="1300" dirty="0"/>
           </a:p>
@@ -9285,23 +9871,23 @@
       </p:sp>
       <p:sp>
         <p:nvSpPr>
-          <p:cNvPr id="21" name="Text 19"/>
-          <p:cNvSpPr/>
-          <p:nvPr/>
-        </p:nvSpPr>
-        <p:spPr>
-          <a:xfrm>
-            <a:off x="7488936" y="2258568"/>
-            <a:ext cx="1664208" cy="749808"/>
-          </a:xfrm>
-          <a:prstGeom prst="rect">
-            <a:avLst/>
-          </a:prstGeom>
-          <a:noFill/>
-          <a:ln/>
-        </p:spPr>
-        <p:txBody>
-          <a:bodyPr wrap="square" lIns="0" tIns="0" rIns="0" bIns="0" rtlCol="0" anchor="ctr"/>
+          <p:cNvPr id="31" name="Text 29"/>
+          <p:cNvSpPr/>
+          <p:nvPr/>
+        </p:nvSpPr>
+        <p:spPr>
+          <a:xfrm>
+            <a:off x="3547872" y="4270248"/>
+            <a:ext cx="2212848" cy="566928"/>
+          </a:xfrm>
+          <a:prstGeom prst="rect">
+            <a:avLst/>
+          </a:prstGeom>
+          <a:noFill/>
+          <a:ln/>
+        </p:spPr>
+        <p:txBody>
+          <a:bodyPr wrap="square" lIns="0" tIns="0" rIns="0" bIns="0" rtlCol="0" anchor="t"/>
           <a:lstStyle/>
           <a:p>
             <a:pPr indent="0" marL="0">
@@ -9319,47 +9905,25 @@
                 <a:ea typeface="Calibri" pitchFamily="34" charset="-122"/>
                 <a:cs typeface="Calibri" pitchFamily="34" charset="-120"/>
               </a:rPr>
-              <a:t>Normalized and</a:t>
+              <a:t>Investigate + classify</a:t>
             </a:r>
             <a:endParaRPr lang="en-US" sz="1050" dirty="0"/>
           </a:p>
-          <a:p>
-            <a:pPr indent="0" marL="0">
-              <a:lnSpc>
-                <a:spcPts val="1400"/>
-              </a:lnSpc>
-              <a:buNone/>
-            </a:pPr>
-            <a:r>
-              <a:rPr lang="en-US" sz="1050" dirty="0">
-                <a:solidFill>
-                  <a:srgbClr val="B4B7BD"/>
-                </a:solidFill>
-                <a:latin typeface="Calibri" pitchFamily="34" charset="0"/>
-                <a:ea typeface="Calibri" pitchFamily="34" charset="-122"/>
-                <a:cs typeface="Calibri" pitchFamily="34" charset="-120"/>
-              </a:rPr>
-              <a:t>mapped to XDM</a:t>
-            </a:r>
-            <a:endParaRPr lang="en-US" sz="1050" dirty="0"/>
-          </a:p>
-        </p:txBody>
-      </p:sp>
-      <p:sp>
-        <p:nvSpPr>
-          <p:cNvPr id="22" name="Shape 20"/>
-          <p:cNvSpPr/>
-          <p:nvPr/>
-        </p:nvSpPr>
-        <p:spPr>
-          <a:xfrm>
-            <a:off x="7488936" y="2898648"/>
-            <a:ext cx="457200" cy="54864"/>
-          </a:xfrm>
-          <a:prstGeom prst="roundRect">
-            <a:avLst>
-              <a:gd name="adj" fmla="val 50000"/>
-            </a:avLst>
+        </p:txBody>
+      </p:sp>
+      <p:sp>
+        <p:nvSpPr>
+          <p:cNvPr id="32" name="Shape 30"/>
+          <p:cNvSpPr/>
+          <p:nvPr/>
+        </p:nvSpPr>
+        <p:spPr>
+          <a:xfrm>
+            <a:off x="5934456" y="4297680"/>
+            <a:ext cx="274320" cy="182880"/>
+          </a:xfrm>
+          <a:prstGeom prst="rightArrow">
+            <a:avLst/>
           </a:prstGeom>
           <a:solidFill>
             <a:srgbClr val="E8551F"/>
@@ -9374,13 +9938,121 @@
       </p:sp>
       <p:sp>
         <p:nvSpPr>
-          <p:cNvPr id="23" name="Shape 21"/>
-          <p:cNvSpPr/>
-          <p:nvPr/>
-        </p:nvSpPr>
-        <p:spPr>
-          <a:xfrm>
-            <a:off x="9317736" y="2377440"/>
+          <p:cNvPr id="33" name="Shape 31"/>
+          <p:cNvSpPr/>
+          <p:nvPr/>
+        </p:nvSpPr>
+        <p:spPr>
+          <a:xfrm>
+            <a:off x="6217920" y="3794760"/>
+            <a:ext cx="2542032" cy="1188720"/>
+          </a:xfrm>
+          <a:prstGeom prst="roundRect">
+            <a:avLst>
+              <a:gd name="adj" fmla="val 3846"/>
+            </a:avLst>
+          </a:prstGeom>
+          <a:solidFill>
+            <a:srgbClr val="15171B"/>
+          </a:solidFill>
+          <a:ln w="12700">
+            <a:solidFill>
+              <a:srgbClr val="15171B"/>
+            </a:solidFill>
+            <a:prstDash val="solid"/>
+          </a:ln>
+        </p:spPr>
+      </p:sp>
+      <p:sp>
+        <p:nvSpPr>
+          <p:cNvPr id="34" name="Text 32"/>
+          <p:cNvSpPr/>
+          <p:nvPr/>
+        </p:nvSpPr>
+        <p:spPr>
+          <a:xfrm>
+            <a:off x="6382512" y="3941064"/>
+            <a:ext cx="2212848" cy="310896"/>
+          </a:xfrm>
+          <a:prstGeom prst="rect">
+            <a:avLst/>
+          </a:prstGeom>
+          <a:noFill/>
+          <a:ln/>
+        </p:spPr>
+        <p:txBody>
+          <a:bodyPr wrap="square" lIns="0" tIns="0" rIns="0" bIns="0" rtlCol="0" anchor="ctr"/>
+          <a:lstStyle/>
+          <a:p>
+            <a:pPr indent="0" marL="0">
+              <a:buNone/>
+            </a:pPr>
+            <a:r>
+              <a:rPr lang="en-US" sz="1300" b="1" dirty="0">
+                <a:solidFill>
+                  <a:srgbClr val="FFFFFF"/>
+                </a:solidFill>
+                <a:latin typeface="Calibri" pitchFamily="34" charset="0"/>
+                <a:ea typeface="Calibri" pitchFamily="34" charset="-122"/>
+                <a:cs typeface="Calibri" pitchFamily="34" charset="-120"/>
+              </a:rPr>
+              <a:t>Verdict</a:t>
+            </a:r>
+            <a:endParaRPr lang="en-US" sz="1300" dirty="0"/>
+          </a:p>
+        </p:txBody>
+      </p:sp>
+      <p:sp>
+        <p:nvSpPr>
+          <p:cNvPr id="35" name="Text 33"/>
+          <p:cNvSpPr/>
+          <p:nvPr/>
+        </p:nvSpPr>
+        <p:spPr>
+          <a:xfrm>
+            <a:off x="6382512" y="4270248"/>
+            <a:ext cx="2212848" cy="566928"/>
+          </a:xfrm>
+          <a:prstGeom prst="rect">
+            <a:avLst/>
+          </a:prstGeom>
+          <a:noFill/>
+          <a:ln/>
+        </p:spPr>
+        <p:txBody>
+          <a:bodyPr wrap="square" lIns="0" tIns="0" rIns="0" bIns="0" rtlCol="0" anchor="t"/>
+          <a:lstStyle/>
+          <a:p>
+            <a:pPr indent="0" marL="0">
+              <a:lnSpc>
+                <a:spcPts val="1400"/>
+              </a:lnSpc>
+              <a:buNone/>
+            </a:pPr>
+            <a:r>
+              <a:rPr lang="en-US" sz="1050" dirty="0">
+                <a:solidFill>
+                  <a:srgbClr val="B4B7BD"/>
+                </a:solidFill>
+                <a:latin typeface="Calibri" pitchFamily="34" charset="0"/>
+                <a:ea typeface="Calibri" pitchFamily="34" charset="-122"/>
+                <a:cs typeface="Calibri" pitchFamily="34" charset="-120"/>
+              </a:rPr>
+              <a:t>Auto-close or escalate</a:t>
+            </a:r>
+            <a:endParaRPr lang="en-US" sz="1050" dirty="0"/>
+          </a:p>
+        </p:txBody>
+      </p:sp>
+      <p:sp>
+        <p:nvSpPr>
+          <p:cNvPr id="36" name="Shape 34"/>
+          <p:cNvSpPr/>
+          <p:nvPr/>
+        </p:nvSpPr>
+        <p:spPr>
+          <a:xfrm>
+            <a:off x="8769096" y="4297680"/>
             <a:ext cx="274320" cy="182880"/>
           </a:xfrm>
           <a:prstGeom prst="rightArrow">
@@ -9399,18 +10071,18 @@
       </p:sp>
       <p:sp>
         <p:nvSpPr>
-          <p:cNvPr id="24" name="Shape 22"/>
-          <p:cNvSpPr/>
-          <p:nvPr/>
-        </p:nvSpPr>
-        <p:spPr>
-          <a:xfrm>
-            <a:off x="9582912" y="1783080"/>
-            <a:ext cx="1993392" cy="1371600"/>
+          <p:cNvPr id="37" name="Shape 35"/>
+          <p:cNvSpPr/>
+          <p:nvPr/>
+        </p:nvSpPr>
+        <p:spPr>
+          <a:xfrm>
+            <a:off x="9052560" y="3794760"/>
+            <a:ext cx="2542032" cy="1188720"/>
           </a:xfrm>
           <a:prstGeom prst="roundRect">
             <a:avLst>
-              <a:gd name="adj" fmla="val 3333"/>
+              <a:gd name="adj" fmla="val 3846"/>
             </a:avLst>
           </a:prstGeom>
           <a:solidFill>
@@ -9426,14 +10098,14 @@
       </p:sp>
       <p:sp>
         <p:nvSpPr>
-          <p:cNvPr id="25" name="Text 23"/>
-          <p:cNvSpPr/>
-          <p:nvPr/>
-        </p:nvSpPr>
-        <p:spPr>
-          <a:xfrm>
-            <a:off x="9747504" y="1929384"/>
-            <a:ext cx="1664208" cy="310896"/>
+          <p:cNvPr id="38" name="Text 36"/>
+          <p:cNvSpPr/>
+          <p:nvPr/>
+        </p:nvSpPr>
+        <p:spPr>
+          <a:xfrm>
+            <a:off x="9217152" y="3941064"/>
+            <a:ext cx="2212848" cy="310896"/>
           </a:xfrm>
           <a:prstGeom prst="rect">
             <a:avLst/>
@@ -9457,7 +10129,7 @@
                 <a:ea typeface="Calibri" pitchFamily="34" charset="-122"/>
                 <a:cs typeface="Calibri" pitchFamily="34" charset="-120"/>
               </a:rPr>
-              <a:t>Dashboard &amp; XQL</a:t>
+              <a:t>Gated response</a:t>
             </a:r>
             <a:endParaRPr lang="en-US" sz="1300" dirty="0"/>
           </a:p>
@@ -9465,23 +10137,23 @@
       </p:sp>
       <p:sp>
         <p:nvSpPr>
-          <p:cNvPr id="26" name="Text 24"/>
-          <p:cNvSpPr/>
-          <p:nvPr/>
-        </p:nvSpPr>
-        <p:spPr>
-          <a:xfrm>
-            <a:off x="9747504" y="2258568"/>
-            <a:ext cx="1664208" cy="749808"/>
-          </a:xfrm>
-          <a:prstGeom prst="rect">
-            <a:avLst/>
-          </a:prstGeom>
-          <a:noFill/>
-          <a:ln/>
-        </p:spPr>
-        <p:txBody>
-          <a:bodyPr wrap="square" lIns="0" tIns="0" rIns="0" bIns="0" rtlCol="0" anchor="ctr"/>
+          <p:cNvPr id="39" name="Text 37"/>
+          <p:cNvSpPr/>
+          <p:nvPr/>
+        </p:nvSpPr>
+        <p:spPr>
+          <a:xfrm>
+            <a:off x="9217152" y="4270248"/>
+            <a:ext cx="2212848" cy="566928"/>
+          </a:xfrm>
+          <a:prstGeom prst="rect">
+            <a:avLst/>
+          </a:prstGeom>
+          <a:noFill/>
+          <a:ln/>
+        </p:spPr>
+        <p:txBody>
+          <a:bodyPr wrap="square" lIns="0" tIns="0" rIns="0" bIns="0" rtlCol="0" anchor="t"/>
           <a:lstStyle/>
           <a:p>
             <a:pPr indent="0" marL="0">
@@ -9493,52 +10165,59 @@
             <a:r>
               <a:rPr lang="en-US" sz="1050" dirty="0">
                 <a:solidFill>
-                  <a:srgbClr val="B4B7BD"/>
-                </a:solidFill>
-                <a:latin typeface="Calibri" pitchFamily="34" charset="0"/>
-                <a:ea typeface="Calibri" pitchFamily="34" charset="-122"/>
-                <a:cs typeface="Calibri" pitchFamily="34" charset="-120"/>
-              </a:rPr>
-              <a:t>Hunt, visualize,</a:t>
+                  <a:srgbClr val="22D3EE"/>
+                </a:solidFill>
+                <a:latin typeface="Calibri" pitchFamily="34" charset="0"/>
+                <a:ea typeface="Calibri" pitchFamily="34" charset="-122"/>
+                <a:cs typeface="Calibri" pitchFamily="34" charset="-120"/>
+              </a:rPr>
+              <a:t>Block only on approval</a:t>
             </a:r>
             <a:endParaRPr lang="en-US" sz="1050" dirty="0"/>
           </a:p>
-          <a:p>
-            <a:pPr indent="0" marL="0">
-              <a:lnSpc>
-                <a:spcPts val="1400"/>
-              </a:lnSpc>
-              <a:buNone/>
-            </a:pPr>
-            <a:r>
-              <a:rPr lang="en-US" sz="1050" dirty="0">
-                <a:solidFill>
-                  <a:srgbClr val="B4B7BD"/>
-                </a:solidFill>
-                <a:latin typeface="Calibri" pitchFamily="34" charset="0"/>
-                <a:ea typeface="Calibri" pitchFamily="34" charset="-122"/>
-                <a:cs typeface="Calibri" pitchFamily="34" charset="-120"/>
-              </a:rPr>
-              <a:t>correlate</a:t>
-            </a:r>
-            <a:endParaRPr lang="en-US" sz="1050" dirty="0"/>
-          </a:p>
-        </p:txBody>
-      </p:sp>
-      <p:sp>
-        <p:nvSpPr>
-          <p:cNvPr id="27" name="Shape 25"/>
-          <p:cNvSpPr/>
-          <p:nvPr/>
-        </p:nvSpPr>
-        <p:spPr>
-          <a:xfrm>
-            <a:off x="9747504" y="2898648"/>
-            <a:ext cx="457200" cy="54864"/>
+        </p:txBody>
+      </p:sp>
+      <p:sp>
+        <p:nvSpPr>
+          <p:cNvPr id="40" name="Shape 38"/>
+          <p:cNvSpPr/>
+          <p:nvPr/>
+        </p:nvSpPr>
+        <p:spPr>
+          <a:xfrm>
+            <a:off x="548640" y="5257800"/>
+            <a:ext cx="11064240" cy="960120"/>
           </a:xfrm>
           <a:prstGeom prst="roundRect">
             <a:avLst>
-              <a:gd name="adj" fmla="val 50000"/>
+              <a:gd name="adj" fmla="val 4762"/>
+            </a:avLst>
+          </a:prstGeom>
+          <a:solidFill>
+            <a:srgbClr val="1C2026"/>
+          </a:solidFill>
+          <a:ln w="12700">
+            <a:solidFill>
+              <a:srgbClr val="1C2026"/>
+            </a:solidFill>
+            <a:prstDash val="solid"/>
+          </a:ln>
+        </p:spPr>
+      </p:sp>
+      <p:sp>
+        <p:nvSpPr>
+          <p:cNvPr id="41" name="Shape 39"/>
+          <p:cNvSpPr/>
+          <p:nvPr/>
+        </p:nvSpPr>
+        <p:spPr>
+          <a:xfrm>
+            <a:off x="804672" y="5513832"/>
+            <a:ext cx="329184" cy="329184"/>
+          </a:xfrm>
+          <a:prstGeom prst="roundRect">
+            <a:avLst>
+              <a:gd name="adj" fmla="val 25000"/>
             </a:avLst>
           </a:prstGeom>
           <a:solidFill>
@@ -9554,688 +10233,7 @@
       </p:sp>
       <p:sp>
         <p:nvSpPr>
-          <p:cNvPr id="28" name="Text 26"/>
-          <p:cNvSpPr/>
-          <p:nvPr/>
-        </p:nvSpPr>
-        <p:spPr>
-          <a:xfrm>
-            <a:off x="548640" y="3429000"/>
-            <a:ext cx="11064240" cy="292608"/>
-          </a:xfrm>
-          <a:prstGeom prst="rect">
-            <a:avLst/>
-          </a:prstGeom>
-          <a:noFill/>
-          <a:ln/>
-        </p:spPr>
-        <p:txBody>
-          <a:bodyPr wrap="square" lIns="0" tIns="0" rIns="0" bIns="0" rtlCol="0" anchor="ctr"/>
-          <a:lstStyle/>
-          <a:p>
-            <a:pPr indent="0" marL="0">
-              <a:buNone/>
-            </a:pPr>
-            <a:r>
-              <a:rPr lang="en-US" sz="1200" b="1" spc="100" kern="0" dirty="0">
-                <a:solidFill>
-                  <a:srgbClr val="E8551F"/>
-                </a:solidFill>
-                <a:latin typeface="Calibri" pitchFamily="34" charset="0"/>
-                <a:ea typeface="Calibri" pitchFamily="34" charset="-122"/>
-                <a:cs typeface="Calibri" pitchFamily="34" charset="-120"/>
-              </a:rPr>
-              <a:t>Alert-driven automation</a:t>
-            </a:r>
-            <a:endParaRPr lang="en-US" sz="1200" dirty="0"/>
-          </a:p>
-        </p:txBody>
-      </p:sp>
-      <p:sp>
-        <p:nvSpPr>
-          <p:cNvPr id="29" name="Shape 27"/>
-          <p:cNvSpPr/>
-          <p:nvPr/>
-        </p:nvSpPr>
-        <p:spPr>
-          <a:xfrm>
-            <a:off x="548640" y="3794760"/>
-            <a:ext cx="2542032" cy="1188720"/>
-          </a:xfrm>
-          <a:prstGeom prst="roundRect">
-            <a:avLst>
-              <a:gd name="adj" fmla="val 3846"/>
-            </a:avLst>
-          </a:prstGeom>
-          <a:solidFill>
-            <a:srgbClr val="15171B"/>
-          </a:solidFill>
-          <a:ln w="12700">
-            <a:solidFill>
-              <a:srgbClr val="15171B"/>
-            </a:solidFill>
-            <a:prstDash val="solid"/>
-          </a:ln>
-        </p:spPr>
-      </p:sp>
-      <p:sp>
-        <p:nvSpPr>
-          <p:cNvPr id="30" name="Text 28"/>
-          <p:cNvSpPr/>
-          <p:nvPr/>
-        </p:nvSpPr>
-        <p:spPr>
-          <a:xfrm>
-            <a:off x="713232" y="3941064"/>
-            <a:ext cx="2212848" cy="310896"/>
-          </a:xfrm>
-          <a:prstGeom prst="rect">
-            <a:avLst/>
-          </a:prstGeom>
-          <a:noFill/>
-          <a:ln/>
-        </p:spPr>
-        <p:txBody>
-          <a:bodyPr wrap="square" lIns="0" tIns="0" rIns="0" bIns="0" rtlCol="0" anchor="ctr"/>
-          <a:lstStyle/>
-          <a:p>
-            <a:pPr indent="0" marL="0">
-              <a:buNone/>
-            </a:pPr>
-            <a:r>
-              <a:rPr lang="en-US" sz="1300" b="1" dirty="0">
-                <a:solidFill>
-                  <a:srgbClr val="FFFFFF"/>
-                </a:solidFill>
-                <a:latin typeface="Calibri" pitchFamily="34" charset="0"/>
-                <a:ea typeface="Calibri" pitchFamily="34" charset="-122"/>
-                <a:cs typeface="Calibri" pitchFamily="34" charset="-120"/>
-              </a:rPr>
-              <a:t>KOI alert</a:t>
-            </a:r>
-            <a:endParaRPr lang="en-US" sz="1300" dirty="0"/>
-          </a:p>
-        </p:txBody>
-      </p:sp>
-      <p:sp>
-        <p:nvSpPr>
-          <p:cNvPr id="31" name="Text 29"/>
-          <p:cNvSpPr/>
-          <p:nvPr/>
-        </p:nvSpPr>
-        <p:spPr>
-          <a:xfrm>
-            <a:off x="713232" y="4270248"/>
-            <a:ext cx="2212848" cy="566928"/>
-          </a:xfrm>
-          <a:prstGeom prst="rect">
-            <a:avLst/>
-          </a:prstGeom>
-          <a:noFill/>
-          <a:ln/>
-        </p:spPr>
-        <p:txBody>
-          <a:bodyPr wrap="square" lIns="0" tIns="0" rIns="0" bIns="0" rtlCol="0" anchor="ctr"/>
-          <a:lstStyle/>
-          <a:p>
-            <a:pPr indent="0" marL="0">
-              <a:lnSpc>
-                <a:spcPts val="1400"/>
-              </a:lnSpc>
-              <a:buNone/>
-            </a:pPr>
-            <a:r>
-              <a:rPr lang="en-US" sz="1050" dirty="0">
-                <a:solidFill>
-                  <a:srgbClr val="B4B7BD"/>
-                </a:solidFill>
-                <a:latin typeface="Calibri" pitchFamily="34" charset="0"/>
-                <a:ea typeface="Calibri" pitchFamily="34" charset="-122"/>
-                <a:cs typeface="Calibri" pitchFamily="34" charset="-120"/>
-              </a:rPr>
-              <a:t>Ingested into Cortex</a:t>
-            </a:r>
-            <a:endParaRPr lang="en-US" sz="1050" dirty="0"/>
-          </a:p>
-        </p:txBody>
-      </p:sp>
-      <p:sp>
-        <p:nvSpPr>
-          <p:cNvPr id="32" name="Shape 30"/>
-          <p:cNvSpPr/>
-          <p:nvPr/>
-        </p:nvSpPr>
-        <p:spPr>
-          <a:xfrm>
-            <a:off x="713232" y="4727448"/>
-            <a:ext cx="457200" cy="54864"/>
-          </a:xfrm>
-          <a:prstGeom prst="roundRect">
-            <a:avLst>
-              <a:gd name="adj" fmla="val 50000"/>
-            </a:avLst>
-          </a:prstGeom>
-          <a:solidFill>
-            <a:srgbClr val="E8551F"/>
-          </a:solidFill>
-          <a:ln w="12700">
-            <a:solidFill>
-              <a:srgbClr val="E8551F"/>
-            </a:solidFill>
-            <a:prstDash val="solid"/>
-          </a:ln>
-        </p:spPr>
-      </p:sp>
-      <p:sp>
-        <p:nvSpPr>
-          <p:cNvPr id="33" name="Shape 31"/>
-          <p:cNvSpPr/>
-          <p:nvPr/>
-        </p:nvSpPr>
-        <p:spPr>
-          <a:xfrm>
-            <a:off x="3099816" y="4297680"/>
-            <a:ext cx="274320" cy="182880"/>
-          </a:xfrm>
-          <a:prstGeom prst="rightArrow">
-            <a:avLst/>
-          </a:prstGeom>
-          <a:solidFill>
-            <a:srgbClr val="E8551F"/>
-          </a:solidFill>
-          <a:ln w="12700">
-            <a:solidFill>
-              <a:srgbClr val="E8551F"/>
-            </a:solidFill>
-            <a:prstDash val="solid"/>
-          </a:ln>
-        </p:spPr>
-      </p:sp>
-      <p:sp>
-        <p:nvSpPr>
-          <p:cNvPr id="34" name="Shape 32"/>
-          <p:cNvSpPr/>
-          <p:nvPr/>
-        </p:nvSpPr>
-        <p:spPr>
-          <a:xfrm>
-            <a:off x="3383280" y="3794760"/>
-            <a:ext cx="2542032" cy="1188720"/>
-          </a:xfrm>
-          <a:prstGeom prst="roundRect">
-            <a:avLst>
-              <a:gd name="adj" fmla="val 3846"/>
-            </a:avLst>
-          </a:prstGeom>
-          <a:solidFill>
-            <a:srgbClr val="15171B"/>
-          </a:solidFill>
-          <a:ln w="12700">
-            <a:solidFill>
-              <a:srgbClr val="15171B"/>
-            </a:solidFill>
-            <a:prstDash val="solid"/>
-          </a:ln>
-        </p:spPr>
-      </p:sp>
-      <p:sp>
-        <p:nvSpPr>
-          <p:cNvPr id="35" name="Text 33"/>
-          <p:cNvSpPr/>
-          <p:nvPr/>
-        </p:nvSpPr>
-        <p:spPr>
-          <a:xfrm>
-            <a:off x="3547872" y="3941064"/>
-            <a:ext cx="2212848" cy="310896"/>
-          </a:xfrm>
-          <a:prstGeom prst="rect">
-            <a:avLst/>
-          </a:prstGeom>
-          <a:noFill/>
-          <a:ln/>
-        </p:spPr>
-        <p:txBody>
-          <a:bodyPr wrap="square" lIns="0" tIns="0" rIns="0" bIns="0" rtlCol="0" anchor="ctr"/>
-          <a:lstStyle/>
-          <a:p>
-            <a:pPr indent="0" marL="0">
-              <a:buNone/>
-            </a:pPr>
-            <a:r>
-              <a:rPr lang="en-US" sz="1300" b="1" dirty="0">
-                <a:solidFill>
-                  <a:srgbClr val="FFFFFF"/>
-                </a:solidFill>
-                <a:latin typeface="Calibri" pitchFamily="34" charset="0"/>
-                <a:ea typeface="Calibri" pitchFamily="34" charset="-122"/>
-                <a:cs typeface="Calibri" pitchFamily="34" charset="-120"/>
-              </a:rPr>
-              <a:t>Triage playbook</a:t>
-            </a:r>
-            <a:endParaRPr lang="en-US" sz="1300" dirty="0"/>
-          </a:p>
-        </p:txBody>
-      </p:sp>
-      <p:sp>
-        <p:nvSpPr>
-          <p:cNvPr id="36" name="Text 34"/>
-          <p:cNvSpPr/>
-          <p:nvPr/>
-        </p:nvSpPr>
-        <p:spPr>
-          <a:xfrm>
-            <a:off x="3547872" y="4270248"/>
-            <a:ext cx="2212848" cy="566928"/>
-          </a:xfrm>
-          <a:prstGeom prst="rect">
-            <a:avLst/>
-          </a:prstGeom>
-          <a:noFill/>
-          <a:ln/>
-        </p:spPr>
-        <p:txBody>
-          <a:bodyPr wrap="square" lIns="0" tIns="0" rIns="0" bIns="0" rtlCol="0" anchor="ctr"/>
-          <a:lstStyle/>
-          <a:p>
-            <a:pPr indent="0" marL="0">
-              <a:lnSpc>
-                <a:spcPts val="1400"/>
-              </a:lnSpc>
-              <a:buNone/>
-            </a:pPr>
-            <a:r>
-              <a:rPr lang="en-US" sz="1050" dirty="0">
-                <a:solidFill>
-                  <a:srgbClr val="B4B7BD"/>
-                </a:solidFill>
-                <a:latin typeface="Calibri" pitchFamily="34" charset="0"/>
-                <a:ea typeface="Calibri" pitchFamily="34" charset="-122"/>
-                <a:cs typeface="Calibri" pitchFamily="34" charset="-120"/>
-              </a:rPr>
-              <a:t>Investigate + classify</a:t>
-            </a:r>
-            <a:endParaRPr lang="en-US" sz="1050" dirty="0"/>
-          </a:p>
-        </p:txBody>
-      </p:sp>
-      <p:sp>
-        <p:nvSpPr>
-          <p:cNvPr id="37" name="Shape 35"/>
-          <p:cNvSpPr/>
-          <p:nvPr/>
-        </p:nvSpPr>
-        <p:spPr>
-          <a:xfrm>
-            <a:off x="3547872" y="4727448"/>
-            <a:ext cx="457200" cy="54864"/>
-          </a:xfrm>
-          <a:prstGeom prst="roundRect">
-            <a:avLst>
-              <a:gd name="adj" fmla="val 50000"/>
-            </a:avLst>
-          </a:prstGeom>
-          <a:solidFill>
-            <a:srgbClr val="E8551F"/>
-          </a:solidFill>
-          <a:ln w="12700">
-            <a:solidFill>
-              <a:srgbClr val="E8551F"/>
-            </a:solidFill>
-            <a:prstDash val="solid"/>
-          </a:ln>
-        </p:spPr>
-      </p:sp>
-      <p:sp>
-        <p:nvSpPr>
-          <p:cNvPr id="38" name="Shape 36"/>
-          <p:cNvSpPr/>
-          <p:nvPr/>
-        </p:nvSpPr>
-        <p:spPr>
-          <a:xfrm>
-            <a:off x="5934456" y="4297680"/>
-            <a:ext cx="274320" cy="182880"/>
-          </a:xfrm>
-          <a:prstGeom prst="rightArrow">
-            <a:avLst/>
-          </a:prstGeom>
-          <a:solidFill>
-            <a:srgbClr val="E8551F"/>
-          </a:solidFill>
-          <a:ln w="12700">
-            <a:solidFill>
-              <a:srgbClr val="E8551F"/>
-            </a:solidFill>
-            <a:prstDash val="solid"/>
-          </a:ln>
-        </p:spPr>
-      </p:sp>
-      <p:sp>
-        <p:nvSpPr>
-          <p:cNvPr id="39" name="Shape 37"/>
-          <p:cNvSpPr/>
-          <p:nvPr/>
-        </p:nvSpPr>
-        <p:spPr>
-          <a:xfrm>
-            <a:off x="6217920" y="3794760"/>
-            <a:ext cx="2542032" cy="1188720"/>
-          </a:xfrm>
-          <a:prstGeom prst="roundRect">
-            <a:avLst>
-              <a:gd name="adj" fmla="val 3846"/>
-            </a:avLst>
-          </a:prstGeom>
-          <a:solidFill>
-            <a:srgbClr val="15171B"/>
-          </a:solidFill>
-          <a:ln w="12700">
-            <a:solidFill>
-              <a:srgbClr val="15171B"/>
-            </a:solidFill>
-            <a:prstDash val="solid"/>
-          </a:ln>
-        </p:spPr>
-      </p:sp>
-      <p:sp>
-        <p:nvSpPr>
-          <p:cNvPr id="40" name="Text 38"/>
-          <p:cNvSpPr/>
-          <p:nvPr/>
-        </p:nvSpPr>
-        <p:spPr>
-          <a:xfrm>
-            <a:off x="6382512" y="3941064"/>
-            <a:ext cx="2212848" cy="310896"/>
-          </a:xfrm>
-          <a:prstGeom prst="rect">
-            <a:avLst/>
-          </a:prstGeom>
-          <a:noFill/>
-          <a:ln/>
-        </p:spPr>
-        <p:txBody>
-          <a:bodyPr wrap="square" lIns="0" tIns="0" rIns="0" bIns="0" rtlCol="0" anchor="ctr"/>
-          <a:lstStyle/>
-          <a:p>
-            <a:pPr indent="0" marL="0">
-              <a:buNone/>
-            </a:pPr>
-            <a:r>
-              <a:rPr lang="en-US" sz="1300" b="1" dirty="0">
-                <a:solidFill>
-                  <a:srgbClr val="FFFFFF"/>
-                </a:solidFill>
-                <a:latin typeface="Calibri" pitchFamily="34" charset="0"/>
-                <a:ea typeface="Calibri" pitchFamily="34" charset="-122"/>
-                <a:cs typeface="Calibri" pitchFamily="34" charset="-120"/>
-              </a:rPr>
-              <a:t>Verdict</a:t>
-            </a:r>
-            <a:endParaRPr lang="en-US" sz="1300" dirty="0"/>
-          </a:p>
-        </p:txBody>
-      </p:sp>
-      <p:sp>
-        <p:nvSpPr>
-          <p:cNvPr id="41" name="Text 39"/>
-          <p:cNvSpPr/>
-          <p:nvPr/>
-        </p:nvSpPr>
-        <p:spPr>
-          <a:xfrm>
-            <a:off x="6382512" y="4270248"/>
-            <a:ext cx="2212848" cy="566928"/>
-          </a:xfrm>
-          <a:prstGeom prst="rect">
-            <a:avLst/>
-          </a:prstGeom>
-          <a:noFill/>
-          <a:ln/>
-        </p:spPr>
-        <p:txBody>
-          <a:bodyPr wrap="square" lIns="0" tIns="0" rIns="0" bIns="0" rtlCol="0" anchor="ctr"/>
-          <a:lstStyle/>
-          <a:p>
-            <a:pPr indent="0" marL="0">
-              <a:lnSpc>
-                <a:spcPts val="1400"/>
-              </a:lnSpc>
-              <a:buNone/>
-            </a:pPr>
-            <a:r>
-              <a:rPr lang="en-US" sz="1050" dirty="0">
-                <a:solidFill>
-                  <a:srgbClr val="B4B7BD"/>
-                </a:solidFill>
-                <a:latin typeface="Calibri" pitchFamily="34" charset="0"/>
-                <a:ea typeface="Calibri" pitchFamily="34" charset="-122"/>
-                <a:cs typeface="Calibri" pitchFamily="34" charset="-120"/>
-              </a:rPr>
-              <a:t>Auto-close or escalate</a:t>
-            </a:r>
-            <a:endParaRPr lang="en-US" sz="1050" dirty="0"/>
-          </a:p>
-        </p:txBody>
-      </p:sp>
-      <p:sp>
-        <p:nvSpPr>
-          <p:cNvPr id="42" name="Shape 40"/>
-          <p:cNvSpPr/>
-          <p:nvPr/>
-        </p:nvSpPr>
-        <p:spPr>
-          <a:xfrm>
-            <a:off x="6382512" y="4727448"/>
-            <a:ext cx="457200" cy="54864"/>
-          </a:xfrm>
-          <a:prstGeom prst="roundRect">
-            <a:avLst>
-              <a:gd name="adj" fmla="val 50000"/>
-            </a:avLst>
-          </a:prstGeom>
-          <a:solidFill>
-            <a:srgbClr val="E8551F"/>
-          </a:solidFill>
-          <a:ln w="12700">
-            <a:solidFill>
-              <a:srgbClr val="E8551F"/>
-            </a:solidFill>
-            <a:prstDash val="solid"/>
-          </a:ln>
-        </p:spPr>
-      </p:sp>
-      <p:sp>
-        <p:nvSpPr>
-          <p:cNvPr id="43" name="Shape 41"/>
-          <p:cNvSpPr/>
-          <p:nvPr/>
-        </p:nvSpPr>
-        <p:spPr>
-          <a:xfrm>
-            <a:off x="8769096" y="4297680"/>
-            <a:ext cx="274320" cy="182880"/>
-          </a:xfrm>
-          <a:prstGeom prst="rightArrow">
-            <a:avLst/>
-          </a:prstGeom>
-          <a:solidFill>
-            <a:srgbClr val="E8551F"/>
-          </a:solidFill>
-          <a:ln w="12700">
-            <a:solidFill>
-              <a:srgbClr val="E8551F"/>
-            </a:solidFill>
-            <a:prstDash val="solid"/>
-          </a:ln>
-        </p:spPr>
-      </p:sp>
-      <p:sp>
-        <p:nvSpPr>
-          <p:cNvPr id="44" name="Shape 42"/>
-          <p:cNvSpPr/>
-          <p:nvPr/>
-        </p:nvSpPr>
-        <p:spPr>
-          <a:xfrm>
-            <a:off x="9052560" y="3794760"/>
-            <a:ext cx="2542032" cy="1188720"/>
-          </a:xfrm>
-          <a:prstGeom prst="roundRect">
-            <a:avLst>
-              <a:gd name="adj" fmla="val 3846"/>
-            </a:avLst>
-          </a:prstGeom>
-          <a:solidFill>
-            <a:srgbClr val="15171B"/>
-          </a:solidFill>
-          <a:ln w="12700">
-            <a:solidFill>
-              <a:srgbClr val="15171B"/>
-            </a:solidFill>
-            <a:prstDash val="solid"/>
-          </a:ln>
-        </p:spPr>
-      </p:sp>
-      <p:sp>
-        <p:nvSpPr>
-          <p:cNvPr id="45" name="Text 43"/>
-          <p:cNvSpPr/>
-          <p:nvPr/>
-        </p:nvSpPr>
-        <p:spPr>
-          <a:xfrm>
-            <a:off x="9217152" y="3941064"/>
-            <a:ext cx="2212848" cy="310896"/>
-          </a:xfrm>
-          <a:prstGeom prst="rect">
-            <a:avLst/>
-          </a:prstGeom>
-          <a:noFill/>
-          <a:ln/>
-        </p:spPr>
-        <p:txBody>
-          <a:bodyPr wrap="square" lIns="0" tIns="0" rIns="0" bIns="0" rtlCol="0" anchor="ctr"/>
-          <a:lstStyle/>
-          <a:p>
-            <a:pPr indent="0" marL="0">
-              <a:buNone/>
-            </a:pPr>
-            <a:r>
-              <a:rPr lang="en-US" sz="1300" b="1" dirty="0">
-                <a:solidFill>
-                  <a:srgbClr val="FFFFFF"/>
-                </a:solidFill>
-                <a:latin typeface="Calibri" pitchFamily="34" charset="0"/>
-                <a:ea typeface="Calibri" pitchFamily="34" charset="-122"/>
-                <a:cs typeface="Calibri" pitchFamily="34" charset="-120"/>
-              </a:rPr>
-              <a:t>Gated response</a:t>
-            </a:r>
-            <a:endParaRPr lang="en-US" sz="1300" dirty="0"/>
-          </a:p>
-        </p:txBody>
-      </p:sp>
-      <p:sp>
-        <p:nvSpPr>
-          <p:cNvPr id="46" name="Text 44"/>
-          <p:cNvSpPr/>
-          <p:nvPr/>
-        </p:nvSpPr>
-        <p:spPr>
-          <a:xfrm>
-            <a:off x="9217152" y="4270248"/>
-            <a:ext cx="2212848" cy="566928"/>
-          </a:xfrm>
-          <a:prstGeom prst="rect">
-            <a:avLst/>
-          </a:prstGeom>
-          <a:noFill/>
-          <a:ln/>
-        </p:spPr>
-        <p:txBody>
-          <a:bodyPr wrap="square" lIns="0" tIns="0" rIns="0" bIns="0" rtlCol="0" anchor="ctr"/>
-          <a:lstStyle/>
-          <a:p>
-            <a:pPr indent="0" marL="0">
-              <a:lnSpc>
-                <a:spcPts val="1400"/>
-              </a:lnSpc>
-              <a:buNone/>
-            </a:pPr>
-            <a:r>
-              <a:rPr lang="en-US" sz="1050" dirty="0">
-                <a:solidFill>
-                  <a:srgbClr val="B4B7BD"/>
-                </a:solidFill>
-                <a:latin typeface="Calibri" pitchFamily="34" charset="0"/>
-                <a:ea typeface="Calibri" pitchFamily="34" charset="-122"/>
-                <a:cs typeface="Calibri" pitchFamily="34" charset="-120"/>
-              </a:rPr>
-              <a:t>Block only on approval</a:t>
-            </a:r>
-            <a:endParaRPr lang="en-US" sz="1050" dirty="0"/>
-          </a:p>
-        </p:txBody>
-      </p:sp>
-      <p:sp>
-        <p:nvSpPr>
-          <p:cNvPr id="47" name="Shape 45"/>
-          <p:cNvSpPr/>
-          <p:nvPr/>
-        </p:nvSpPr>
-        <p:spPr>
-          <a:xfrm>
-            <a:off x="9217152" y="4727448"/>
-            <a:ext cx="457200" cy="54864"/>
-          </a:xfrm>
-          <a:prstGeom prst="roundRect">
-            <a:avLst>
-              <a:gd name="adj" fmla="val 50000"/>
-            </a:avLst>
-          </a:prstGeom>
-          <a:solidFill>
-            <a:srgbClr val="22D3EE"/>
-          </a:solidFill>
-          <a:ln w="12700">
-            <a:solidFill>
-              <a:srgbClr val="22D3EE"/>
-            </a:solidFill>
-            <a:prstDash val="solid"/>
-          </a:ln>
-        </p:spPr>
-      </p:sp>
-      <p:sp>
-        <p:nvSpPr>
-          <p:cNvPr id="48" name="Shape 46"/>
-          <p:cNvSpPr/>
-          <p:nvPr/>
-        </p:nvSpPr>
-        <p:spPr>
-          <a:xfrm>
-            <a:off x="548640" y="5257800"/>
-            <a:ext cx="11064240" cy="960120"/>
-          </a:xfrm>
-          <a:prstGeom prst="roundRect">
-            <a:avLst>
-              <a:gd name="adj" fmla="val 4762"/>
-            </a:avLst>
-          </a:prstGeom>
-          <a:solidFill>
-            <a:srgbClr val="1C2026"/>
-          </a:solidFill>
-          <a:ln w="12700">
-            <a:solidFill>
-              <a:srgbClr val="1C2026"/>
-            </a:solidFill>
-            <a:prstDash val="solid"/>
-          </a:ln>
-        </p:spPr>
-      </p:sp>
-      <p:sp>
-        <p:nvSpPr>
-          <p:cNvPr id="49" name="Shape 47"/>
+          <p:cNvPr id="42" name="Text 40"/>
           <p:cNvSpPr/>
           <p:nvPr/>
         </p:nvSpPr>
@@ -10244,33 +10242,6 @@
             <a:off x="804672" y="5513832"/>
             <a:ext cx="329184" cy="329184"/>
           </a:xfrm>
-          <a:prstGeom prst="roundRect">
-            <a:avLst>
-              <a:gd name="adj" fmla="val 25000"/>
-            </a:avLst>
-          </a:prstGeom>
-          <a:solidFill>
-            <a:srgbClr val="E8551F"/>
-          </a:solidFill>
-          <a:ln w="12700">
-            <a:solidFill>
-              <a:srgbClr val="E8551F"/>
-            </a:solidFill>
-            <a:prstDash val="solid"/>
-          </a:ln>
-        </p:spPr>
-      </p:sp>
-      <p:sp>
-        <p:nvSpPr>
-          <p:cNvPr id="50" name="Text 48"/>
-          <p:cNvSpPr/>
-          <p:nvPr/>
-        </p:nvSpPr>
-        <p:spPr>
-          <a:xfrm>
-            <a:off x="804672" y="5513832"/>
-            <a:ext cx="329184" cy="329184"/>
-          </a:xfrm>
           <a:prstGeom prst="rect">
             <a:avLst/>
           </a:prstGeom>
@@ -10301,7 +10272,7 @@
       </p:sp>
       <p:sp>
         <p:nvSpPr>
-          <p:cNvPr id="51" name="Text 49"/>
+          <p:cNvPr id="43" name="Text 41"/>
           <p:cNvSpPr/>
           <p:nvPr/>
         </p:nvSpPr>
@@ -10340,7 +10311,7 @@
       </p:sp>
       <p:sp>
         <p:nvSpPr>
-          <p:cNvPr id="52" name="Text 50"/>
+          <p:cNvPr id="44" name="Text 42"/>
           <p:cNvSpPr/>
           <p:nvPr/>
         </p:nvSpPr>
@@ -10574,7 +10545,7 @@
           <a:ln/>
         </p:spPr>
         <p:txBody>
-          <a:bodyPr wrap="square" lIns="0" tIns="0" rIns="0" bIns="0" rtlCol="0" anchor="ctr"/>
+          <a:bodyPr wrap="square" lIns="0" tIns="0" rIns="0" bIns="0" rtlCol="0" anchor="t"/>
           <a:lstStyle/>
           <a:p>
             <a:pPr indent="0" marL="0">
@@ -10626,13 +10597,11 @@
         </p:nvSpPr>
         <p:spPr>
           <a:xfrm>
-            <a:off x="713232" y="2734056"/>
-            <a:ext cx="457200" cy="54864"/>
-          </a:xfrm>
-          <a:prstGeom prst="roundRect">
-            <a:avLst>
-              <a:gd name="adj" fmla="val 50000"/>
-            </a:avLst>
+            <a:off x="3154680" y="2194560"/>
+            <a:ext cx="274320" cy="182880"/>
+          </a:xfrm>
+          <a:prstGeom prst="rightArrow">
+            <a:avLst/>
           </a:prstGeom>
           <a:solidFill>
             <a:srgbClr val="E8551F"/>
@@ -10653,7 +10622,135 @@
         </p:nvSpPr>
         <p:spPr>
           <a:xfrm>
-            <a:off x="3154680" y="2194560"/>
+            <a:off x="3438144" y="1572768"/>
+            <a:ext cx="2587752" cy="1417320"/>
+          </a:xfrm>
+          <a:prstGeom prst="roundRect">
+            <a:avLst>
+              <a:gd name="adj" fmla="val 3226"/>
+            </a:avLst>
+          </a:prstGeom>
+          <a:solidFill>
+            <a:srgbClr val="15171B"/>
+          </a:solidFill>
+          <a:ln w="12700">
+            <a:solidFill>
+              <a:srgbClr val="15171B"/>
+            </a:solidFill>
+            <a:prstDash val="solid"/>
+          </a:ln>
+        </p:spPr>
+      </p:sp>
+      <p:sp>
+        <p:nvSpPr>
+          <p:cNvPr id="9" name="Text 7"/>
+          <p:cNvSpPr/>
+          <p:nvPr/>
+        </p:nvSpPr>
+        <p:spPr>
+          <a:xfrm>
+            <a:off x="3602736" y="1719072"/>
+            <a:ext cx="2258568" cy="310896"/>
+          </a:xfrm>
+          <a:prstGeom prst="rect">
+            <a:avLst/>
+          </a:prstGeom>
+          <a:noFill/>
+          <a:ln/>
+        </p:spPr>
+        <p:txBody>
+          <a:bodyPr wrap="square" lIns="0" tIns="0" rIns="0" bIns="0" rtlCol="0" anchor="ctr"/>
+          <a:lstStyle/>
+          <a:p>
+            <a:pPr indent="0" marL="0">
+              <a:buNone/>
+            </a:pPr>
+            <a:r>
+              <a:rPr lang="en-US" sz="1300" b="1" dirty="0">
+                <a:solidFill>
+                  <a:srgbClr val="FFFFFF"/>
+                </a:solidFill>
+                <a:latin typeface="Calibri" pitchFamily="34" charset="0"/>
+                <a:ea typeface="Calibri" pitchFamily="34" charset="-122"/>
+                <a:cs typeface="Calibri" pitchFamily="34" charset="-120"/>
+              </a:rPr>
+              <a:t>Investigate item</a:t>
+            </a:r>
+            <a:endParaRPr lang="en-US" sz="1300" dirty="0"/>
+          </a:p>
+        </p:txBody>
+      </p:sp>
+      <p:sp>
+        <p:nvSpPr>
+          <p:cNvPr id="10" name="Text 8"/>
+          <p:cNvSpPr/>
+          <p:nvPr/>
+        </p:nvSpPr>
+        <p:spPr>
+          <a:xfrm>
+            <a:off x="3602736" y="2048256"/>
+            <a:ext cx="2258568" cy="795528"/>
+          </a:xfrm>
+          <a:prstGeom prst="rect">
+            <a:avLst/>
+          </a:prstGeom>
+          <a:noFill/>
+          <a:ln/>
+        </p:spPr>
+        <p:txBody>
+          <a:bodyPr wrap="square" lIns="0" tIns="0" rIns="0" bIns="0" rtlCol="0" anchor="t"/>
+          <a:lstStyle/>
+          <a:p>
+            <a:pPr indent="0" marL="0">
+              <a:lnSpc>
+                <a:spcPts val="1400"/>
+              </a:lnSpc>
+              <a:buNone/>
+            </a:pPr>
+            <a:r>
+              <a:rPr lang="en-US" sz="1050" dirty="0">
+                <a:solidFill>
+                  <a:srgbClr val="B4B7BD"/>
+                </a:solidFill>
+                <a:latin typeface="Calibri" pitchFamily="34" charset="0"/>
+                <a:ea typeface="Calibri" pitchFamily="34" charset="-122"/>
+                <a:cs typeface="Calibri" pitchFamily="34" charset="-120"/>
+              </a:rPr>
+              <a:t>Catalog risk, exposure,</a:t>
+            </a:r>
+            <a:endParaRPr lang="en-US" sz="1050" dirty="0"/>
+          </a:p>
+          <a:p>
+            <a:pPr indent="0" marL="0">
+              <a:lnSpc>
+                <a:spcPts val="1400"/>
+              </a:lnSpc>
+              <a:buNone/>
+            </a:pPr>
+            <a:r>
+              <a:rPr lang="en-US" sz="1050" dirty="0">
+                <a:solidFill>
+                  <a:srgbClr val="B4B7BD"/>
+                </a:solidFill>
+                <a:latin typeface="Calibri" pitchFamily="34" charset="0"/>
+                <a:ea typeface="Calibri" pitchFamily="34" charset="-122"/>
+                <a:cs typeface="Calibri" pitchFamily="34" charset="-120"/>
+              </a:rPr>
+              <a:t>governance, history</a:t>
+            </a:r>
+            <a:endParaRPr lang="en-US" sz="1050" dirty="0"/>
+          </a:p>
+        </p:txBody>
+      </p:sp>
+      <p:sp>
+        <p:nvSpPr>
+          <p:cNvPr id="11" name="Shape 9"/>
+          <p:cNvSpPr/>
+          <p:nvPr/>
+        </p:nvSpPr>
+        <p:spPr>
+          <a:xfrm>
+            <a:off x="6044184" y="2194560"/>
             <a:ext cx="274320" cy="182880"/>
           </a:xfrm>
           <a:prstGeom prst="rightArrow">
@@ -10672,13 +10769,13 @@
       </p:sp>
       <p:sp>
         <p:nvSpPr>
-          <p:cNvPr id="9" name="Shape 7"/>
-          <p:cNvSpPr/>
-          <p:nvPr/>
-        </p:nvSpPr>
-        <p:spPr>
-          <a:xfrm>
-            <a:off x="3438144" y="1572768"/>
+          <p:cNvPr id="12" name="Shape 10"/>
+          <p:cNvSpPr/>
+          <p:nvPr/>
+        </p:nvSpPr>
+        <p:spPr>
+          <a:xfrm>
+            <a:off x="6327648" y="1572768"/>
             <a:ext cx="2587752" cy="1417320"/>
           </a:xfrm>
           <a:prstGeom prst="roundRect">
@@ -10699,13 +10796,13 @@
       </p:sp>
       <p:sp>
         <p:nvSpPr>
-          <p:cNvPr id="10" name="Text 8"/>
-          <p:cNvSpPr/>
-          <p:nvPr/>
-        </p:nvSpPr>
-        <p:spPr>
-          <a:xfrm>
-            <a:off x="3602736" y="1719072"/>
+          <p:cNvPr id="13" name="Text 11"/>
+          <p:cNvSpPr/>
+          <p:nvPr/>
+        </p:nvSpPr>
+        <p:spPr>
+          <a:xfrm>
+            <a:off x="6492240" y="1719072"/>
             <a:ext cx="2258568" cy="310896"/>
           </a:xfrm>
           <a:prstGeom prst="rect">
@@ -10730,7 +10827,7 @@
                 <a:ea typeface="Calibri" pitchFamily="34" charset="-122"/>
                 <a:cs typeface="Calibri" pitchFamily="34" charset="-120"/>
               </a:rPr>
-              <a:t>Investigate item</a:t>
+              <a:t>Investigate device</a:t>
             </a:r>
             <a:endParaRPr lang="en-US" sz="1300" dirty="0"/>
           </a:p>
@@ -10738,13 +10835,13 @@
       </p:sp>
       <p:sp>
         <p:nvSpPr>
-          <p:cNvPr id="11" name="Text 9"/>
-          <p:cNvSpPr/>
-          <p:nvPr/>
-        </p:nvSpPr>
-        <p:spPr>
-          <a:xfrm>
-            <a:off x="3602736" y="2048256"/>
+          <p:cNvPr id="14" name="Text 12"/>
+          <p:cNvSpPr/>
+          <p:nvPr/>
+        </p:nvSpPr>
+        <p:spPr>
+          <a:xfrm>
+            <a:off x="6492240" y="2048256"/>
             <a:ext cx="2258568" cy="795528"/>
           </a:xfrm>
           <a:prstGeom prst="rect">
@@ -10754,7 +10851,7 @@
           <a:ln/>
         </p:spPr>
         <p:txBody>
-          <a:bodyPr wrap="square" lIns="0" tIns="0" rIns="0" bIns="0" rtlCol="0" anchor="ctr"/>
+          <a:bodyPr wrap="square" lIns="0" tIns="0" rIns="0" bIns="0" rtlCol="0" anchor="t"/>
           <a:lstStyle/>
           <a:p>
             <a:pPr indent="0" marL="0">
@@ -10766,13 +10863,13 @@
             <a:r>
               <a:rPr lang="en-US" sz="1050" dirty="0">
                 <a:solidFill>
-                  <a:srgbClr val="B4B7BD"/>
-                </a:solidFill>
-                <a:latin typeface="Calibri" pitchFamily="34" charset="0"/>
-                <a:ea typeface="Calibri" pitchFamily="34" charset="-122"/>
-                <a:cs typeface="Calibri" pitchFamily="34" charset="-120"/>
-              </a:rPr>
-              <a:t>Catalog risk, exposure,</a:t>
+                  <a:srgbClr val="22D3EE"/>
+                </a:solidFill>
+                <a:latin typeface="Calibri" pitchFamily="34" charset="0"/>
+                <a:ea typeface="Calibri" pitchFamily="34" charset="-122"/>
+                <a:cs typeface="Calibri" pitchFamily="34" charset="-120"/>
+              </a:rPr>
+              <a:t>Everything on the host,</a:t>
             </a:r>
             <a:endParaRPr lang="en-US" sz="1050" dirty="0"/>
           </a:p>
@@ -10786,13 +10883,13 @@
             <a:r>
               <a:rPr lang="en-US" sz="1050" dirty="0">
                 <a:solidFill>
-                  <a:srgbClr val="B4B7BD"/>
-                </a:solidFill>
-                <a:latin typeface="Calibri" pitchFamily="34" charset="0"/>
-                <a:ea typeface="Calibri" pitchFamily="34" charset="-122"/>
-                <a:cs typeface="Calibri" pitchFamily="34" charset="-120"/>
-              </a:rPr>
-              <a:t>governance, history</a:t>
+                  <a:srgbClr val="22D3EE"/>
+                </a:solidFill>
+                <a:latin typeface="Calibri" pitchFamily="34" charset="0"/>
+                <a:ea typeface="Calibri" pitchFamily="34" charset="-122"/>
+                <a:cs typeface="Calibri" pitchFamily="34" charset="-120"/>
+              </a:rPr>
+              <a:t>and what is risky</a:t>
             </a:r>
             <a:endParaRPr lang="en-US" sz="1050" dirty="0"/>
           </a:p>
@@ -10800,19 +10897,17 @@
       </p:sp>
       <p:sp>
         <p:nvSpPr>
-          <p:cNvPr id="12" name="Shape 10"/>
-          <p:cNvSpPr/>
-          <p:nvPr/>
-        </p:nvSpPr>
-        <p:spPr>
-          <a:xfrm>
-            <a:off x="3602736" y="2734056"/>
-            <a:ext cx="457200" cy="54864"/>
-          </a:xfrm>
-          <a:prstGeom prst="roundRect">
-            <a:avLst>
-              <a:gd name="adj" fmla="val 50000"/>
-            </a:avLst>
+          <p:cNvPr id="15" name="Shape 13"/>
+          <p:cNvSpPr/>
+          <p:nvPr/>
+        </p:nvSpPr>
+        <p:spPr>
+          <a:xfrm>
+            <a:off x="8933688" y="2194560"/>
+            <a:ext cx="274320" cy="182880"/>
+          </a:xfrm>
+          <a:prstGeom prst="rightArrow">
+            <a:avLst/>
           </a:prstGeom>
           <a:solidFill>
             <a:srgbClr val="E8551F"/>
@@ -10827,17 +10922,174 @@
       </p:sp>
       <p:sp>
         <p:nvSpPr>
-          <p:cNvPr id="13" name="Shape 11"/>
-          <p:cNvSpPr/>
-          <p:nvPr/>
-        </p:nvSpPr>
-        <p:spPr>
-          <a:xfrm>
-            <a:off x="6044184" y="2194560"/>
-            <a:ext cx="274320" cy="182880"/>
-          </a:xfrm>
-          <a:prstGeom prst="rightArrow">
-            <a:avLst/>
+          <p:cNvPr id="16" name="Shape 14"/>
+          <p:cNvSpPr/>
+          <p:nvPr/>
+        </p:nvSpPr>
+        <p:spPr>
+          <a:xfrm>
+            <a:off x="9217152" y="1572768"/>
+            <a:ext cx="2587752" cy="1417320"/>
+          </a:xfrm>
+          <a:prstGeom prst="roundRect">
+            <a:avLst>
+              <a:gd name="adj" fmla="val 3226"/>
+            </a:avLst>
+          </a:prstGeom>
+          <a:solidFill>
+            <a:srgbClr val="15171B"/>
+          </a:solidFill>
+          <a:ln w="12700">
+            <a:solidFill>
+              <a:srgbClr val="15171B"/>
+            </a:solidFill>
+            <a:prstDash val="solid"/>
+          </a:ln>
+        </p:spPr>
+      </p:sp>
+      <p:sp>
+        <p:nvSpPr>
+          <p:cNvPr id="17" name="Text 15"/>
+          <p:cNvSpPr/>
+          <p:nvPr/>
+        </p:nvSpPr>
+        <p:spPr>
+          <a:xfrm>
+            <a:off x="9381744" y="1719072"/>
+            <a:ext cx="2258568" cy="310896"/>
+          </a:xfrm>
+          <a:prstGeom prst="rect">
+            <a:avLst/>
+          </a:prstGeom>
+          <a:noFill/>
+          <a:ln/>
+        </p:spPr>
+        <p:txBody>
+          <a:bodyPr wrap="square" lIns="0" tIns="0" rIns="0" bIns="0" rtlCol="0" anchor="ctr"/>
+          <a:lstStyle/>
+          <a:p>
+            <a:pPr indent="0" marL="0">
+              <a:buNone/>
+            </a:pPr>
+            <a:r>
+              <a:rPr lang="en-US" sz="1300" b="1" dirty="0">
+                <a:solidFill>
+                  <a:srgbClr val="FFFFFF"/>
+                </a:solidFill>
+                <a:latin typeface="Calibri" pitchFamily="34" charset="0"/>
+                <a:ea typeface="Calibri" pitchFamily="34" charset="-122"/>
+                <a:cs typeface="Calibri" pitchFamily="34" charset="-120"/>
+              </a:rPr>
+              <a:t>Verdict</a:t>
+            </a:r>
+            <a:endParaRPr lang="en-US" sz="1300" dirty="0"/>
+          </a:p>
+        </p:txBody>
+      </p:sp>
+      <p:sp>
+        <p:nvSpPr>
+          <p:cNvPr id="18" name="Text 16"/>
+          <p:cNvSpPr/>
+          <p:nvPr/>
+        </p:nvSpPr>
+        <p:spPr>
+          <a:xfrm>
+            <a:off x="9381744" y="2048256"/>
+            <a:ext cx="2258568" cy="795528"/>
+          </a:xfrm>
+          <a:prstGeom prst="rect">
+            <a:avLst/>
+          </a:prstGeom>
+          <a:noFill/>
+          <a:ln/>
+        </p:spPr>
+        <p:txBody>
+          <a:bodyPr wrap="square" lIns="0" tIns="0" rIns="0" bIns="0" rtlCol="0" anchor="t"/>
+          <a:lstStyle/>
+          <a:p>
+            <a:pPr indent="0" marL="0">
+              <a:lnSpc>
+                <a:spcPts val="1400"/>
+              </a:lnSpc>
+              <a:buNone/>
+            </a:pPr>
+            <a:r>
+              <a:rPr lang="en-US" sz="1050" dirty="0">
+                <a:solidFill>
+                  <a:srgbClr val="B4B7BD"/>
+                </a:solidFill>
+                <a:latin typeface="Calibri" pitchFamily="34" charset="0"/>
+                <a:ea typeface="Calibri" pitchFamily="34" charset="-122"/>
+                <a:cs typeface="Calibri" pitchFamily="34" charset="-120"/>
+              </a:rPr>
+              <a:t>Classify from KOI +</a:t>
+            </a:r>
+            <a:endParaRPr lang="en-US" sz="1050" dirty="0"/>
+          </a:p>
+          <a:p>
+            <a:pPr indent="0" marL="0">
+              <a:lnSpc>
+                <a:spcPts val="1400"/>
+              </a:lnSpc>
+              <a:buNone/>
+            </a:pPr>
+            <a:r>
+              <a:rPr lang="en-US" sz="1050" dirty="0">
+                <a:solidFill>
+                  <a:srgbClr val="B4B7BD"/>
+                </a:solidFill>
+                <a:latin typeface="Calibri" pitchFamily="34" charset="0"/>
+                <a:ea typeface="Calibri" pitchFamily="34" charset="-122"/>
+                <a:cs typeface="Calibri" pitchFamily="34" charset="-120"/>
+              </a:rPr>
+              <a:t>independent catalog risk</a:t>
+            </a:r>
+            <a:endParaRPr lang="en-US" sz="1050" dirty="0"/>
+          </a:p>
+        </p:txBody>
+      </p:sp>
+      <p:sp>
+        <p:nvSpPr>
+          <p:cNvPr id="19" name="Shape 17"/>
+          <p:cNvSpPr/>
+          <p:nvPr/>
+        </p:nvSpPr>
+        <p:spPr>
+          <a:xfrm>
+            <a:off x="548640" y="3310128"/>
+            <a:ext cx="3474720" cy="2487168"/>
+          </a:xfrm>
+          <a:prstGeom prst="roundRect">
+            <a:avLst>
+              <a:gd name="adj" fmla="val 1838"/>
+            </a:avLst>
+          </a:prstGeom>
+          <a:solidFill>
+            <a:srgbClr val="15171B"/>
+          </a:solidFill>
+          <a:ln w="12700">
+            <a:solidFill>
+              <a:srgbClr val="15171B"/>
+            </a:solidFill>
+            <a:prstDash val="solid"/>
+          </a:ln>
+        </p:spPr>
+      </p:sp>
+      <p:sp>
+        <p:nvSpPr>
+          <p:cNvPr id="20" name="Shape 18"/>
+          <p:cNvSpPr/>
+          <p:nvPr/>
+        </p:nvSpPr>
+        <p:spPr>
+          <a:xfrm>
+            <a:off x="804672" y="3566160"/>
+            <a:ext cx="1298448" cy="310896"/>
+          </a:xfrm>
+          <a:prstGeom prst="roundRect">
+            <a:avLst>
+              <a:gd name="adj" fmla="val 23529"/>
+            </a:avLst>
           </a:prstGeom>
           <a:solidFill>
             <a:srgbClr val="E8551F"/>
@@ -10852,18 +11104,141 @@
       </p:sp>
       <p:sp>
         <p:nvSpPr>
-          <p:cNvPr id="14" name="Shape 12"/>
-          <p:cNvSpPr/>
-          <p:nvPr/>
-        </p:nvSpPr>
-        <p:spPr>
-          <a:xfrm>
-            <a:off x="6327648" y="1572768"/>
-            <a:ext cx="2587752" cy="1417320"/>
+          <p:cNvPr id="21" name="Text 19"/>
+          <p:cNvSpPr/>
+          <p:nvPr/>
+        </p:nvSpPr>
+        <p:spPr>
+          <a:xfrm>
+            <a:off x="804672" y="3566160"/>
+            <a:ext cx="1298448" cy="310896"/>
+          </a:xfrm>
+          <a:prstGeom prst="rect">
+            <a:avLst/>
+          </a:prstGeom>
+          <a:noFill/>
+          <a:ln/>
+        </p:spPr>
+        <p:txBody>
+          <a:bodyPr wrap="square" lIns="0" tIns="0" rIns="0" bIns="0" rtlCol="0" anchor="ctr"/>
+          <a:lstStyle/>
+          <a:p>
+            <a:pPr algn="ctr" indent="0" marL="0">
+              <a:buNone/>
+            </a:pPr>
+            <a:r>
+              <a:rPr lang="en-US" sz="1150" b="1" dirty="0">
+                <a:solidFill>
+                  <a:srgbClr val="000000"/>
+                </a:solidFill>
+                <a:latin typeface="Calibri" pitchFamily="34" charset="0"/>
+                <a:ea typeface="Calibri" pitchFamily="34" charset="-122"/>
+                <a:cs typeface="Calibri" pitchFamily="34" charset="-120"/>
+              </a:rPr>
+              <a:t>Malicious</a:t>
+            </a:r>
+            <a:endParaRPr lang="en-US" sz="1150" dirty="0"/>
+          </a:p>
+        </p:txBody>
+      </p:sp>
+      <p:sp>
+        <p:nvSpPr>
+          <p:cNvPr id="22" name="Text 20"/>
+          <p:cNvSpPr/>
+          <p:nvPr/>
+        </p:nvSpPr>
+        <p:spPr>
+          <a:xfrm>
+            <a:off x="804672" y="4041648"/>
+            <a:ext cx="2962656" cy="1005840"/>
+          </a:xfrm>
+          <a:prstGeom prst="rect">
+            <a:avLst/>
+          </a:prstGeom>
+          <a:noFill/>
+          <a:ln/>
+        </p:spPr>
+        <p:txBody>
+          <a:bodyPr wrap="square" lIns="0" tIns="0" rIns="0" bIns="0" rtlCol="0" anchor="t"/>
+          <a:lstStyle/>
+          <a:p>
+            <a:pPr indent="0" marL="0">
+              <a:lnSpc>
+                <a:spcPts val="1300"/>
+              </a:lnSpc>
+              <a:buNone/>
+            </a:pPr>
+            <a:r>
+              <a:rPr lang="en-US" sz="1050" dirty="0">
+                <a:solidFill>
+                  <a:srgbClr val="B4B7BD"/>
+                </a:solidFill>
+                <a:latin typeface="Calibri" pitchFamily="34" charset="0"/>
+                <a:ea typeface="Calibri" pitchFamily="34" charset="-122"/>
+                <a:cs typeface="Calibri" pitchFamily="34" charset="-120"/>
+              </a:rPr>
+              <a:t>Removed from marketplace, publisher compromised, unvetted MCP server, High/Critical risk, or high catalog risk.</a:t>
+            </a:r>
+            <a:endParaRPr lang="en-US" sz="1050" dirty="0"/>
+          </a:p>
+        </p:txBody>
+      </p:sp>
+      <p:sp>
+        <p:nvSpPr>
+          <p:cNvPr id="23" name="Text 21"/>
+          <p:cNvSpPr/>
+          <p:nvPr/>
+        </p:nvSpPr>
+        <p:spPr>
+          <a:xfrm>
+            <a:off x="804672" y="5120640"/>
+            <a:ext cx="2962656" cy="548640"/>
+          </a:xfrm>
+          <a:prstGeom prst="rect">
+            <a:avLst/>
+          </a:prstGeom>
+          <a:noFill/>
+          <a:ln/>
+        </p:spPr>
+        <p:txBody>
+          <a:bodyPr wrap="square" lIns="0" tIns="0" rIns="0" bIns="0" rtlCol="0" anchor="ctr"/>
+          <a:lstStyle/>
+          <a:p>
+            <a:pPr indent="0" marL="0">
+              <a:lnSpc>
+                <a:spcPts val="1300"/>
+              </a:lnSpc>
+              <a:buNone/>
+            </a:pPr>
+            <a:r>
+              <a:rPr lang="en-US" sz="1050" b="1" dirty="0">
+                <a:solidFill>
+                  <a:srgbClr val="FFFFFF"/>
+                </a:solidFill>
+                <a:latin typeface="Calibri" pitchFamily="34" charset="0"/>
+                <a:ea typeface="Calibri" pitchFamily="34" charset="-122"/>
+                <a:cs typeface="Calibri" pitchFamily="34" charset="-120"/>
+              </a:rPr>
+              <a:t>Raise severity, then open an analyst-gated block.</a:t>
+            </a:r>
+            <a:endParaRPr lang="en-US" sz="1050" dirty="0"/>
+          </a:p>
+        </p:txBody>
+      </p:sp>
+      <p:sp>
+        <p:nvSpPr>
+          <p:cNvPr id="24" name="Shape 22"/>
+          <p:cNvSpPr/>
+          <p:nvPr/>
+        </p:nvSpPr>
+        <p:spPr>
+          <a:xfrm>
+            <a:off x="4343400" y="3310128"/>
+            <a:ext cx="3474720" cy="2487168"/>
           </a:xfrm>
           <a:prstGeom prst="roundRect">
             <a:avLst>
-              <a:gd name="adj" fmla="val 3226"/>
+              <a:gd name="adj" fmla="val 1838"/>
             </a:avLst>
           </a:prstGeom>
           <a:solidFill>
@@ -10879,127 +11254,26 @@
       </p:sp>
       <p:sp>
         <p:nvSpPr>
-          <p:cNvPr id="15" name="Text 13"/>
-          <p:cNvSpPr/>
-          <p:nvPr/>
-        </p:nvSpPr>
-        <p:spPr>
-          <a:xfrm>
-            <a:off x="6492240" y="1719072"/>
-            <a:ext cx="2258568" cy="310896"/>
-          </a:xfrm>
-          <a:prstGeom prst="rect">
-            <a:avLst/>
-          </a:prstGeom>
-          <a:noFill/>
-          <a:ln/>
-        </p:spPr>
-        <p:txBody>
-          <a:bodyPr wrap="square" lIns="0" tIns="0" rIns="0" bIns="0" rtlCol="0" anchor="ctr"/>
-          <a:lstStyle/>
-          <a:p>
-            <a:pPr indent="0" marL="0">
-              <a:buNone/>
-            </a:pPr>
-            <a:r>
-              <a:rPr lang="en-US" sz="1300" b="1" dirty="0">
-                <a:solidFill>
-                  <a:srgbClr val="FFFFFF"/>
-                </a:solidFill>
-                <a:latin typeface="Calibri" pitchFamily="34" charset="0"/>
-                <a:ea typeface="Calibri" pitchFamily="34" charset="-122"/>
-                <a:cs typeface="Calibri" pitchFamily="34" charset="-120"/>
-              </a:rPr>
-              <a:t>Investigate device</a:t>
-            </a:r>
-            <a:endParaRPr lang="en-US" sz="1300" dirty="0"/>
-          </a:p>
-        </p:txBody>
-      </p:sp>
-      <p:sp>
-        <p:nvSpPr>
-          <p:cNvPr id="16" name="Text 14"/>
-          <p:cNvSpPr/>
-          <p:nvPr/>
-        </p:nvSpPr>
-        <p:spPr>
-          <a:xfrm>
-            <a:off x="6492240" y="2048256"/>
-            <a:ext cx="2258568" cy="795528"/>
-          </a:xfrm>
-          <a:prstGeom prst="rect">
-            <a:avLst/>
-          </a:prstGeom>
-          <a:noFill/>
-          <a:ln/>
-        </p:spPr>
-        <p:txBody>
-          <a:bodyPr wrap="square" lIns="0" tIns="0" rIns="0" bIns="0" rtlCol="0" anchor="ctr"/>
-          <a:lstStyle/>
-          <a:p>
-            <a:pPr indent="0" marL="0">
-              <a:lnSpc>
-                <a:spcPts val="1400"/>
-              </a:lnSpc>
-              <a:buNone/>
-            </a:pPr>
-            <a:r>
-              <a:rPr lang="en-US" sz="1050" dirty="0">
-                <a:solidFill>
-                  <a:srgbClr val="B4B7BD"/>
-                </a:solidFill>
-                <a:latin typeface="Calibri" pitchFamily="34" charset="0"/>
-                <a:ea typeface="Calibri" pitchFamily="34" charset="-122"/>
-                <a:cs typeface="Calibri" pitchFamily="34" charset="-120"/>
-              </a:rPr>
-              <a:t>Everything on the host,</a:t>
-            </a:r>
-            <a:endParaRPr lang="en-US" sz="1050" dirty="0"/>
-          </a:p>
-          <a:p>
-            <a:pPr indent="0" marL="0">
-              <a:lnSpc>
-                <a:spcPts val="1400"/>
-              </a:lnSpc>
-              <a:buNone/>
-            </a:pPr>
-            <a:r>
-              <a:rPr lang="en-US" sz="1050" dirty="0">
-                <a:solidFill>
-                  <a:srgbClr val="B4B7BD"/>
-                </a:solidFill>
-                <a:latin typeface="Calibri" pitchFamily="34" charset="0"/>
-                <a:ea typeface="Calibri" pitchFamily="34" charset="-122"/>
-                <a:cs typeface="Calibri" pitchFamily="34" charset="-120"/>
-              </a:rPr>
-              <a:t>and what is risky</a:t>
-            </a:r>
-            <a:endParaRPr lang="en-US" sz="1050" dirty="0"/>
-          </a:p>
-        </p:txBody>
-      </p:sp>
-      <p:sp>
-        <p:nvSpPr>
-          <p:cNvPr id="17" name="Shape 15"/>
-          <p:cNvSpPr/>
-          <p:nvPr/>
-        </p:nvSpPr>
-        <p:spPr>
-          <a:xfrm>
-            <a:off x="6492240" y="2734056"/>
-            <a:ext cx="457200" cy="54864"/>
+          <p:cNvPr id="25" name="Shape 23"/>
+          <p:cNvSpPr/>
+          <p:nvPr/>
+        </p:nvSpPr>
+        <p:spPr>
+          <a:xfrm>
+            <a:off x="4599432" y="3566160"/>
+            <a:ext cx="1298448" cy="310896"/>
           </a:xfrm>
           <a:prstGeom prst="roundRect">
             <a:avLst>
-              <a:gd name="adj" fmla="val 50000"/>
+              <a:gd name="adj" fmla="val 23529"/>
             </a:avLst>
           </a:prstGeom>
           <a:solidFill>
-            <a:srgbClr val="22D3EE"/>
+            <a:srgbClr val="F5A524"/>
           </a:solidFill>
           <a:ln w="12700">
             <a:solidFill>
-              <a:srgbClr val="22D3EE"/>
+              <a:srgbClr val="F5A524"/>
             </a:solidFill>
             <a:prstDash val="solid"/>
           </a:ln>
@@ -11007,43 +11281,141 @@
       </p:sp>
       <p:sp>
         <p:nvSpPr>
-          <p:cNvPr id="18" name="Shape 16"/>
-          <p:cNvSpPr/>
-          <p:nvPr/>
-        </p:nvSpPr>
-        <p:spPr>
-          <a:xfrm>
-            <a:off x="8933688" y="2194560"/>
-            <a:ext cx="274320" cy="182880"/>
-          </a:xfrm>
-          <a:prstGeom prst="rightArrow">
-            <a:avLst/>
-          </a:prstGeom>
-          <a:solidFill>
-            <a:srgbClr val="E8551F"/>
-          </a:solidFill>
-          <a:ln w="12700">
-            <a:solidFill>
-              <a:srgbClr val="E8551F"/>
-            </a:solidFill>
-            <a:prstDash val="solid"/>
-          </a:ln>
-        </p:spPr>
-      </p:sp>
-      <p:sp>
-        <p:nvSpPr>
-          <p:cNvPr id="19" name="Shape 17"/>
-          <p:cNvSpPr/>
-          <p:nvPr/>
-        </p:nvSpPr>
-        <p:spPr>
-          <a:xfrm>
-            <a:off x="9217152" y="1572768"/>
-            <a:ext cx="2587752" cy="1417320"/>
+          <p:cNvPr id="26" name="Text 24"/>
+          <p:cNvSpPr/>
+          <p:nvPr/>
+        </p:nvSpPr>
+        <p:spPr>
+          <a:xfrm>
+            <a:off x="4599432" y="3566160"/>
+            <a:ext cx="1298448" cy="310896"/>
+          </a:xfrm>
+          <a:prstGeom prst="rect">
+            <a:avLst/>
+          </a:prstGeom>
+          <a:noFill/>
+          <a:ln/>
+        </p:spPr>
+        <p:txBody>
+          <a:bodyPr wrap="square" lIns="0" tIns="0" rIns="0" bIns="0" rtlCol="0" anchor="ctr"/>
+          <a:lstStyle/>
+          <a:p>
+            <a:pPr algn="ctr" indent="0" marL="0">
+              <a:buNone/>
+            </a:pPr>
+            <a:r>
+              <a:rPr lang="en-US" sz="1150" b="1" dirty="0">
+                <a:solidFill>
+                  <a:srgbClr val="000000"/>
+                </a:solidFill>
+                <a:latin typeface="Calibri" pitchFamily="34" charset="0"/>
+                <a:ea typeface="Calibri" pitchFamily="34" charset="-122"/>
+                <a:cs typeface="Calibri" pitchFamily="34" charset="-120"/>
+              </a:rPr>
+              <a:t>Suspicious</a:t>
+            </a:r>
+            <a:endParaRPr lang="en-US" sz="1150" dirty="0"/>
+          </a:p>
+        </p:txBody>
+      </p:sp>
+      <p:sp>
+        <p:nvSpPr>
+          <p:cNvPr id="27" name="Text 25"/>
+          <p:cNvSpPr/>
+          <p:nvPr/>
+        </p:nvSpPr>
+        <p:spPr>
+          <a:xfrm>
+            <a:off x="4599432" y="4041648"/>
+            <a:ext cx="2962656" cy="1005840"/>
+          </a:xfrm>
+          <a:prstGeom prst="rect">
+            <a:avLst/>
+          </a:prstGeom>
+          <a:noFill/>
+          <a:ln/>
+        </p:spPr>
+        <p:txBody>
+          <a:bodyPr wrap="square" lIns="0" tIns="0" rIns="0" bIns="0" rtlCol="0" anchor="t"/>
+          <a:lstStyle/>
+          <a:p>
+            <a:pPr indent="0" marL="0">
+              <a:lnSpc>
+                <a:spcPts val="1300"/>
+              </a:lnSpc>
+              <a:buNone/>
+            </a:pPr>
+            <a:r>
+              <a:rPr lang="en-US" sz="1050" dirty="0">
+                <a:solidFill>
+                  <a:srgbClr val="B4B7BD"/>
+                </a:solidFill>
+                <a:latin typeface="Calibri" pitchFamily="34" charset="0"/>
+                <a:ea typeface="Calibri" pitchFamily="34" charset="-122"/>
+                <a:cs typeface="Calibri" pitchFamily="34" charset="-120"/>
+              </a:rPr>
+              <a:t>Anything that is not clearly benign — the safe default.</a:t>
+            </a:r>
+            <a:endParaRPr lang="en-US" sz="1050" dirty="0"/>
+          </a:p>
+        </p:txBody>
+      </p:sp>
+      <p:sp>
+        <p:nvSpPr>
+          <p:cNvPr id="28" name="Text 26"/>
+          <p:cNvSpPr/>
+          <p:nvPr/>
+        </p:nvSpPr>
+        <p:spPr>
+          <a:xfrm>
+            <a:off x="4599432" y="5120640"/>
+            <a:ext cx="2962656" cy="548640"/>
+          </a:xfrm>
+          <a:prstGeom prst="rect">
+            <a:avLst/>
+          </a:prstGeom>
+          <a:noFill/>
+          <a:ln/>
+        </p:spPr>
+        <p:txBody>
+          <a:bodyPr wrap="square" lIns="0" tIns="0" rIns="0" bIns="0" rtlCol="0" anchor="ctr"/>
+          <a:lstStyle/>
+          <a:p>
+            <a:pPr indent="0" marL="0">
+              <a:lnSpc>
+                <a:spcPts val="1300"/>
+              </a:lnSpc>
+              <a:buNone/>
+            </a:pPr>
+            <a:r>
+              <a:rPr lang="en-US" sz="1050" b="1" dirty="0">
+                <a:solidFill>
+                  <a:srgbClr val="FFFFFF"/>
+                </a:solidFill>
+                <a:latin typeface="Calibri" pitchFamily="34" charset="0"/>
+                <a:ea typeface="Calibri" pitchFamily="34" charset="-122"/>
+                <a:cs typeface="Calibri" pitchFamily="34" charset="-120"/>
+              </a:rPr>
+              <a:t>Left open for analyst review.</a:t>
+            </a:r>
+            <a:endParaRPr lang="en-US" sz="1050" dirty="0"/>
+          </a:p>
+        </p:txBody>
+      </p:sp>
+      <p:sp>
+        <p:nvSpPr>
+          <p:cNvPr id="29" name="Shape 27"/>
+          <p:cNvSpPr/>
+          <p:nvPr/>
+        </p:nvSpPr>
+        <p:spPr>
+          <a:xfrm>
+            <a:off x="8138160" y="3310128"/>
+            <a:ext cx="3474720" cy="2487168"/>
           </a:xfrm>
           <a:prstGeom prst="roundRect">
             <a:avLst>
-              <a:gd name="adj" fmla="val 3226"/>
+              <a:gd name="adj" fmla="val 1838"/>
             </a:avLst>
           </a:prstGeom>
           <a:solidFill>
@@ -11059,516 +11431,7 @@
       </p:sp>
       <p:sp>
         <p:nvSpPr>
-          <p:cNvPr id="20" name="Text 18"/>
-          <p:cNvSpPr/>
-          <p:nvPr/>
-        </p:nvSpPr>
-        <p:spPr>
-          <a:xfrm>
-            <a:off x="9381744" y="1719072"/>
-            <a:ext cx="2258568" cy="310896"/>
-          </a:xfrm>
-          <a:prstGeom prst="rect">
-            <a:avLst/>
-          </a:prstGeom>
-          <a:noFill/>
-          <a:ln/>
-        </p:spPr>
-        <p:txBody>
-          <a:bodyPr wrap="square" lIns="0" tIns="0" rIns="0" bIns="0" rtlCol="0" anchor="ctr"/>
-          <a:lstStyle/>
-          <a:p>
-            <a:pPr indent="0" marL="0">
-              <a:buNone/>
-            </a:pPr>
-            <a:r>
-              <a:rPr lang="en-US" sz="1300" b="1" dirty="0">
-                <a:solidFill>
-                  <a:srgbClr val="FFFFFF"/>
-                </a:solidFill>
-                <a:latin typeface="Calibri" pitchFamily="34" charset="0"/>
-                <a:ea typeface="Calibri" pitchFamily="34" charset="-122"/>
-                <a:cs typeface="Calibri" pitchFamily="34" charset="-120"/>
-              </a:rPr>
-              <a:t>Verdict</a:t>
-            </a:r>
-            <a:endParaRPr lang="en-US" sz="1300" dirty="0"/>
-          </a:p>
-        </p:txBody>
-      </p:sp>
-      <p:sp>
-        <p:nvSpPr>
-          <p:cNvPr id="21" name="Text 19"/>
-          <p:cNvSpPr/>
-          <p:nvPr/>
-        </p:nvSpPr>
-        <p:spPr>
-          <a:xfrm>
-            <a:off x="9381744" y="2048256"/>
-            <a:ext cx="2258568" cy="795528"/>
-          </a:xfrm>
-          <a:prstGeom prst="rect">
-            <a:avLst/>
-          </a:prstGeom>
-          <a:noFill/>
-          <a:ln/>
-        </p:spPr>
-        <p:txBody>
-          <a:bodyPr wrap="square" lIns="0" tIns="0" rIns="0" bIns="0" rtlCol="0" anchor="ctr"/>
-          <a:lstStyle/>
-          <a:p>
-            <a:pPr indent="0" marL="0">
-              <a:lnSpc>
-                <a:spcPts val="1400"/>
-              </a:lnSpc>
-              <a:buNone/>
-            </a:pPr>
-            <a:r>
-              <a:rPr lang="en-US" sz="1050" dirty="0">
-                <a:solidFill>
-                  <a:srgbClr val="B4B7BD"/>
-                </a:solidFill>
-                <a:latin typeface="Calibri" pitchFamily="34" charset="0"/>
-                <a:ea typeface="Calibri" pitchFamily="34" charset="-122"/>
-                <a:cs typeface="Calibri" pitchFamily="34" charset="-120"/>
-              </a:rPr>
-              <a:t>Classify from KOI +</a:t>
-            </a:r>
-            <a:endParaRPr lang="en-US" sz="1050" dirty="0"/>
-          </a:p>
-          <a:p>
-            <a:pPr indent="0" marL="0">
-              <a:lnSpc>
-                <a:spcPts val="1400"/>
-              </a:lnSpc>
-              <a:buNone/>
-            </a:pPr>
-            <a:r>
-              <a:rPr lang="en-US" sz="1050" dirty="0">
-                <a:solidFill>
-                  <a:srgbClr val="B4B7BD"/>
-                </a:solidFill>
-                <a:latin typeface="Calibri" pitchFamily="34" charset="0"/>
-                <a:ea typeface="Calibri" pitchFamily="34" charset="-122"/>
-                <a:cs typeface="Calibri" pitchFamily="34" charset="-120"/>
-              </a:rPr>
-              <a:t>independent catalog risk</a:t>
-            </a:r>
-            <a:endParaRPr lang="en-US" sz="1050" dirty="0"/>
-          </a:p>
-        </p:txBody>
-      </p:sp>
-      <p:sp>
-        <p:nvSpPr>
-          <p:cNvPr id="22" name="Shape 20"/>
-          <p:cNvSpPr/>
-          <p:nvPr/>
-        </p:nvSpPr>
-        <p:spPr>
-          <a:xfrm>
-            <a:off x="9381744" y="2734056"/>
-            <a:ext cx="457200" cy="54864"/>
-          </a:xfrm>
-          <a:prstGeom prst="roundRect">
-            <a:avLst>
-              <a:gd name="adj" fmla="val 50000"/>
-            </a:avLst>
-          </a:prstGeom>
-          <a:solidFill>
-            <a:srgbClr val="E8551F"/>
-          </a:solidFill>
-          <a:ln w="12700">
-            <a:solidFill>
-              <a:srgbClr val="E8551F"/>
-            </a:solidFill>
-            <a:prstDash val="solid"/>
-          </a:ln>
-        </p:spPr>
-      </p:sp>
-      <p:sp>
-        <p:nvSpPr>
-          <p:cNvPr id="23" name="Shape 21"/>
-          <p:cNvSpPr/>
-          <p:nvPr/>
-        </p:nvSpPr>
-        <p:spPr>
-          <a:xfrm>
-            <a:off x="548640" y="3310128"/>
-            <a:ext cx="3474720" cy="2487168"/>
-          </a:xfrm>
-          <a:prstGeom prst="roundRect">
-            <a:avLst>
-              <a:gd name="adj" fmla="val 1838"/>
-            </a:avLst>
-          </a:prstGeom>
-          <a:solidFill>
-            <a:srgbClr val="15171B"/>
-          </a:solidFill>
-          <a:ln w="12700">
-            <a:solidFill>
-              <a:srgbClr val="15171B"/>
-            </a:solidFill>
-            <a:prstDash val="solid"/>
-          </a:ln>
-        </p:spPr>
-      </p:sp>
-      <p:sp>
-        <p:nvSpPr>
-          <p:cNvPr id="24" name="Shape 22"/>
-          <p:cNvSpPr/>
-          <p:nvPr/>
-        </p:nvSpPr>
-        <p:spPr>
-          <a:xfrm>
-            <a:off x="804672" y="3566160"/>
-            <a:ext cx="1298448" cy="310896"/>
-          </a:xfrm>
-          <a:prstGeom prst="roundRect">
-            <a:avLst>
-              <a:gd name="adj" fmla="val 23529"/>
-            </a:avLst>
-          </a:prstGeom>
-          <a:solidFill>
-            <a:srgbClr val="E8551F"/>
-          </a:solidFill>
-          <a:ln w="12700">
-            <a:solidFill>
-              <a:srgbClr val="E8551F"/>
-            </a:solidFill>
-            <a:prstDash val="solid"/>
-          </a:ln>
-        </p:spPr>
-      </p:sp>
-      <p:sp>
-        <p:nvSpPr>
-          <p:cNvPr id="25" name="Text 23"/>
-          <p:cNvSpPr/>
-          <p:nvPr/>
-        </p:nvSpPr>
-        <p:spPr>
-          <a:xfrm>
-            <a:off x="804672" y="3566160"/>
-            <a:ext cx="1298448" cy="310896"/>
-          </a:xfrm>
-          <a:prstGeom prst="rect">
-            <a:avLst/>
-          </a:prstGeom>
-          <a:noFill/>
-          <a:ln/>
-        </p:spPr>
-        <p:txBody>
-          <a:bodyPr wrap="square" lIns="0" tIns="0" rIns="0" bIns="0" rtlCol="0" anchor="ctr"/>
-          <a:lstStyle/>
-          <a:p>
-            <a:pPr algn="ctr" indent="0" marL="0">
-              <a:buNone/>
-            </a:pPr>
-            <a:r>
-              <a:rPr lang="en-US" sz="1150" b="1" dirty="0">
-                <a:solidFill>
-                  <a:srgbClr val="000000"/>
-                </a:solidFill>
-                <a:latin typeface="Calibri" pitchFamily="34" charset="0"/>
-                <a:ea typeface="Calibri" pitchFamily="34" charset="-122"/>
-                <a:cs typeface="Calibri" pitchFamily="34" charset="-120"/>
-              </a:rPr>
-              <a:t>Malicious</a:t>
-            </a:r>
-            <a:endParaRPr lang="en-US" sz="1150" dirty="0"/>
-          </a:p>
-        </p:txBody>
-      </p:sp>
-      <p:sp>
-        <p:nvSpPr>
-          <p:cNvPr id="26" name="Text 24"/>
-          <p:cNvSpPr/>
-          <p:nvPr/>
-        </p:nvSpPr>
-        <p:spPr>
-          <a:xfrm>
-            <a:off x="804672" y="4041648"/>
-            <a:ext cx="2962656" cy="1005840"/>
-          </a:xfrm>
-          <a:prstGeom prst="rect">
-            <a:avLst/>
-          </a:prstGeom>
-          <a:noFill/>
-          <a:ln/>
-        </p:spPr>
-        <p:txBody>
-          <a:bodyPr wrap="square" lIns="0" tIns="0" rIns="0" bIns="0" rtlCol="0" anchor="ctr"/>
-          <a:lstStyle/>
-          <a:p>
-            <a:pPr indent="0" marL="0">
-              <a:lnSpc>
-                <a:spcPts val="1300"/>
-              </a:lnSpc>
-              <a:buNone/>
-            </a:pPr>
-            <a:r>
-              <a:rPr lang="en-US" sz="1050" dirty="0">
-                <a:solidFill>
-                  <a:srgbClr val="B4B7BD"/>
-                </a:solidFill>
-                <a:latin typeface="Calibri" pitchFamily="34" charset="0"/>
-                <a:ea typeface="Calibri" pitchFamily="34" charset="-122"/>
-                <a:cs typeface="Calibri" pitchFamily="34" charset="-120"/>
-              </a:rPr>
-              <a:t>Removed from marketplace, publisher compromised, unvetted MCP server, High/Critical risk, or high catalog risk.</a:t>
-            </a:r>
-            <a:endParaRPr lang="en-US" sz="1050" dirty="0"/>
-          </a:p>
-        </p:txBody>
-      </p:sp>
-      <p:sp>
-        <p:nvSpPr>
-          <p:cNvPr id="27" name="Text 25"/>
-          <p:cNvSpPr/>
-          <p:nvPr/>
-        </p:nvSpPr>
-        <p:spPr>
-          <a:xfrm>
-            <a:off x="804672" y="5120640"/>
-            <a:ext cx="2962656" cy="548640"/>
-          </a:xfrm>
-          <a:prstGeom prst="rect">
-            <a:avLst/>
-          </a:prstGeom>
-          <a:noFill/>
-          <a:ln/>
-        </p:spPr>
-        <p:txBody>
-          <a:bodyPr wrap="square" lIns="0" tIns="0" rIns="0" bIns="0" rtlCol="0" anchor="ctr"/>
-          <a:lstStyle/>
-          <a:p>
-            <a:pPr indent="0" marL="0">
-              <a:lnSpc>
-                <a:spcPts val="1300"/>
-              </a:lnSpc>
-              <a:buNone/>
-            </a:pPr>
-            <a:r>
-              <a:rPr lang="en-US" sz="1050" b="1" dirty="0">
-                <a:solidFill>
-                  <a:srgbClr val="FFFFFF"/>
-                </a:solidFill>
-                <a:latin typeface="Calibri" pitchFamily="34" charset="0"/>
-                <a:ea typeface="Calibri" pitchFamily="34" charset="-122"/>
-                <a:cs typeface="Calibri" pitchFamily="34" charset="-120"/>
-              </a:rPr>
-              <a:t>Raise severity, then open an analyst-gated block.</a:t>
-            </a:r>
-            <a:endParaRPr lang="en-US" sz="1050" dirty="0"/>
-          </a:p>
-        </p:txBody>
-      </p:sp>
-      <p:sp>
-        <p:nvSpPr>
-          <p:cNvPr id="28" name="Shape 26"/>
-          <p:cNvSpPr/>
-          <p:nvPr/>
-        </p:nvSpPr>
-        <p:spPr>
-          <a:xfrm>
-            <a:off x="4343400" y="3310128"/>
-            <a:ext cx="3474720" cy="2487168"/>
-          </a:xfrm>
-          <a:prstGeom prst="roundRect">
-            <a:avLst>
-              <a:gd name="adj" fmla="val 1838"/>
-            </a:avLst>
-          </a:prstGeom>
-          <a:solidFill>
-            <a:srgbClr val="15171B"/>
-          </a:solidFill>
-          <a:ln w="12700">
-            <a:solidFill>
-              <a:srgbClr val="15171B"/>
-            </a:solidFill>
-            <a:prstDash val="solid"/>
-          </a:ln>
-        </p:spPr>
-      </p:sp>
-      <p:sp>
-        <p:nvSpPr>
-          <p:cNvPr id="29" name="Shape 27"/>
-          <p:cNvSpPr/>
-          <p:nvPr/>
-        </p:nvSpPr>
-        <p:spPr>
-          <a:xfrm>
-            <a:off x="4599432" y="3566160"/>
-            <a:ext cx="1298448" cy="310896"/>
-          </a:xfrm>
-          <a:prstGeom prst="roundRect">
-            <a:avLst>
-              <a:gd name="adj" fmla="val 23529"/>
-            </a:avLst>
-          </a:prstGeom>
-          <a:solidFill>
-            <a:srgbClr val="F5A524"/>
-          </a:solidFill>
-          <a:ln w="12700">
-            <a:solidFill>
-              <a:srgbClr val="F5A524"/>
-            </a:solidFill>
-            <a:prstDash val="solid"/>
-          </a:ln>
-        </p:spPr>
-      </p:sp>
-      <p:sp>
-        <p:nvSpPr>
-          <p:cNvPr id="30" name="Text 28"/>
-          <p:cNvSpPr/>
-          <p:nvPr/>
-        </p:nvSpPr>
-        <p:spPr>
-          <a:xfrm>
-            <a:off x="4599432" y="3566160"/>
-            <a:ext cx="1298448" cy="310896"/>
-          </a:xfrm>
-          <a:prstGeom prst="rect">
-            <a:avLst/>
-          </a:prstGeom>
-          <a:noFill/>
-          <a:ln/>
-        </p:spPr>
-        <p:txBody>
-          <a:bodyPr wrap="square" lIns="0" tIns="0" rIns="0" bIns="0" rtlCol="0" anchor="ctr"/>
-          <a:lstStyle/>
-          <a:p>
-            <a:pPr algn="ctr" indent="0" marL="0">
-              <a:buNone/>
-            </a:pPr>
-            <a:r>
-              <a:rPr lang="en-US" sz="1150" b="1" dirty="0">
-                <a:solidFill>
-                  <a:srgbClr val="000000"/>
-                </a:solidFill>
-                <a:latin typeface="Calibri" pitchFamily="34" charset="0"/>
-                <a:ea typeface="Calibri" pitchFamily="34" charset="-122"/>
-                <a:cs typeface="Calibri" pitchFamily="34" charset="-120"/>
-              </a:rPr>
-              <a:t>Suspicious</a:t>
-            </a:r>
-            <a:endParaRPr lang="en-US" sz="1150" dirty="0"/>
-          </a:p>
-        </p:txBody>
-      </p:sp>
-      <p:sp>
-        <p:nvSpPr>
-          <p:cNvPr id="31" name="Text 29"/>
-          <p:cNvSpPr/>
-          <p:nvPr/>
-        </p:nvSpPr>
-        <p:spPr>
-          <a:xfrm>
-            <a:off x="4599432" y="4041648"/>
-            <a:ext cx="2962656" cy="1005840"/>
-          </a:xfrm>
-          <a:prstGeom prst="rect">
-            <a:avLst/>
-          </a:prstGeom>
-          <a:noFill/>
-          <a:ln/>
-        </p:spPr>
-        <p:txBody>
-          <a:bodyPr wrap="square" lIns="0" tIns="0" rIns="0" bIns="0" rtlCol="0" anchor="ctr"/>
-          <a:lstStyle/>
-          <a:p>
-            <a:pPr indent="0" marL="0">
-              <a:lnSpc>
-                <a:spcPts val="1300"/>
-              </a:lnSpc>
-              <a:buNone/>
-            </a:pPr>
-            <a:r>
-              <a:rPr lang="en-US" sz="1050" dirty="0">
-                <a:solidFill>
-                  <a:srgbClr val="B4B7BD"/>
-                </a:solidFill>
-                <a:latin typeface="Calibri" pitchFamily="34" charset="0"/>
-                <a:ea typeface="Calibri" pitchFamily="34" charset="-122"/>
-                <a:cs typeface="Calibri" pitchFamily="34" charset="-120"/>
-              </a:rPr>
-              <a:t>Anything that is not clearly benign — the safe default.</a:t>
-            </a:r>
-            <a:endParaRPr lang="en-US" sz="1050" dirty="0"/>
-          </a:p>
-        </p:txBody>
-      </p:sp>
-      <p:sp>
-        <p:nvSpPr>
-          <p:cNvPr id="32" name="Text 30"/>
-          <p:cNvSpPr/>
-          <p:nvPr/>
-        </p:nvSpPr>
-        <p:spPr>
-          <a:xfrm>
-            <a:off x="4599432" y="5120640"/>
-            <a:ext cx="2962656" cy="548640"/>
-          </a:xfrm>
-          <a:prstGeom prst="rect">
-            <a:avLst/>
-          </a:prstGeom>
-          <a:noFill/>
-          <a:ln/>
-        </p:spPr>
-        <p:txBody>
-          <a:bodyPr wrap="square" lIns="0" tIns="0" rIns="0" bIns="0" rtlCol="0" anchor="ctr"/>
-          <a:lstStyle/>
-          <a:p>
-            <a:pPr indent="0" marL="0">
-              <a:lnSpc>
-                <a:spcPts val="1300"/>
-              </a:lnSpc>
-              <a:buNone/>
-            </a:pPr>
-            <a:r>
-              <a:rPr lang="en-US" sz="1050" b="1" dirty="0">
-                <a:solidFill>
-                  <a:srgbClr val="FFFFFF"/>
-                </a:solidFill>
-                <a:latin typeface="Calibri" pitchFamily="34" charset="0"/>
-                <a:ea typeface="Calibri" pitchFamily="34" charset="-122"/>
-                <a:cs typeface="Calibri" pitchFamily="34" charset="-120"/>
-              </a:rPr>
-              <a:t>Left open for analyst review.</a:t>
-            </a:r>
-            <a:endParaRPr lang="en-US" sz="1050" dirty="0"/>
-          </a:p>
-        </p:txBody>
-      </p:sp>
-      <p:sp>
-        <p:nvSpPr>
-          <p:cNvPr id="33" name="Shape 31"/>
-          <p:cNvSpPr/>
-          <p:nvPr/>
-        </p:nvSpPr>
-        <p:spPr>
-          <a:xfrm>
-            <a:off x="8138160" y="3310128"/>
-            <a:ext cx="3474720" cy="2487168"/>
-          </a:xfrm>
-          <a:prstGeom prst="roundRect">
-            <a:avLst>
-              <a:gd name="adj" fmla="val 1838"/>
-            </a:avLst>
-          </a:prstGeom>
-          <a:solidFill>
-            <a:srgbClr val="15171B"/>
-          </a:solidFill>
-          <a:ln w="12700">
-            <a:solidFill>
-              <a:srgbClr val="15171B"/>
-            </a:solidFill>
-            <a:prstDash val="solid"/>
-          </a:ln>
-        </p:spPr>
-      </p:sp>
-      <p:sp>
-        <p:nvSpPr>
-          <p:cNvPr id="34" name="Shape 32"/>
+          <p:cNvPr id="30" name="Shape 28"/>
           <p:cNvSpPr/>
           <p:nvPr/>
         </p:nvSpPr>
@@ -11595,7 +11458,7 @@
       </p:sp>
       <p:sp>
         <p:nvSpPr>
-          <p:cNvPr id="35" name="Text 33"/>
+          <p:cNvPr id="31" name="Text 29"/>
           <p:cNvSpPr/>
           <p:nvPr/>
         </p:nvSpPr>
@@ -11634,7 +11497,7 @@
       </p:sp>
       <p:sp>
         <p:nvSpPr>
-          <p:cNvPr id="36" name="Text 34"/>
+          <p:cNvPr id="32" name="Text 30"/>
           <p:cNvSpPr/>
           <p:nvPr/>
         </p:nvSpPr>
@@ -11650,7 +11513,7 @@
           <a:ln/>
         </p:spPr>
         <p:txBody>
-          <a:bodyPr wrap="square" lIns="0" tIns="0" rIns="0" bIns="0" rtlCol="0" anchor="ctr"/>
+          <a:bodyPr wrap="square" lIns="0" tIns="0" rIns="0" bIns="0" rtlCol="0" anchor="t"/>
           <a:lstStyle/>
           <a:p>
             <a:pPr indent="0" marL="0">
@@ -11676,7 +11539,7 @@
       </p:sp>
       <p:sp>
         <p:nvSpPr>
-          <p:cNvPr id="37" name="Text 35"/>
+          <p:cNvPr id="33" name="Text 31"/>
           <p:cNvSpPr/>
           <p:nvPr/>
         </p:nvSpPr>
@@ -11835,11 +11698,11 @@
         <p:spPr>
           <a:xfrm>
             <a:off x="548640" y="1517904"/>
-            <a:ext cx="5326380" cy="4709160"/>
+            <a:ext cx="5326380" cy="4434840"/>
           </a:xfrm>
           <a:prstGeom prst="roundRect">
             <a:avLst>
-              <a:gd name="adj" fmla="val 971"/>
+              <a:gd name="adj" fmla="val 1031"/>
             </a:avLst>
           </a:prstGeom>
           <a:solidFill>
@@ -11976,7 +11839,7 @@
           <a:ln/>
         </p:spPr>
         <p:txBody>
-          <a:bodyPr wrap="square" lIns="0" tIns="0" rIns="0" bIns="0" rtlCol="0" anchor="ctr"/>
+          <a:bodyPr wrap="square" lIns="0" tIns="0" rIns="0" bIns="0" rtlCol="0" anchor="t"/>
           <a:lstStyle/>
           <a:p>
             <a:pPr indent="0" marL="0">
@@ -12005,17 +11868,17 @@
         </p:nvSpPr>
         <p:spPr>
           <a:xfrm>
-            <a:off x="859536" y="2743200"/>
-            <a:ext cx="4704588" cy="3200400"/>
-          </a:xfrm>
-          <a:prstGeom prst="rect">
-            <a:avLst/>
-          </a:prstGeom>
-          <a:noFill/>
-          <a:ln/>
-        </p:spPr>
-        <p:txBody>
-          <a:bodyPr wrap="square" lIns="0" tIns="0" rIns="0" bIns="0" rtlCol="0" anchor="ctr"/>
+            <a:off x="859536" y="2697480"/>
+            <a:ext cx="4704588" cy="2194560"/>
+          </a:xfrm>
+          <a:prstGeom prst="rect">
+            <a:avLst/>
+          </a:prstGeom>
+          <a:noFill/>
+          <a:ln/>
+        </p:spPr>
+        <p:txBody>
+          <a:bodyPr wrap="square" lIns="0" tIns="0" rIns="0" bIns="0" rtlCol="0" anchor="t"/>
           <a:lstStyle/>
           <a:p>
             <a:pPr marL="342900" indent="-342900">
@@ -12023,7 +11886,7 @@
                 <a:spcPts val="1500"/>
               </a:lnSpc>
               <a:spcAft>
-                <a:spcPts val="1000"/>
+                <a:spcPts val="1600"/>
               </a:spcAft>
               <a:buSzPct val="100000"/>
               <a:buChar char="•"/>
@@ -12047,7 +11910,7 @@
                 <a:spcPts val="1500"/>
               </a:lnSpc>
               <a:spcAft>
-                <a:spcPts val="1000"/>
+                <a:spcPts val="1600"/>
               </a:spcAft>
               <a:buSzPct val="100000"/>
               <a:buChar char="•"/>
@@ -12071,7 +11934,7 @@
                 <a:spcPts val="1500"/>
               </a:lnSpc>
               <a:spcAft>
-                <a:spcPts val="1000"/>
+                <a:spcPts val="1600"/>
               </a:spcAft>
               <a:buSzPct val="100000"/>
               <a:buChar char="•"/>
@@ -12095,7 +11958,7 @@
                 <a:spcPts val="1500"/>
               </a:lnSpc>
               <a:spcAft>
-                <a:spcPts val="1000"/>
+                <a:spcPts val="1600"/>
               </a:spcAft>
               <a:buSzPct val="100000"/>
               <a:buChar char="•"/>
@@ -12119,7 +11982,7 @@
                 <a:spcPts val="1500"/>
               </a:lnSpc>
               <a:spcAft>
-                <a:spcPts val="1000"/>
+                <a:spcPts val="1600"/>
               </a:spcAft>
               <a:buSzPct val="100000"/>
               <a:buChar char="•"/>
@@ -12141,18 +12004,60 @@
       </p:sp>
       <p:sp>
         <p:nvSpPr>
-          <p:cNvPr id="10" name="Shape 8"/>
+          <p:cNvPr id="10" name="Text 8"/>
+          <p:cNvSpPr/>
+          <p:nvPr/>
+        </p:nvSpPr>
+        <p:spPr>
+          <a:xfrm>
+            <a:off x="859536" y="5230368"/>
+            <a:ext cx="4704588" cy="457200"/>
+          </a:xfrm>
+          <a:prstGeom prst="rect">
+            <a:avLst/>
+          </a:prstGeom>
+          <a:noFill/>
+          <a:ln/>
+        </p:spPr>
+        <p:txBody>
+          <a:bodyPr wrap="square" lIns="0" tIns="0" rIns="0" bIns="0" rtlCol="0" anchor="t"/>
+          <a:lstStyle/>
+          <a:p>
+            <a:pPr indent="0" marL="0">
+              <a:lnSpc>
+                <a:spcPts val="1300"/>
+              </a:lnSpc>
+              <a:buNone/>
+            </a:pPr>
+            <a:r>
+              <a:rPr lang="en-US" sz="1050" i="1" dirty="0">
+                <a:solidFill>
+                  <a:srgbClr val="6E747E"/>
+                </a:solidFill>
+                <a:latin typeface="Calibri" pitchFamily="34" charset="0"/>
+                <a:ea typeface="Calibri" pitchFamily="34" charset="-122"/>
+                <a:cs typeface="Calibri" pitchFamily="34" charset="-120"/>
+              </a:rPr>
+              <a:t>Runs inside triage, and standalone for an ad-hoc item lookup.</a:t>
+            </a:r>
+            <a:endParaRPr lang="en-US" sz="1050" dirty="0"/>
+          </a:p>
+        </p:txBody>
+      </p:sp>
+      <p:sp>
+        <p:nvSpPr>
+          <p:cNvPr id="11" name="Shape 9"/>
           <p:cNvSpPr/>
           <p:nvPr/>
         </p:nvSpPr>
         <p:spPr>
           <a:xfrm>
             <a:off x="6286500" y="1517904"/>
-            <a:ext cx="5326380" cy="4709160"/>
+            <a:ext cx="5326380" cy="4434840"/>
           </a:xfrm>
           <a:prstGeom prst="roundRect">
             <a:avLst>
-              <a:gd name="adj" fmla="val 971"/>
+              <a:gd name="adj" fmla="val 1031"/>
             </a:avLst>
           </a:prstGeom>
           <a:solidFill>
@@ -12168,7 +12073,7 @@
       </p:sp>
       <p:sp>
         <p:nvSpPr>
-          <p:cNvPr id="11" name="Shape 9"/>
+          <p:cNvPr id="12" name="Shape 10"/>
           <p:cNvSpPr/>
           <p:nvPr/>
         </p:nvSpPr>
@@ -12195,7 +12100,7 @@
       </p:sp>
       <p:sp>
         <p:nvSpPr>
-          <p:cNvPr id="12" name="Text 10"/>
+          <p:cNvPr id="13" name="Text 11"/>
           <p:cNvSpPr/>
           <p:nvPr/>
         </p:nvSpPr>
@@ -12234,7 +12139,7 @@
       </p:sp>
       <p:sp>
         <p:nvSpPr>
-          <p:cNvPr id="13" name="Text 11"/>
+          <p:cNvPr id="14" name="Text 12"/>
           <p:cNvSpPr/>
           <p:nvPr/>
         </p:nvSpPr>
@@ -12273,7 +12178,7 @@
       </p:sp>
       <p:sp>
         <p:nvSpPr>
-          <p:cNvPr id="14" name="Text 12"/>
+          <p:cNvPr id="15" name="Text 13"/>
           <p:cNvSpPr/>
           <p:nvPr/>
         </p:nvSpPr>
@@ -12289,7 +12194,7 @@
           <a:ln/>
         </p:spPr>
         <p:txBody>
-          <a:bodyPr wrap="square" lIns="0" tIns="0" rIns="0" bIns="0" rtlCol="0" anchor="ctr"/>
+          <a:bodyPr wrap="square" lIns="0" tIns="0" rIns="0" bIns="0" rtlCol="0" anchor="t"/>
           <a:lstStyle/>
           <a:p>
             <a:pPr indent="0" marL="0">
@@ -12312,23 +12217,23 @@
       </p:sp>
       <p:sp>
         <p:nvSpPr>
-          <p:cNvPr id="15" name="Text 13"/>
-          <p:cNvSpPr/>
-          <p:nvPr/>
-        </p:nvSpPr>
-        <p:spPr>
-          <a:xfrm>
-            <a:off x="6597396" y="2743200"/>
-            <a:ext cx="4704588" cy="3200400"/>
-          </a:xfrm>
-          <a:prstGeom prst="rect">
-            <a:avLst/>
-          </a:prstGeom>
-          <a:noFill/>
-          <a:ln/>
-        </p:spPr>
-        <p:txBody>
-          <a:bodyPr wrap="square" lIns="0" tIns="0" rIns="0" bIns="0" rtlCol="0" anchor="ctr"/>
+          <p:cNvPr id="16" name="Text 14"/>
+          <p:cNvSpPr/>
+          <p:nvPr/>
+        </p:nvSpPr>
+        <p:spPr>
+          <a:xfrm>
+            <a:off x="6597396" y="2697480"/>
+            <a:ext cx="4704588" cy="2194560"/>
+          </a:xfrm>
+          <a:prstGeom prst="rect">
+            <a:avLst/>
+          </a:prstGeom>
+          <a:noFill/>
+          <a:ln/>
+        </p:spPr>
+        <p:txBody>
+          <a:bodyPr wrap="square" lIns="0" tIns="0" rIns="0" bIns="0" rtlCol="0" anchor="t"/>
           <a:lstStyle/>
           <a:p>
             <a:pPr marL="342900" indent="-342900">
@@ -12336,7 +12241,7 @@
                 <a:spcPts val="1500"/>
               </a:lnSpc>
               <a:spcAft>
-                <a:spcPts val="1000"/>
+                <a:spcPts val="1600"/>
               </a:spcAft>
               <a:buSzPct val="100000"/>
               <a:buChar char="•"/>
@@ -12360,7 +12265,7 @@
                 <a:spcPts val="1500"/>
               </a:lnSpc>
               <a:spcAft>
-                <a:spcPts val="1000"/>
+                <a:spcPts val="1600"/>
               </a:spcAft>
               <a:buSzPct val="100000"/>
               <a:buChar char="•"/>
@@ -12384,7 +12289,7 @@
                 <a:spcPts val="1500"/>
               </a:lnSpc>
               <a:spcAft>
-                <a:spcPts val="1000"/>
+                <a:spcPts val="1600"/>
               </a:spcAft>
               <a:buSzPct val="100000"/>
               <a:buChar char="•"/>
@@ -12408,7 +12313,7 @@
                 <a:spcPts val="1500"/>
               </a:lnSpc>
               <a:spcAft>
-                <a:spcPts val="1000"/>
+                <a:spcPts val="1600"/>
               </a:spcAft>
               <a:buSzPct val="100000"/>
               <a:buChar char="•"/>
@@ -12432,7 +12337,7 @@
                 <a:spcPts val="1500"/>
               </a:lnSpc>
               <a:spcAft>
-                <a:spcPts val="1000"/>
+                <a:spcPts val="1600"/>
               </a:spcAft>
               <a:buSzPct val="100000"/>
               <a:buChar char="•"/>
@@ -12449,6 +12354,48 @@
               <a:t>Turns a single alert into full host posture</a:t>
             </a:r>
             <a:endParaRPr lang="en-US" sz="1150" dirty="0"/>
+          </a:p>
+        </p:txBody>
+      </p:sp>
+      <p:sp>
+        <p:nvSpPr>
+          <p:cNvPr id="17" name="Text 15"/>
+          <p:cNvSpPr/>
+          <p:nvPr/>
+        </p:nvSpPr>
+        <p:spPr>
+          <a:xfrm>
+            <a:off x="6597396" y="5230368"/>
+            <a:ext cx="4704588" cy="457200"/>
+          </a:xfrm>
+          <a:prstGeom prst="rect">
+            <a:avLst/>
+          </a:prstGeom>
+          <a:noFill/>
+          <a:ln/>
+        </p:spPr>
+        <p:txBody>
+          <a:bodyPr wrap="square" lIns="0" tIns="0" rIns="0" bIns="0" rtlCol="0" anchor="t"/>
+          <a:lstStyle/>
+          <a:p>
+            <a:pPr indent="0" marL="0">
+              <a:lnSpc>
+                <a:spcPts val="1300"/>
+              </a:lnSpc>
+              <a:buNone/>
+            </a:pPr>
+            <a:r>
+              <a:rPr lang="en-US" sz="1050" i="1" dirty="0">
+                <a:solidFill>
+                  <a:srgbClr val="6E747E"/>
+                </a:solidFill>
+                <a:latin typeface="Calibri" pitchFamily="34" charset="0"/>
+                <a:ea typeface="Calibri" pitchFamily="34" charset="-122"/>
+                <a:cs typeface="Calibri" pitchFamily="34" charset="-120"/>
+              </a:rPr>
+              <a:t>Runs inside triage, or on any device id you hand it.</a:t>
+            </a:r>
+            <a:endParaRPr lang="en-US" sz="1050" dirty="0"/>
           </a:p>
         </p:txBody>
       </p:sp>
@@ -12646,7 +12593,7 @@
           <a:ln/>
         </p:spPr>
         <p:txBody>
-          <a:bodyPr wrap="square" lIns="0" tIns="0" rIns="0" bIns="0" rtlCol="0" anchor="ctr"/>
+          <a:bodyPr wrap="square" lIns="0" tIns="0" rIns="0" bIns="0" rtlCol="0" anchor="t"/>
           <a:lstStyle/>
           <a:p>
             <a:pPr indent="0" marL="0">
@@ -12678,13 +12625,11 @@
         </p:nvSpPr>
         <p:spPr>
           <a:xfrm>
-            <a:off x="713232" y="2743200"/>
-            <a:ext cx="457200" cy="54864"/>
-          </a:xfrm>
-          <a:prstGeom prst="roundRect">
-            <a:avLst>
-              <a:gd name="adj" fmla="val 50000"/>
-            </a:avLst>
+            <a:off x="2542032" y="2221992"/>
+            <a:ext cx="274320" cy="182880"/>
+          </a:xfrm>
+          <a:prstGeom prst="rightArrow">
+            <a:avLst/>
           </a:prstGeom>
           <a:solidFill>
             <a:srgbClr val="E8551F"/>
@@ -12705,7 +12650,115 @@
         </p:nvSpPr>
         <p:spPr>
           <a:xfrm>
-            <a:off x="2542032" y="2221992"/>
+            <a:off x="2807208" y="1627632"/>
+            <a:ext cx="1993392" cy="1371600"/>
+          </a:xfrm>
+          <a:prstGeom prst="roundRect">
+            <a:avLst>
+              <a:gd name="adj" fmla="val 3333"/>
+            </a:avLst>
+          </a:prstGeom>
+          <a:solidFill>
+            <a:srgbClr val="15171B"/>
+          </a:solidFill>
+          <a:ln w="12700">
+            <a:solidFill>
+              <a:srgbClr val="15171B"/>
+            </a:solidFill>
+            <a:prstDash val="solid"/>
+          </a:ln>
+        </p:spPr>
+      </p:sp>
+      <p:sp>
+        <p:nvSpPr>
+          <p:cNvPr id="9" name="Text 7"/>
+          <p:cNvSpPr/>
+          <p:nvPr/>
+        </p:nvSpPr>
+        <p:spPr>
+          <a:xfrm>
+            <a:off x="2971800" y="1773936"/>
+            <a:ext cx="1664208" cy="310896"/>
+          </a:xfrm>
+          <a:prstGeom prst="rect">
+            <a:avLst/>
+          </a:prstGeom>
+          <a:noFill/>
+          <a:ln/>
+        </p:spPr>
+        <p:txBody>
+          <a:bodyPr wrap="square" lIns="0" tIns="0" rIns="0" bIns="0" rtlCol="0" anchor="ctr"/>
+          <a:lstStyle/>
+          <a:p>
+            <a:pPr indent="0" marL="0">
+              <a:buNone/>
+            </a:pPr>
+            <a:r>
+              <a:rPr lang="en-US" sz="1300" b="1" dirty="0">
+                <a:solidFill>
+                  <a:srgbClr val="FFFFFF"/>
+                </a:solidFill>
+                <a:latin typeface="Calibri" pitchFamily="34" charset="0"/>
+                <a:ea typeface="Calibri" pitchFamily="34" charset="-122"/>
+                <a:cs typeface="Calibri" pitchFamily="34" charset="-120"/>
+              </a:rPr>
+              <a:t>Full investigation</a:t>
+            </a:r>
+            <a:endParaRPr lang="en-US" sz="1300" dirty="0"/>
+          </a:p>
+        </p:txBody>
+      </p:sp>
+      <p:sp>
+        <p:nvSpPr>
+          <p:cNvPr id="10" name="Text 8"/>
+          <p:cNvSpPr/>
+          <p:nvPr/>
+        </p:nvSpPr>
+        <p:spPr>
+          <a:xfrm>
+            <a:off x="2971800" y="2103120"/>
+            <a:ext cx="1664208" cy="749808"/>
+          </a:xfrm>
+          <a:prstGeom prst="rect">
+            <a:avLst/>
+          </a:prstGeom>
+          <a:noFill/>
+          <a:ln/>
+        </p:spPr>
+        <p:txBody>
+          <a:bodyPr wrap="square" lIns="0" tIns="0" rIns="0" bIns="0" rtlCol="0" anchor="t"/>
+          <a:lstStyle/>
+          <a:p>
+            <a:pPr indent="0" marL="0">
+              <a:lnSpc>
+                <a:spcPts val="1400"/>
+              </a:lnSpc>
+              <a:buNone/>
+            </a:pPr>
+            <a:r>
+              <a:rPr lang="en-US" sz="1050" dirty="0">
+                <a:solidFill>
+                  <a:srgbClr val="B4B7BD"/>
+                </a:solidFill>
+                <a:latin typeface="Calibri" pitchFamily="34" charset="0"/>
+                <a:ea typeface="Calibri" pitchFamily="34" charset="-122"/>
+                <a:cs typeface="Calibri" pitchFamily="34" charset="-120"/>
+              </a:rPr>
+              <a:t>Exposure + governance</a:t>
+            </a:r>
+            <a:endParaRPr lang="en-US" sz="1050" dirty="0"/>
+          </a:p>
+        </p:txBody>
+      </p:sp>
+      <p:sp>
+        <p:nvSpPr>
+          <p:cNvPr id="11" name="Shape 9"/>
+          <p:cNvSpPr/>
+          <p:nvPr/>
+        </p:nvSpPr>
+        <p:spPr>
+          <a:xfrm>
+            <a:off x="4800600" y="2221992"/>
             <a:ext cx="274320" cy="182880"/>
           </a:xfrm>
           <a:prstGeom prst="rightArrow">
@@ -12724,13 +12777,13 @@
       </p:sp>
       <p:sp>
         <p:nvSpPr>
-          <p:cNvPr id="9" name="Shape 7"/>
-          <p:cNvSpPr/>
-          <p:nvPr/>
-        </p:nvSpPr>
-        <p:spPr>
-          <a:xfrm>
-            <a:off x="2807208" y="1627632"/>
+          <p:cNvPr id="12" name="Shape 10"/>
+          <p:cNvSpPr/>
+          <p:nvPr/>
+        </p:nvSpPr>
+        <p:spPr>
+          <a:xfrm>
+            <a:off x="5065776" y="1627632"/>
             <a:ext cx="1993392" cy="1371600"/>
           </a:xfrm>
           <a:prstGeom prst="roundRect">
@@ -12751,13 +12804,13 @@
       </p:sp>
       <p:sp>
         <p:nvSpPr>
-          <p:cNvPr id="10" name="Text 8"/>
-          <p:cNvSpPr/>
-          <p:nvPr/>
-        </p:nvSpPr>
-        <p:spPr>
-          <a:xfrm>
-            <a:off x="2971800" y="1773936"/>
+          <p:cNvPr id="13" name="Text 11"/>
+          <p:cNvSpPr/>
+          <p:nvPr/>
+        </p:nvSpPr>
+        <p:spPr>
+          <a:xfrm>
+            <a:off x="5230368" y="1773936"/>
             <a:ext cx="1664208" cy="310896"/>
           </a:xfrm>
           <a:prstGeom prst="rect">
@@ -12782,7 +12835,7 @@
                 <a:ea typeface="Calibri" pitchFamily="34" charset="-122"/>
                 <a:cs typeface="Calibri" pitchFamily="34" charset="-120"/>
               </a:rPr>
-              <a:t>Full investigation</a:t>
+              <a:t>Already blocked?</a:t>
             </a:r>
             <a:endParaRPr lang="en-US" sz="1300" dirty="0"/>
           </a:p>
@@ -12790,13 +12843,13 @@
       </p:sp>
       <p:sp>
         <p:nvSpPr>
-          <p:cNvPr id="11" name="Text 9"/>
-          <p:cNvSpPr/>
-          <p:nvPr/>
-        </p:nvSpPr>
-        <p:spPr>
-          <a:xfrm>
-            <a:off x="2971800" y="2103120"/>
+          <p:cNvPr id="14" name="Text 12"/>
+          <p:cNvSpPr/>
+          <p:nvPr/>
+        </p:nvSpPr>
+        <p:spPr>
+          <a:xfrm>
+            <a:off x="5230368" y="2103120"/>
             <a:ext cx="1664208" cy="749808"/>
           </a:xfrm>
           <a:prstGeom prst="rect">
@@ -12806,7 +12859,7 @@
           <a:ln/>
         </p:spPr>
         <p:txBody>
-          <a:bodyPr wrap="square" lIns="0" tIns="0" rIns="0" bIns="0" rtlCol="0" anchor="ctr"/>
+          <a:bodyPr wrap="square" lIns="0" tIns="0" rIns="0" bIns="0" rtlCol="0" anchor="t"/>
           <a:lstStyle/>
           <a:p>
             <a:pPr indent="0" marL="0">
@@ -12824,7 +12877,7 @@
                 <a:ea typeface="Calibri" pitchFamily="34" charset="-122"/>
                 <a:cs typeface="Calibri" pitchFamily="34" charset="-120"/>
               </a:rPr>
-              <a:t>Exposure + governance</a:t>
+              <a:t>Skip if redundant</a:t>
             </a:r>
             <a:endParaRPr lang="en-US" sz="1050" dirty="0"/>
           </a:p>
@@ -12832,19 +12885,17 @@
       </p:sp>
       <p:sp>
         <p:nvSpPr>
-          <p:cNvPr id="12" name="Shape 10"/>
-          <p:cNvSpPr/>
-          <p:nvPr/>
-        </p:nvSpPr>
-        <p:spPr>
-          <a:xfrm>
-            <a:off x="2971800" y="2743200"/>
-            <a:ext cx="457200" cy="54864"/>
-          </a:xfrm>
-          <a:prstGeom prst="roundRect">
-            <a:avLst>
-              <a:gd name="adj" fmla="val 50000"/>
-            </a:avLst>
+          <p:cNvPr id="15" name="Shape 13"/>
+          <p:cNvSpPr/>
+          <p:nvPr/>
+        </p:nvSpPr>
+        <p:spPr>
+          <a:xfrm>
+            <a:off x="7059168" y="2221992"/>
+            <a:ext cx="274320" cy="182880"/>
+          </a:xfrm>
+          <a:prstGeom prst="rightArrow">
+            <a:avLst/>
           </a:prstGeom>
           <a:solidFill>
             <a:srgbClr val="E8551F"/>
@@ -12859,13 +12910,121 @@
       </p:sp>
       <p:sp>
         <p:nvSpPr>
-          <p:cNvPr id="13" name="Shape 11"/>
-          <p:cNvSpPr/>
-          <p:nvPr/>
-        </p:nvSpPr>
-        <p:spPr>
-          <a:xfrm>
-            <a:off x="4800600" y="2221992"/>
+          <p:cNvPr id="16" name="Shape 14"/>
+          <p:cNvSpPr/>
+          <p:nvPr/>
+        </p:nvSpPr>
+        <p:spPr>
+          <a:xfrm>
+            <a:off x="7324344" y="1627632"/>
+            <a:ext cx="1993392" cy="1371600"/>
+          </a:xfrm>
+          <a:prstGeom prst="roundRect">
+            <a:avLst>
+              <a:gd name="adj" fmla="val 3333"/>
+            </a:avLst>
+          </a:prstGeom>
+          <a:solidFill>
+            <a:srgbClr val="15171B"/>
+          </a:solidFill>
+          <a:ln w="12700">
+            <a:solidFill>
+              <a:srgbClr val="15171B"/>
+            </a:solidFill>
+            <a:prstDash val="solid"/>
+          </a:ln>
+        </p:spPr>
+      </p:sp>
+      <p:sp>
+        <p:nvSpPr>
+          <p:cNvPr id="17" name="Text 15"/>
+          <p:cNvSpPr/>
+          <p:nvPr/>
+        </p:nvSpPr>
+        <p:spPr>
+          <a:xfrm>
+            <a:off x="7488936" y="1773936"/>
+            <a:ext cx="1664208" cy="310896"/>
+          </a:xfrm>
+          <a:prstGeom prst="rect">
+            <a:avLst/>
+          </a:prstGeom>
+          <a:noFill/>
+          <a:ln/>
+        </p:spPr>
+        <p:txBody>
+          <a:bodyPr wrap="square" lIns="0" tIns="0" rIns="0" bIns="0" rtlCol="0" anchor="ctr"/>
+          <a:lstStyle/>
+          <a:p>
+            <a:pPr indent="0" marL="0">
+              <a:buNone/>
+            </a:pPr>
+            <a:r>
+              <a:rPr lang="en-US" sz="1300" b="1" dirty="0">
+                <a:solidFill>
+                  <a:srgbClr val="FFFFFF"/>
+                </a:solidFill>
+                <a:latin typeface="Calibri" pitchFamily="34" charset="0"/>
+                <a:ea typeface="Calibri" pitchFamily="34" charset="-122"/>
+                <a:cs typeface="Calibri" pitchFamily="34" charset="-120"/>
+              </a:rPr>
+              <a:t>Analyst approval</a:t>
+            </a:r>
+            <a:endParaRPr lang="en-US" sz="1300" dirty="0"/>
+          </a:p>
+        </p:txBody>
+      </p:sp>
+      <p:sp>
+        <p:nvSpPr>
+          <p:cNvPr id="18" name="Text 16"/>
+          <p:cNvSpPr/>
+          <p:nvPr/>
+        </p:nvSpPr>
+        <p:spPr>
+          <a:xfrm>
+            <a:off x="7488936" y="2103120"/>
+            <a:ext cx="1664208" cy="749808"/>
+          </a:xfrm>
+          <a:prstGeom prst="rect">
+            <a:avLst/>
+          </a:prstGeom>
+          <a:noFill/>
+          <a:ln/>
+        </p:spPr>
+        <p:txBody>
+          <a:bodyPr wrap="square" lIns="0" tIns="0" rIns="0" bIns="0" rtlCol="0" anchor="t"/>
+          <a:lstStyle/>
+          <a:p>
+            <a:pPr indent="0" marL="0">
+              <a:lnSpc>
+                <a:spcPts val="1400"/>
+              </a:lnSpc>
+              <a:buNone/>
+            </a:pPr>
+            <a:r>
+              <a:rPr lang="en-US" sz="1050" dirty="0">
+                <a:solidFill>
+                  <a:srgbClr val="22D3EE"/>
+                </a:solidFill>
+                <a:latin typeface="Calibri" pitchFamily="34" charset="0"/>
+                <a:ea typeface="Calibri" pitchFamily="34" charset="-122"/>
+                <a:cs typeface="Calibri" pitchFamily="34" charset="-120"/>
+              </a:rPr>
+              <a:t>Playbook waits here</a:t>
+            </a:r>
+            <a:endParaRPr lang="en-US" sz="1050" dirty="0"/>
+          </a:p>
+        </p:txBody>
+      </p:sp>
+      <p:sp>
+        <p:nvSpPr>
+          <p:cNvPr id="19" name="Shape 17"/>
+          <p:cNvSpPr/>
+          <p:nvPr/>
+        </p:nvSpPr>
+        <p:spPr>
+          <a:xfrm>
+            <a:off x="9317736" y="2221992"/>
             <a:ext cx="274320" cy="182880"/>
           </a:xfrm>
           <a:prstGeom prst="rightArrow">
@@ -12884,13 +13043,13 @@
       </p:sp>
       <p:sp>
         <p:nvSpPr>
-          <p:cNvPr id="14" name="Shape 12"/>
-          <p:cNvSpPr/>
-          <p:nvPr/>
-        </p:nvSpPr>
-        <p:spPr>
-          <a:xfrm>
-            <a:off x="5065776" y="1627632"/>
+          <p:cNvPr id="20" name="Shape 18"/>
+          <p:cNvSpPr/>
+          <p:nvPr/>
+        </p:nvSpPr>
+        <p:spPr>
+          <a:xfrm>
+            <a:off x="9582912" y="1627632"/>
             <a:ext cx="1993392" cy="1371600"/>
           </a:xfrm>
           <a:prstGeom prst="roundRect">
@@ -12911,13 +13070,13 @@
       </p:sp>
       <p:sp>
         <p:nvSpPr>
-          <p:cNvPr id="15" name="Text 13"/>
-          <p:cNvSpPr/>
-          <p:nvPr/>
-        </p:nvSpPr>
-        <p:spPr>
-          <a:xfrm>
-            <a:off x="5230368" y="1773936"/>
+          <p:cNvPr id="21" name="Text 19"/>
+          <p:cNvSpPr/>
+          <p:nvPr/>
+        </p:nvSpPr>
+        <p:spPr>
+          <a:xfrm>
+            <a:off x="9747504" y="1773936"/>
             <a:ext cx="1664208" cy="310896"/>
           </a:xfrm>
           <a:prstGeom prst="rect">
@@ -12942,7 +13101,7 @@
                 <a:ea typeface="Calibri" pitchFamily="34" charset="-122"/>
                 <a:cs typeface="Calibri" pitchFamily="34" charset="-120"/>
               </a:rPr>
-              <a:t>Already blocked?</a:t>
+              <a:t>Blocklist write</a:t>
             </a:r>
             <a:endParaRPr lang="en-US" sz="1300" dirty="0"/>
           </a:p>
@@ -12950,13 +13109,13 @@
       </p:sp>
       <p:sp>
         <p:nvSpPr>
-          <p:cNvPr id="16" name="Text 14"/>
-          <p:cNvSpPr/>
-          <p:nvPr/>
-        </p:nvSpPr>
-        <p:spPr>
-          <a:xfrm>
-            <a:off x="5230368" y="2103120"/>
+          <p:cNvPr id="22" name="Text 20"/>
+          <p:cNvSpPr/>
+          <p:nvPr/>
+        </p:nvSpPr>
+        <p:spPr>
+          <a:xfrm>
+            <a:off x="9747504" y="2103120"/>
             <a:ext cx="1664208" cy="749808"/>
           </a:xfrm>
           <a:prstGeom prst="rect">
@@ -12966,7 +13125,7 @@
           <a:ln/>
         </p:spPr>
         <p:txBody>
-          <a:bodyPr wrap="square" lIns="0" tIns="0" rIns="0" bIns="0" rtlCol="0" anchor="ctr"/>
+          <a:bodyPr wrap="square" lIns="0" tIns="0" rIns="0" bIns="0" rtlCol="0" anchor="t"/>
           <a:lstStyle/>
           <a:p>
             <a:pPr indent="0" marL="0">
@@ -12984,7 +13143,7 @@
                 <a:ea typeface="Calibri" pitchFamily="34" charset="-122"/>
                 <a:cs typeface="Calibri" pitchFamily="34" charset="-120"/>
               </a:rPr>
-              <a:t>Skip if redundant</a:t>
+              <a:t>Org-wide, on approval</a:t>
             </a:r>
             <a:endParaRPr lang="en-US" sz="1050" dirty="0"/>
           </a:p>
@@ -12992,26 +13151,26 @@
       </p:sp>
       <p:sp>
         <p:nvSpPr>
-          <p:cNvPr id="17" name="Shape 15"/>
-          <p:cNvSpPr/>
-          <p:nvPr/>
-        </p:nvSpPr>
-        <p:spPr>
-          <a:xfrm>
-            <a:off x="5230368" y="2743200"/>
-            <a:ext cx="457200" cy="54864"/>
+          <p:cNvPr id="23" name="Shape 21"/>
+          <p:cNvSpPr/>
+          <p:nvPr/>
+        </p:nvSpPr>
+        <p:spPr>
+          <a:xfrm>
+            <a:off x="548640" y="3401568"/>
+            <a:ext cx="11064240" cy="1417320"/>
           </a:xfrm>
           <a:prstGeom prst="roundRect">
             <a:avLst>
-              <a:gd name="adj" fmla="val 50000"/>
+              <a:gd name="adj" fmla="val 3226"/>
             </a:avLst>
           </a:prstGeom>
           <a:solidFill>
-            <a:srgbClr val="E8551F"/>
+            <a:srgbClr val="1C2026"/>
           </a:solidFill>
           <a:ln w="12700">
             <a:solidFill>
-              <a:srgbClr val="E8551F"/>
+              <a:srgbClr val="1C2026"/>
             </a:solidFill>
             <a:prstDash val="solid"/>
           </a:ln>
@@ -13019,43 +13178,138 @@
       </p:sp>
       <p:sp>
         <p:nvSpPr>
-          <p:cNvPr id="18" name="Shape 16"/>
-          <p:cNvSpPr/>
-          <p:nvPr/>
-        </p:nvSpPr>
-        <p:spPr>
-          <a:xfrm>
-            <a:off x="7059168" y="2221992"/>
-            <a:ext cx="274320" cy="182880"/>
-          </a:xfrm>
-          <a:prstGeom prst="rightArrow">
-            <a:avLst/>
-          </a:prstGeom>
-          <a:solidFill>
-            <a:srgbClr val="E8551F"/>
-          </a:solidFill>
-          <a:ln w="12700">
-            <a:solidFill>
-              <a:srgbClr val="E8551F"/>
-            </a:solidFill>
-            <a:prstDash val="solid"/>
-          </a:ln>
-        </p:spPr>
-      </p:sp>
-      <p:sp>
-        <p:nvSpPr>
-          <p:cNvPr id="19" name="Shape 17"/>
-          <p:cNvSpPr/>
-          <p:nvPr/>
-        </p:nvSpPr>
-        <p:spPr>
-          <a:xfrm>
-            <a:off x="7324344" y="1627632"/>
-            <a:ext cx="1993392" cy="1371600"/>
+          <p:cNvPr id="24" name="Text 22"/>
+          <p:cNvSpPr/>
+          <p:nvPr/>
+        </p:nvSpPr>
+        <p:spPr>
+          <a:xfrm>
+            <a:off x="914400" y="3566160"/>
+            <a:ext cx="1371600" cy="1005840"/>
+          </a:xfrm>
+          <a:prstGeom prst="rect">
+            <a:avLst/>
+          </a:prstGeom>
+          <a:noFill/>
+          <a:ln/>
+        </p:spPr>
+        <p:txBody>
+          <a:bodyPr wrap="square" lIns="0" tIns="0" rIns="0" bIns="0" rtlCol="0" anchor="ctr"/>
+          <a:lstStyle/>
+          <a:p>
+            <a:pPr indent="0" marL="0">
+              <a:buNone/>
+            </a:pPr>
+            <a:r>
+              <a:rPr lang="en-US" sz="6200" b="1" dirty="0">
+                <a:solidFill>
+                  <a:srgbClr val="E8551F"/>
+                </a:solidFill>
+                <a:latin typeface="Calibri" pitchFamily="34" charset="0"/>
+                <a:ea typeface="Calibri" pitchFamily="34" charset="-122"/>
+                <a:cs typeface="Calibri" pitchFamily="34" charset="-120"/>
+              </a:rPr>
+              <a:t>0</a:t>
+            </a:r>
+            <a:endParaRPr lang="en-US" sz="6200" dirty="0"/>
+          </a:p>
+        </p:txBody>
+      </p:sp>
+      <p:sp>
+        <p:nvSpPr>
+          <p:cNvPr id="25" name="Text 23"/>
+          <p:cNvSpPr/>
+          <p:nvPr/>
+        </p:nvSpPr>
+        <p:spPr>
+          <a:xfrm>
+            <a:off x="2331720" y="3703320"/>
+            <a:ext cx="8869680" cy="365760"/>
+          </a:xfrm>
+          <a:prstGeom prst="rect">
+            <a:avLst/>
+          </a:prstGeom>
+          <a:noFill/>
+          <a:ln/>
+        </p:spPr>
+        <p:txBody>
+          <a:bodyPr wrap="square" lIns="0" tIns="0" rIns="0" bIns="0" rtlCol="0" anchor="ctr"/>
+          <a:lstStyle/>
+          <a:p>
+            <a:pPr indent="0" marL="0">
+              <a:buNone/>
+            </a:pPr>
+            <a:r>
+              <a:rPr lang="en-US" sz="1500" b="1" dirty="0">
+                <a:solidFill>
+                  <a:srgbClr val="FFFFFF"/>
+                </a:solidFill>
+                <a:latin typeface="Calibri" pitchFamily="34" charset="0"/>
+                <a:ea typeface="Calibri" pitchFamily="34" charset="-122"/>
+                <a:cs typeface="Calibri" pitchFamily="34" charset="-120"/>
+              </a:rPr>
+              <a:t>org-wide blocks without an explicit analyst approval</a:t>
+            </a:r>
+            <a:endParaRPr lang="en-US" sz="1500" dirty="0"/>
+          </a:p>
+        </p:txBody>
+      </p:sp>
+      <p:sp>
+        <p:nvSpPr>
+          <p:cNvPr id="26" name="Text 24"/>
+          <p:cNvSpPr/>
+          <p:nvPr/>
+        </p:nvSpPr>
+        <p:spPr>
+          <a:xfrm>
+            <a:off x="2331720" y="4069080"/>
+            <a:ext cx="8869680" cy="640080"/>
+          </a:xfrm>
+          <a:prstGeom prst="rect">
+            <a:avLst/>
+          </a:prstGeom>
+          <a:noFill/>
+          <a:ln/>
+        </p:spPr>
+        <p:txBody>
+          <a:bodyPr wrap="square" lIns="0" tIns="0" rIns="0" bIns="0" rtlCol="0" anchor="ctr"/>
+          <a:lstStyle/>
+          <a:p>
+            <a:pPr indent="0" marL="0">
+              <a:lnSpc>
+                <a:spcPts val="1400"/>
+              </a:lnSpc>
+              <a:buNone/>
+            </a:pPr>
+            <a:r>
+              <a:rPr lang="en-US" sz="1100" dirty="0">
+                <a:solidFill>
+                  <a:srgbClr val="B4B7BD"/>
+                </a:solidFill>
+                <a:latin typeface="Calibri" pitchFamily="34" charset="0"/>
+                <a:ea typeface="Calibri" pitchFamily="34" charset="-122"/>
+                <a:cs typeface="Calibri" pitchFamily="34" charset="-120"/>
+              </a:rPr>
+              <a:t>Triage always invokes the response playbook with auto_block = false. On a Malicious verdict the run parks on the approval task; the blocklist command does not execute until a human approves. Verified on a live tenant.</a:t>
+            </a:r>
+            <a:endParaRPr lang="en-US" sz="1100" dirty="0"/>
+          </a:p>
+        </p:txBody>
+      </p:sp>
+      <p:sp>
+        <p:nvSpPr>
+          <p:cNvPr id="27" name="Shape 25"/>
+          <p:cNvSpPr/>
+          <p:nvPr/>
+        </p:nvSpPr>
+        <p:spPr>
+          <a:xfrm>
+            <a:off x="548640" y="5029200"/>
+            <a:ext cx="3474720" cy="1207008"/>
           </a:xfrm>
           <a:prstGeom prst="roundRect">
             <a:avLst>
-              <a:gd name="adj" fmla="val 3333"/>
+              <a:gd name="adj" fmla="val 3788"/>
             </a:avLst>
           </a:prstGeom>
           <a:solidFill>
@@ -13071,53 +13325,53 @@
       </p:sp>
       <p:sp>
         <p:nvSpPr>
-          <p:cNvPr id="20" name="Text 18"/>
-          <p:cNvSpPr/>
-          <p:nvPr/>
-        </p:nvSpPr>
-        <p:spPr>
-          <a:xfrm>
-            <a:off x="7488936" y="1773936"/>
-            <a:ext cx="1664208" cy="310896"/>
-          </a:xfrm>
-          <a:prstGeom prst="rect">
-            <a:avLst/>
-          </a:prstGeom>
-          <a:noFill/>
-          <a:ln/>
-        </p:spPr>
-        <p:txBody>
-          <a:bodyPr wrap="square" lIns="0" tIns="0" rIns="0" bIns="0" rtlCol="0" anchor="ctr"/>
-          <a:lstStyle/>
-          <a:p>
-            <a:pPr indent="0" marL="0">
-              <a:buNone/>
-            </a:pPr>
-            <a:r>
-              <a:rPr lang="en-US" sz="1300" b="1" dirty="0">
-                <a:solidFill>
-                  <a:srgbClr val="FFFFFF"/>
-                </a:solidFill>
-                <a:latin typeface="Calibri" pitchFamily="34" charset="0"/>
-                <a:ea typeface="Calibri" pitchFamily="34" charset="-122"/>
-                <a:cs typeface="Calibri" pitchFamily="34" charset="-120"/>
-              </a:rPr>
-              <a:t>Analyst approval</a:t>
-            </a:r>
-            <a:endParaRPr lang="en-US" sz="1300" dirty="0"/>
-          </a:p>
-        </p:txBody>
-      </p:sp>
-      <p:sp>
-        <p:nvSpPr>
-          <p:cNvPr id="21" name="Text 19"/>
-          <p:cNvSpPr/>
-          <p:nvPr/>
-        </p:nvSpPr>
-        <p:spPr>
-          <a:xfrm>
-            <a:off x="7488936" y="2103120"/>
-            <a:ext cx="1664208" cy="749808"/>
+          <p:cNvPr id="28" name="Text 26"/>
+          <p:cNvSpPr/>
+          <p:nvPr/>
+        </p:nvSpPr>
+        <p:spPr>
+          <a:xfrm>
+            <a:off x="786384" y="5212080"/>
+            <a:ext cx="2999232" cy="292608"/>
+          </a:xfrm>
+          <a:prstGeom prst="rect">
+            <a:avLst/>
+          </a:prstGeom>
+          <a:noFill/>
+          <a:ln/>
+        </p:spPr>
+        <p:txBody>
+          <a:bodyPr wrap="square" lIns="0" tIns="0" rIns="0" bIns="0" rtlCol="0" anchor="ctr"/>
+          <a:lstStyle/>
+          <a:p>
+            <a:pPr indent="0" marL="0">
+              <a:buNone/>
+            </a:pPr>
+            <a:r>
+              <a:rPr lang="en-US" sz="1250" b="1" dirty="0">
+                <a:solidFill>
+                  <a:srgbClr val="22D3EE"/>
+                </a:solidFill>
+                <a:latin typeface="Calibri" pitchFamily="34" charset="0"/>
+                <a:ea typeface="Calibri" pitchFamily="34" charset="-122"/>
+                <a:cs typeface="Calibri" pitchFamily="34" charset="-120"/>
+              </a:rPr>
+              <a:t>Safe by default</a:t>
+            </a:r>
+            <a:endParaRPr lang="en-US" sz="1250" dirty="0"/>
+          </a:p>
+        </p:txBody>
+      </p:sp>
+      <p:sp>
+        <p:nvSpPr>
+          <p:cNvPr id="29" name="Text 27"/>
+          <p:cNvSpPr/>
+          <p:nvPr/>
+        </p:nvSpPr>
+        <p:spPr>
+          <a:xfrm>
+            <a:off x="786384" y="5522976"/>
+            <a:ext cx="2999232" cy="566928"/>
           </a:xfrm>
           <a:prstGeom prst="rect">
             <a:avLst/>
@@ -13131,7 +13385,7 @@
           <a:p>
             <a:pPr indent="0" marL="0">
               <a:lnSpc>
-                <a:spcPts val="1400"/>
+                <a:spcPts val="1300"/>
               </a:lnSpc>
               <a:buNone/>
             </a:pPr>
@@ -13144,7 +13398,7 @@
                 <a:ea typeface="Calibri" pitchFamily="34" charset="-122"/>
                 <a:cs typeface="Calibri" pitchFamily="34" charset="-120"/>
               </a:rPr>
-              <a:t>Playbook waits here</a:t>
+              <a:t>The only state-changing command in the set is gated.</a:t>
             </a:r>
             <a:endParaRPr lang="en-US" sz="1050" dirty="0"/>
           </a:p>
@@ -13152,70 +13406,18 @@
       </p:sp>
       <p:sp>
         <p:nvSpPr>
-          <p:cNvPr id="22" name="Shape 20"/>
-          <p:cNvSpPr/>
-          <p:nvPr/>
-        </p:nvSpPr>
-        <p:spPr>
-          <a:xfrm>
-            <a:off x="7488936" y="2743200"/>
-            <a:ext cx="457200" cy="54864"/>
+          <p:cNvPr id="30" name="Shape 28"/>
+          <p:cNvSpPr/>
+          <p:nvPr/>
+        </p:nvSpPr>
+        <p:spPr>
+          <a:xfrm>
+            <a:off x="4343400" y="5029200"/>
+            <a:ext cx="3474720" cy="1207008"/>
           </a:xfrm>
           <a:prstGeom prst="roundRect">
             <a:avLst>
-              <a:gd name="adj" fmla="val 50000"/>
-            </a:avLst>
-          </a:prstGeom>
-          <a:solidFill>
-            <a:srgbClr val="22D3EE"/>
-          </a:solidFill>
-          <a:ln w="12700">
-            <a:solidFill>
-              <a:srgbClr val="22D3EE"/>
-            </a:solidFill>
-            <a:prstDash val="solid"/>
-          </a:ln>
-        </p:spPr>
-      </p:sp>
-      <p:sp>
-        <p:nvSpPr>
-          <p:cNvPr id="23" name="Shape 21"/>
-          <p:cNvSpPr/>
-          <p:nvPr/>
-        </p:nvSpPr>
-        <p:spPr>
-          <a:xfrm>
-            <a:off x="9317736" y="2221992"/>
-            <a:ext cx="274320" cy="182880"/>
-          </a:xfrm>
-          <a:prstGeom prst="rightArrow">
-            <a:avLst/>
-          </a:prstGeom>
-          <a:solidFill>
-            <a:srgbClr val="E8551F"/>
-          </a:solidFill>
-          <a:ln w="12700">
-            <a:solidFill>
-              <a:srgbClr val="E8551F"/>
-            </a:solidFill>
-            <a:prstDash val="solid"/>
-          </a:ln>
-        </p:spPr>
-      </p:sp>
-      <p:sp>
-        <p:nvSpPr>
-          <p:cNvPr id="24" name="Shape 22"/>
-          <p:cNvSpPr/>
-          <p:nvPr/>
-        </p:nvSpPr>
-        <p:spPr>
-          <a:xfrm>
-            <a:off x="9582912" y="1627632"/>
-            <a:ext cx="1993392" cy="1371600"/>
-          </a:xfrm>
-          <a:prstGeom prst="roundRect">
-            <a:avLst>
-              <a:gd name="adj" fmla="val 3333"/>
+              <a:gd name="adj" fmla="val 3788"/>
             </a:avLst>
           </a:prstGeom>
           <a:solidFill>
@@ -13231,53 +13433,53 @@
       </p:sp>
       <p:sp>
         <p:nvSpPr>
-          <p:cNvPr id="25" name="Text 23"/>
-          <p:cNvSpPr/>
-          <p:nvPr/>
-        </p:nvSpPr>
-        <p:spPr>
-          <a:xfrm>
-            <a:off x="9747504" y="1773936"/>
-            <a:ext cx="1664208" cy="310896"/>
-          </a:xfrm>
-          <a:prstGeom prst="rect">
-            <a:avLst/>
-          </a:prstGeom>
-          <a:noFill/>
-          <a:ln/>
-        </p:spPr>
-        <p:txBody>
-          <a:bodyPr wrap="square" lIns="0" tIns="0" rIns="0" bIns="0" rtlCol="0" anchor="ctr"/>
-          <a:lstStyle/>
-          <a:p>
-            <a:pPr indent="0" marL="0">
-              <a:buNone/>
-            </a:pPr>
-            <a:r>
-              <a:rPr lang="en-US" sz="1300" b="1" dirty="0">
-                <a:solidFill>
-                  <a:srgbClr val="FFFFFF"/>
-                </a:solidFill>
-                <a:latin typeface="Calibri" pitchFamily="34" charset="0"/>
-                <a:ea typeface="Calibri" pitchFamily="34" charset="-122"/>
-                <a:cs typeface="Calibri" pitchFamily="34" charset="-120"/>
-              </a:rPr>
-              <a:t>Blocklist write</a:t>
-            </a:r>
-            <a:endParaRPr lang="en-US" sz="1300" dirty="0"/>
-          </a:p>
-        </p:txBody>
-      </p:sp>
-      <p:sp>
-        <p:nvSpPr>
-          <p:cNvPr id="26" name="Text 24"/>
-          <p:cNvSpPr/>
-          <p:nvPr/>
-        </p:nvSpPr>
-        <p:spPr>
-          <a:xfrm>
-            <a:off x="9747504" y="2103120"/>
-            <a:ext cx="1664208" cy="749808"/>
+          <p:cNvPr id="31" name="Text 29"/>
+          <p:cNvSpPr/>
+          <p:nvPr/>
+        </p:nvSpPr>
+        <p:spPr>
+          <a:xfrm>
+            <a:off x="4581144" y="5212080"/>
+            <a:ext cx="2999232" cy="292608"/>
+          </a:xfrm>
+          <a:prstGeom prst="rect">
+            <a:avLst/>
+          </a:prstGeom>
+          <a:noFill/>
+          <a:ln/>
+        </p:spPr>
+        <p:txBody>
+          <a:bodyPr wrap="square" lIns="0" tIns="0" rIns="0" bIns="0" rtlCol="0" anchor="ctr"/>
+          <a:lstStyle/>
+          <a:p>
+            <a:pPr indent="0" marL="0">
+              <a:buNone/>
+            </a:pPr>
+            <a:r>
+              <a:rPr lang="en-US" sz="1250" b="1" dirty="0">
+                <a:solidFill>
+                  <a:srgbClr val="22D3EE"/>
+                </a:solidFill>
+                <a:latin typeface="Calibri" pitchFamily="34" charset="0"/>
+                <a:ea typeface="Calibri" pitchFamily="34" charset="-122"/>
+                <a:cs typeface="Calibri" pitchFamily="34" charset="-120"/>
+              </a:rPr>
+              <a:t>No redundant blocks</a:t>
+            </a:r>
+            <a:endParaRPr lang="en-US" sz="1250" dirty="0"/>
+          </a:p>
+        </p:txBody>
+      </p:sp>
+      <p:sp>
+        <p:nvSpPr>
+          <p:cNvPr id="32" name="Text 30"/>
+          <p:cNvSpPr/>
+          <p:nvPr/>
+        </p:nvSpPr>
+        <p:spPr>
+          <a:xfrm>
+            <a:off x="4581144" y="5522976"/>
+            <a:ext cx="2999232" cy="566928"/>
           </a:xfrm>
           <a:prstGeom prst="rect">
             <a:avLst/>
@@ -13291,7 +13493,7 @@
           <a:p>
             <a:pPr indent="0" marL="0">
               <a:lnSpc>
-                <a:spcPts val="1400"/>
+                <a:spcPts val="1300"/>
               </a:lnSpc>
               <a:buNone/>
             </a:pPr>
@@ -13304,7 +13506,7 @@
                 <a:ea typeface="Calibri" pitchFamily="34" charset="-122"/>
                 <a:cs typeface="Calibri" pitchFamily="34" charset="-120"/>
               </a:rPr>
-              <a:t>Org-wide, on approval</a:t>
+              <a:t>Items already on the blocklist short-circuit.</a:t>
             </a:r>
             <a:endParaRPr lang="en-US" sz="1050" dirty="0"/>
           </a:p>
@@ -13312,187 +13514,13 @@
       </p:sp>
       <p:sp>
         <p:nvSpPr>
-          <p:cNvPr id="27" name="Shape 25"/>
-          <p:cNvSpPr/>
-          <p:nvPr/>
-        </p:nvSpPr>
-        <p:spPr>
-          <a:xfrm>
-            <a:off x="9747504" y="2743200"/>
-            <a:ext cx="457200" cy="54864"/>
-          </a:xfrm>
-          <a:prstGeom prst="roundRect">
-            <a:avLst>
-              <a:gd name="adj" fmla="val 50000"/>
-            </a:avLst>
-          </a:prstGeom>
-          <a:solidFill>
-            <a:srgbClr val="E8551F"/>
-          </a:solidFill>
-          <a:ln w="12700">
-            <a:solidFill>
-              <a:srgbClr val="E8551F"/>
-            </a:solidFill>
-            <a:prstDash val="solid"/>
-          </a:ln>
-        </p:spPr>
-      </p:sp>
-      <p:sp>
-        <p:nvSpPr>
-          <p:cNvPr id="28" name="Shape 26"/>
-          <p:cNvSpPr/>
-          <p:nvPr/>
-        </p:nvSpPr>
-        <p:spPr>
-          <a:xfrm>
-            <a:off x="548640" y="3401568"/>
-            <a:ext cx="11064240" cy="1417320"/>
-          </a:xfrm>
-          <a:prstGeom prst="roundRect">
-            <a:avLst>
-              <a:gd name="adj" fmla="val 3226"/>
-            </a:avLst>
-          </a:prstGeom>
-          <a:solidFill>
-            <a:srgbClr val="1C2026"/>
-          </a:solidFill>
-          <a:ln w="12700">
-            <a:solidFill>
-              <a:srgbClr val="1C2026"/>
-            </a:solidFill>
-            <a:prstDash val="solid"/>
-          </a:ln>
-        </p:spPr>
-      </p:sp>
-      <p:sp>
-        <p:nvSpPr>
-          <p:cNvPr id="29" name="Text 27"/>
-          <p:cNvSpPr/>
-          <p:nvPr/>
-        </p:nvSpPr>
-        <p:spPr>
-          <a:xfrm>
-            <a:off x="914400" y="3566160"/>
-            <a:ext cx="1371600" cy="1005840"/>
-          </a:xfrm>
-          <a:prstGeom prst="rect">
-            <a:avLst/>
-          </a:prstGeom>
-          <a:noFill/>
-          <a:ln/>
-        </p:spPr>
-        <p:txBody>
-          <a:bodyPr wrap="square" lIns="0" tIns="0" rIns="0" bIns="0" rtlCol="0" anchor="ctr"/>
-          <a:lstStyle/>
-          <a:p>
-            <a:pPr indent="0" marL="0">
-              <a:buNone/>
-            </a:pPr>
-            <a:r>
-              <a:rPr lang="en-US" sz="6200" b="1" dirty="0">
-                <a:solidFill>
-                  <a:srgbClr val="E8551F"/>
-                </a:solidFill>
-                <a:latin typeface="Calibri" pitchFamily="34" charset="0"/>
-                <a:ea typeface="Calibri" pitchFamily="34" charset="-122"/>
-                <a:cs typeface="Calibri" pitchFamily="34" charset="-120"/>
-              </a:rPr>
-              <a:t>0</a:t>
-            </a:r>
-            <a:endParaRPr lang="en-US" sz="6200" dirty="0"/>
-          </a:p>
-        </p:txBody>
-      </p:sp>
-      <p:sp>
-        <p:nvSpPr>
-          <p:cNvPr id="30" name="Text 28"/>
-          <p:cNvSpPr/>
-          <p:nvPr/>
-        </p:nvSpPr>
-        <p:spPr>
-          <a:xfrm>
-            <a:off x="2331720" y="3703320"/>
-            <a:ext cx="8869680" cy="365760"/>
-          </a:xfrm>
-          <a:prstGeom prst="rect">
-            <a:avLst/>
-          </a:prstGeom>
-          <a:noFill/>
-          <a:ln/>
-        </p:spPr>
-        <p:txBody>
-          <a:bodyPr wrap="square" lIns="0" tIns="0" rIns="0" bIns="0" rtlCol="0" anchor="ctr"/>
-          <a:lstStyle/>
-          <a:p>
-            <a:pPr indent="0" marL="0">
-              <a:buNone/>
-            </a:pPr>
-            <a:r>
-              <a:rPr lang="en-US" sz="1500" b="1" dirty="0">
-                <a:solidFill>
-                  <a:srgbClr val="FFFFFF"/>
-                </a:solidFill>
-                <a:latin typeface="Calibri" pitchFamily="34" charset="0"/>
-                <a:ea typeface="Calibri" pitchFamily="34" charset="-122"/>
-                <a:cs typeface="Calibri" pitchFamily="34" charset="-120"/>
-              </a:rPr>
-              <a:t>org-wide blocks without an explicit analyst approval</a:t>
-            </a:r>
-            <a:endParaRPr lang="en-US" sz="1500" dirty="0"/>
-          </a:p>
-        </p:txBody>
-      </p:sp>
-      <p:sp>
-        <p:nvSpPr>
-          <p:cNvPr id="31" name="Text 29"/>
-          <p:cNvSpPr/>
-          <p:nvPr/>
-        </p:nvSpPr>
-        <p:spPr>
-          <a:xfrm>
-            <a:off x="2331720" y="4069080"/>
-            <a:ext cx="8869680" cy="640080"/>
-          </a:xfrm>
-          <a:prstGeom prst="rect">
-            <a:avLst/>
-          </a:prstGeom>
-          <a:noFill/>
-          <a:ln/>
-        </p:spPr>
-        <p:txBody>
-          <a:bodyPr wrap="square" lIns="0" tIns="0" rIns="0" bIns="0" rtlCol="0" anchor="ctr"/>
-          <a:lstStyle/>
-          <a:p>
-            <a:pPr indent="0" marL="0">
-              <a:lnSpc>
-                <a:spcPts val="1400"/>
-              </a:lnSpc>
-              <a:buNone/>
-            </a:pPr>
-            <a:r>
-              <a:rPr lang="en-US" sz="1100" dirty="0">
-                <a:solidFill>
-                  <a:srgbClr val="B4B7BD"/>
-                </a:solidFill>
-                <a:latin typeface="Calibri" pitchFamily="34" charset="0"/>
-                <a:ea typeface="Calibri" pitchFamily="34" charset="-122"/>
-                <a:cs typeface="Calibri" pitchFamily="34" charset="-120"/>
-              </a:rPr>
-              <a:t>Triage always invokes the response playbook with auto_block = false. On a Malicious verdict the run parks on the approval task; the blocklist command does not execute until a human approves. Verified on a live tenant.</a:t>
-            </a:r>
-            <a:endParaRPr lang="en-US" sz="1100" dirty="0"/>
-          </a:p>
-        </p:txBody>
-      </p:sp>
-      <p:sp>
-        <p:nvSpPr>
-          <p:cNvPr id="32" name="Shape 30"/>
-          <p:cNvSpPr/>
-          <p:nvPr/>
-        </p:nvSpPr>
-        <p:spPr>
-          <a:xfrm>
-            <a:off x="548640" y="5029200"/>
+          <p:cNvPr id="33" name="Shape 31"/>
+          <p:cNvSpPr/>
+          <p:nvPr/>
+        </p:nvSpPr>
+        <p:spPr>
+          <a:xfrm>
+            <a:off x="8138160" y="5029200"/>
             <a:ext cx="3474720" cy="1207008"/>
           </a:xfrm>
           <a:prstGeom prst="roundRect">
@@ -13513,223 +13541,7 @@
       </p:sp>
       <p:sp>
         <p:nvSpPr>
-          <p:cNvPr id="33" name="Text 31"/>
-          <p:cNvSpPr/>
-          <p:nvPr/>
-        </p:nvSpPr>
-        <p:spPr>
-          <a:xfrm>
-            <a:off x="786384" y="5212080"/>
-            <a:ext cx="2999232" cy="292608"/>
-          </a:xfrm>
-          <a:prstGeom prst="rect">
-            <a:avLst/>
-          </a:prstGeom>
-          <a:noFill/>
-          <a:ln/>
-        </p:spPr>
-        <p:txBody>
-          <a:bodyPr wrap="square" lIns="0" tIns="0" rIns="0" bIns="0" rtlCol="0" anchor="ctr"/>
-          <a:lstStyle/>
-          <a:p>
-            <a:pPr indent="0" marL="0">
-              <a:buNone/>
-            </a:pPr>
-            <a:r>
-              <a:rPr lang="en-US" sz="1250" b="1" dirty="0">
-                <a:solidFill>
-                  <a:srgbClr val="22D3EE"/>
-                </a:solidFill>
-                <a:latin typeface="Calibri" pitchFamily="34" charset="0"/>
-                <a:ea typeface="Calibri" pitchFamily="34" charset="-122"/>
-                <a:cs typeface="Calibri" pitchFamily="34" charset="-120"/>
-              </a:rPr>
-              <a:t>Safe by default</a:t>
-            </a:r>
-            <a:endParaRPr lang="en-US" sz="1250" dirty="0"/>
-          </a:p>
-        </p:txBody>
-      </p:sp>
-      <p:sp>
-        <p:nvSpPr>
           <p:cNvPr id="34" name="Text 32"/>
-          <p:cNvSpPr/>
-          <p:nvPr/>
-        </p:nvSpPr>
-        <p:spPr>
-          <a:xfrm>
-            <a:off x="786384" y="5522976"/>
-            <a:ext cx="2999232" cy="566928"/>
-          </a:xfrm>
-          <a:prstGeom prst="rect">
-            <a:avLst/>
-          </a:prstGeom>
-          <a:noFill/>
-          <a:ln/>
-        </p:spPr>
-        <p:txBody>
-          <a:bodyPr wrap="square" lIns="0" tIns="0" rIns="0" bIns="0" rtlCol="0" anchor="ctr"/>
-          <a:lstStyle/>
-          <a:p>
-            <a:pPr indent="0" marL="0">
-              <a:lnSpc>
-                <a:spcPts val="1300"/>
-              </a:lnSpc>
-              <a:buNone/>
-            </a:pPr>
-            <a:r>
-              <a:rPr lang="en-US" sz="1050" dirty="0">
-                <a:solidFill>
-                  <a:srgbClr val="B4B7BD"/>
-                </a:solidFill>
-                <a:latin typeface="Calibri" pitchFamily="34" charset="0"/>
-                <a:ea typeface="Calibri" pitchFamily="34" charset="-122"/>
-                <a:cs typeface="Calibri" pitchFamily="34" charset="-120"/>
-              </a:rPr>
-              <a:t>The only state-changing command in the set is gated.</a:t>
-            </a:r>
-            <a:endParaRPr lang="en-US" sz="1050" dirty="0"/>
-          </a:p>
-        </p:txBody>
-      </p:sp>
-      <p:sp>
-        <p:nvSpPr>
-          <p:cNvPr id="35" name="Shape 33"/>
-          <p:cNvSpPr/>
-          <p:nvPr/>
-        </p:nvSpPr>
-        <p:spPr>
-          <a:xfrm>
-            <a:off x="4343400" y="5029200"/>
-            <a:ext cx="3474720" cy="1207008"/>
-          </a:xfrm>
-          <a:prstGeom prst="roundRect">
-            <a:avLst>
-              <a:gd name="adj" fmla="val 3788"/>
-            </a:avLst>
-          </a:prstGeom>
-          <a:solidFill>
-            <a:srgbClr val="15171B"/>
-          </a:solidFill>
-          <a:ln w="12700">
-            <a:solidFill>
-              <a:srgbClr val="15171B"/>
-            </a:solidFill>
-            <a:prstDash val="solid"/>
-          </a:ln>
-        </p:spPr>
-      </p:sp>
-      <p:sp>
-        <p:nvSpPr>
-          <p:cNvPr id="36" name="Text 34"/>
-          <p:cNvSpPr/>
-          <p:nvPr/>
-        </p:nvSpPr>
-        <p:spPr>
-          <a:xfrm>
-            <a:off x="4581144" y="5212080"/>
-            <a:ext cx="2999232" cy="292608"/>
-          </a:xfrm>
-          <a:prstGeom prst="rect">
-            <a:avLst/>
-          </a:prstGeom>
-          <a:noFill/>
-          <a:ln/>
-        </p:spPr>
-        <p:txBody>
-          <a:bodyPr wrap="square" lIns="0" tIns="0" rIns="0" bIns="0" rtlCol="0" anchor="ctr"/>
-          <a:lstStyle/>
-          <a:p>
-            <a:pPr indent="0" marL="0">
-              <a:buNone/>
-            </a:pPr>
-            <a:r>
-              <a:rPr lang="en-US" sz="1250" b="1" dirty="0">
-                <a:solidFill>
-                  <a:srgbClr val="22D3EE"/>
-                </a:solidFill>
-                <a:latin typeface="Calibri" pitchFamily="34" charset="0"/>
-                <a:ea typeface="Calibri" pitchFamily="34" charset="-122"/>
-                <a:cs typeface="Calibri" pitchFamily="34" charset="-120"/>
-              </a:rPr>
-              <a:t>No redundant blocks</a:t>
-            </a:r>
-            <a:endParaRPr lang="en-US" sz="1250" dirty="0"/>
-          </a:p>
-        </p:txBody>
-      </p:sp>
-      <p:sp>
-        <p:nvSpPr>
-          <p:cNvPr id="37" name="Text 35"/>
-          <p:cNvSpPr/>
-          <p:nvPr/>
-        </p:nvSpPr>
-        <p:spPr>
-          <a:xfrm>
-            <a:off x="4581144" y="5522976"/>
-            <a:ext cx="2999232" cy="566928"/>
-          </a:xfrm>
-          <a:prstGeom prst="rect">
-            <a:avLst/>
-          </a:prstGeom>
-          <a:noFill/>
-          <a:ln/>
-        </p:spPr>
-        <p:txBody>
-          <a:bodyPr wrap="square" lIns="0" tIns="0" rIns="0" bIns="0" rtlCol="0" anchor="ctr"/>
-          <a:lstStyle/>
-          <a:p>
-            <a:pPr indent="0" marL="0">
-              <a:lnSpc>
-                <a:spcPts val="1300"/>
-              </a:lnSpc>
-              <a:buNone/>
-            </a:pPr>
-            <a:r>
-              <a:rPr lang="en-US" sz="1050" dirty="0">
-                <a:solidFill>
-                  <a:srgbClr val="B4B7BD"/>
-                </a:solidFill>
-                <a:latin typeface="Calibri" pitchFamily="34" charset="0"/>
-                <a:ea typeface="Calibri" pitchFamily="34" charset="-122"/>
-                <a:cs typeface="Calibri" pitchFamily="34" charset="-120"/>
-              </a:rPr>
-              <a:t>Items already on the blocklist short-circuit.</a:t>
-            </a:r>
-            <a:endParaRPr lang="en-US" sz="1050" dirty="0"/>
-          </a:p>
-        </p:txBody>
-      </p:sp>
-      <p:sp>
-        <p:nvSpPr>
-          <p:cNvPr id="38" name="Shape 36"/>
-          <p:cNvSpPr/>
-          <p:nvPr/>
-        </p:nvSpPr>
-        <p:spPr>
-          <a:xfrm>
-            <a:off x="8138160" y="5029200"/>
-            <a:ext cx="3474720" cy="1207008"/>
-          </a:xfrm>
-          <a:prstGeom prst="roundRect">
-            <a:avLst>
-              <a:gd name="adj" fmla="val 3788"/>
-            </a:avLst>
-          </a:prstGeom>
-          <a:solidFill>
-            <a:srgbClr val="15171B"/>
-          </a:solidFill>
-          <a:ln w="12700">
-            <a:solidFill>
-              <a:srgbClr val="15171B"/>
-            </a:solidFill>
-            <a:prstDash val="solid"/>
-          </a:ln>
-        </p:spPr>
-      </p:sp>
-      <p:sp>
-        <p:nvSpPr>
-          <p:cNvPr id="39" name="Text 37"/>
           <p:cNvSpPr/>
           <p:nvPr/>
         </p:nvSpPr>
@@ -13768,7 +13580,7 @@
       </p:sp>
       <p:sp>
         <p:nvSpPr>
-          <p:cNvPr id="40" name="Text 38"/>
+          <p:cNvPr id="35" name="Text 33"/>
           <p:cNvSpPr/>
           <p:nvPr/>
         </p:nvSpPr>

--- a/docs/KOI_Content_Pack_Overview.pptx
+++ b/docs/KOI_Content_Pack_Overview.pptx
@@ -1941,7 +1941,7 @@
                 <a:ea typeface="Calibri" pitchFamily="34" charset="-122"/>
                 <a:cs typeface="Calibri" pitchFamily="34" charset="-120"/>
               </a:rPr>
-              <a:t>CORTEX XSIAM  ·  CORTEX XSOAR  ·  CONTENT PACK</a:t>
+              <a:t>CORTEX XSIAM  ·  CONTENT PACK</a:t>
             </a:r>
             <a:endParaRPr lang="en-US" sz="1200" dirty="0"/>
           </a:p>
@@ -4695,7 +4695,7 @@
                 <a:ea typeface="Calibri" pitchFamily="34" charset="-122"/>
                 <a:cs typeface="Calibri" pitchFamily="34" charset="-120"/>
               </a:rPr>
-              <a:t>KOI content pack  ·  Cortex XSIAM &amp; Cortex XSOAR</a:t>
+              <a:t>KOI content pack  ·  Cortex XSIAM</a:t>
             </a:r>
             <a:endParaRPr lang="en-US" sz="1100" dirty="0"/>
           </a:p>

--- a/docs/KOI_Content_Pack_Overview.pptx
+++ b/docs/KOI_Content_Pack_Overview.pptx
@@ -1917,7 +1917,7 @@
         <p:spPr>
           <a:xfrm>
             <a:off x="548640" y="1600200"/>
-            <a:ext cx="11064240" cy="274320"/>
+            <a:ext cx="11064240" cy="210312"/>
           </a:xfrm>
           <a:prstGeom prst="rect">
             <a:avLst/>
@@ -2576,7 +2576,7 @@
                 <a:ea typeface="Calibri" pitchFamily="34" charset="-122"/>
                 <a:cs typeface="Calibri" pitchFamily="34" charset="-120"/>
               </a:rPr>
-              <a:t>Marketplace</a:t>
+              <a:t>Delivered direct</a:t>
             </a:r>
             <a:endParaRPr lang="en-US" sz="1600" dirty="0"/>
           </a:p>
@@ -2622,7 +2622,7 @@
                 <a:ea typeface="Calibri" pitchFamily="34" charset="-122"/>
                 <a:cs typeface="Calibri" pitchFamily="34" charset="-120"/>
               </a:rPr>
-              <a:t>Search for KOI and install</a:t>
+              <a:t>Pack source or a pack zip, sent to you</a:t>
             </a:r>
             <a:endParaRPr lang="en-US" sz="1100" dirty="0"/>
           </a:p>
@@ -2646,7 +2646,7 @@
                 <a:ea typeface="Calibri" pitchFamily="34" charset="-122"/>
                 <a:cs typeface="Calibri" pitchFamily="34" charset="-120"/>
               </a:rPr>
-              <a:t>Integration, rules and dashboard land together</a:t>
+              <a:t>Not distributed via the Marketplace</a:t>
             </a:r>
             <a:endParaRPr lang="en-US" sz="1100" dirty="0"/>
           </a:p>
@@ -2670,7 +2670,7 @@
                 <a:ea typeface="Calibri" pitchFamily="34" charset="-122"/>
                 <a:cs typeface="Calibri" pitchFamily="34" charset="-120"/>
               </a:rPr>
-              <a:t>Recommended for production tenants</a:t>
+              <a:t>Install only the artifact you were sent</a:t>
             </a:r>
             <a:endParaRPr lang="en-US" sz="1100" dirty="0"/>
           </a:p>
@@ -2802,7 +2802,7 @@
                 <a:ea typeface="Calibri" pitchFamily="34" charset="-122"/>
                 <a:cs typeface="Calibri" pitchFamily="34" charset="-120"/>
               </a:rPr>
-              <a:t>Pack zip</a:t>
+              <a:t>Upload with the SDK</a:t>
             </a:r>
             <a:endParaRPr lang="en-US" sz="1600" dirty="0"/>
           </a:p>
@@ -2848,7 +2848,7 @@
                 <a:ea typeface="Calibri" pitchFamily="34" charset="-122"/>
                 <a:cs typeface="Calibri" pitchFamily="34" charset="-120"/>
               </a:rPr>
-              <a:t>Build with demisto-sdk zip-packs</a:t>
+              <a:t>demisto-sdk upload -i Packs/Koi -z --xsiam</a:t>
             </a:r>
             <a:endParaRPr lang="en-US" sz="1100" dirty="0"/>
           </a:p>
@@ -2872,7 +2872,7 @@
                 <a:ea typeface="Calibri" pitchFamily="34" charset="-122"/>
                 <a:cs typeface="Calibri" pitchFamily="34" charset="-120"/>
               </a:rPr>
-              <a:t>Upload as a single object</a:t>
+              <a:t>Integration, rules, dashboard and playbooks</a:t>
             </a:r>
             <a:endParaRPr lang="en-US" sz="1100" dirty="0"/>
           </a:p>
@@ -2896,7 +2896,7 @@
                 <a:ea typeface="Calibri" pitchFamily="34" charset="-122"/>
                 <a:cs typeface="Calibri" pitchFamily="34" charset="-120"/>
               </a:rPr>
-              <a:t>Best for dev/test and CI pipelines</a:t>
+              <a:t>The only path that collects events</a:t>
             </a:r>
             <a:endParaRPr lang="en-US" sz="1100" dirty="0"/>
           </a:p>

--- a/docs/KOI_Content_Pack_Overview.pptx
+++ b/docs/KOI_Content_Pack_Overview.pptx
@@ -6853,7 +6853,7 @@
                 <a:ea typeface="Calibri" pitchFamily="34" charset="-122"/>
                 <a:cs typeface="Calibri" pitchFamily="34" charset="-120"/>
               </a:rPr>
-              <a:t>Three playbooks to run KOI scripts on Cortex-Agent endpoints.</a:t>
+              <a:t>Five playbooks + an automation to run KOI scripts on Cortex-Agent endpoints.</a:t>
             </a:r>
             <a:endParaRPr lang="en-US" sz="1050" dirty="0"/>
           </a:p>
@@ -7177,7 +7177,7 @@
                 <a:ea typeface="Calibri" pitchFamily="34" charset="-122"/>
                 <a:cs typeface="Calibri" pitchFamily="34" charset="-120"/>
               </a:rPr>
-              <a:t>Run KOI script packages on Cortex-Agent endpoints on a schedule, targeted by OS, group or hostname.</a:t>
+              <a:t>Run KOI script packages on Cortex-Agent endpoints on a schedule, with per-endpoint tracking so even groups over 100 are fully covered.</a:t>
             </a:r>
             <a:endParaRPr lang="en-US" sz="1100" dirty="0"/>
           </a:p>
@@ -7219,7 +7219,7 @@
                 <a:ea typeface="Calibri" pitchFamily="34" charset="-122"/>
                 <a:cs typeface="Calibri" pitchFamily="34" charset="-120"/>
               </a:rPr>
-              <a:t>Three playbooks, configured entirely through a JSON List.</a:t>
+              <a:t>Five playbooks + a tracker automation, driven by two Jobs and one JSON List.</a:t>
             </a:r>
             <a:endParaRPr lang="en-US" sz="1000" dirty="0"/>
           </a:p>

--- a/docs/KOI_Content_Pack_Overview.pptx
+++ b/docs/KOI_Content_Pack_Overview.pptx
@@ -3270,7 +3270,7 @@
                 <a:ea typeface="Calibri" pitchFamily="34" charset="-122"/>
                 <a:cs typeface="Calibri" pitchFamily="34" charset="-120"/>
               </a:rPr>
-              <a:t>Attach KOI - Alert Triage to a KOI alert and confirm the investigation summaries and verdict appear in the war room.</a:t>
+              <a:t>Attach KOI IR - Alert Triage to a KOI alert and confirm the investigation summaries and verdict appear in the war room.</a:t>
             </a:r>
             <a:endParaRPr lang="en-US" sz="1100" dirty="0"/>
           </a:p>
